--- a/02-geometry-of-least-squares/00-pre-session/slides-github-and-teamwork.pptx
+++ b/02-geometry-of-least-squares/00-pre-session/slides-github-and-teamwork.pptx
@@ -945,7 +945,7 @@
           <a:bodyPr anchor="t"/>
           <a:lstStyle>
             <a:lvl1pPr algn="l">
-              <a:defRPr sz="2350" b="1" cap="all"/>
+              <a:defRPr sz="1850" b="1" cap="all"/>
             </a:lvl1pPr>
           </a:lstStyle>
           <a:p>
@@ -977,7 +977,7 @@
           <a:lstStyle>
             <a:lvl1pPr marL="0" indent="0">
               <a:buNone/>
-              <a:defRPr sz="1150">
+              <a:defRPr sz="950">
                 <a:solidFill>
                   <a:schemeClr val="tx1">
                     <a:tint val="75000"/>
@@ -987,7 +987,7 @@
             </a:lvl1pPr>
             <a:lvl2pPr marL="342900" indent="0">
               <a:buNone/>
-              <a:defRPr sz="1050">
+              <a:defRPr sz="850">
                 <a:solidFill>
                   <a:schemeClr val="tx1">
                     <a:tint val="75000"/>
@@ -997,7 +997,7 @@
             </a:lvl2pPr>
             <a:lvl3pPr marL="685800" indent="0">
               <a:buNone/>
-              <a:defRPr sz="950">
+              <a:defRPr sz="750">
                 <a:solidFill>
                   <a:schemeClr val="tx1">
                     <a:tint val="75000"/>
@@ -1007,7 +1007,7 @@
             </a:lvl3pPr>
             <a:lvl4pPr marL="1028700" indent="0">
               <a:buNone/>
-              <a:defRPr sz="800">
+              <a:defRPr sz="650">
                 <a:solidFill>
                   <a:schemeClr val="tx1">
                     <a:tint val="75000"/>
@@ -1017,7 +1017,7 @@
             </a:lvl4pPr>
             <a:lvl5pPr marL="1371600" indent="0">
               <a:buNone/>
-              <a:defRPr sz="800">
+              <a:defRPr sz="650">
                 <a:solidFill>
                   <a:schemeClr val="tx1">
                     <a:tint val="75000"/>
@@ -1027,7 +1027,7 @@
             </a:lvl5pPr>
             <a:lvl6pPr marL="1714500" indent="0">
               <a:buNone/>
-              <a:defRPr sz="800">
+              <a:defRPr sz="650">
                 <a:solidFill>
                   <a:schemeClr val="tx1">
                     <a:tint val="75000"/>
@@ -1037,7 +1037,7 @@
             </a:lvl6pPr>
             <a:lvl7pPr marL="2057400" indent="0">
               <a:buNone/>
-              <a:defRPr sz="800">
+              <a:defRPr sz="650">
                 <a:solidFill>
                   <a:schemeClr val="tx1">
                     <a:tint val="75000"/>
@@ -1047,7 +1047,7 @@
             </a:lvl7pPr>
             <a:lvl8pPr marL="2400300" indent="0">
               <a:buNone/>
-              <a:defRPr sz="800">
+              <a:defRPr sz="650">
                 <a:solidFill>
                   <a:schemeClr val="tx1">
                     <a:tint val="75000"/>
@@ -1057,7 +1057,7 @@
             </a:lvl8pPr>
             <a:lvl9pPr marL="2743200" indent="0">
               <a:buNone/>
-              <a:defRPr sz="800">
+              <a:defRPr sz="650">
                 <a:solidFill>
                   <a:schemeClr val="tx1">
                     <a:tint val="75000"/>
@@ -1212,31 +1212,31 @@
           <a:bodyPr/>
           <a:lstStyle>
             <a:lvl1pPr>
-              <a:defRPr sz="1650"/>
+              <a:defRPr sz="1300"/>
             </a:lvl1pPr>
             <a:lvl2pPr>
-              <a:defRPr sz="1400"/>
+              <a:defRPr sz="1100"/>
             </a:lvl2pPr>
             <a:lvl3pPr>
-              <a:defRPr sz="1150"/>
+              <a:defRPr sz="950"/>
             </a:lvl3pPr>
             <a:lvl4pPr>
-              <a:defRPr sz="1050"/>
+              <a:defRPr sz="850"/>
             </a:lvl4pPr>
             <a:lvl5pPr>
-              <a:defRPr sz="1050"/>
+              <a:defRPr sz="850"/>
             </a:lvl5pPr>
             <a:lvl6pPr>
-              <a:defRPr sz="1050"/>
+              <a:defRPr sz="850"/>
             </a:lvl6pPr>
             <a:lvl7pPr>
-              <a:defRPr sz="1050"/>
+              <a:defRPr sz="850"/>
             </a:lvl7pPr>
             <a:lvl8pPr>
-              <a:defRPr sz="1050"/>
+              <a:defRPr sz="850"/>
             </a:lvl8pPr>
             <a:lvl9pPr>
-              <a:defRPr sz="1050"/>
+              <a:defRPr sz="850"/>
             </a:lvl9pPr>
           </a:lstStyle>
           <a:p>
@@ -1296,31 +1296,31 @@
           <a:bodyPr/>
           <a:lstStyle>
             <a:lvl1pPr>
-              <a:defRPr sz="1650"/>
+              <a:defRPr sz="1300"/>
             </a:lvl1pPr>
             <a:lvl2pPr>
-              <a:defRPr sz="1400"/>
+              <a:defRPr sz="1100"/>
             </a:lvl2pPr>
             <a:lvl3pPr>
-              <a:defRPr sz="1150"/>
+              <a:defRPr sz="950"/>
             </a:lvl3pPr>
             <a:lvl4pPr>
-              <a:defRPr sz="1050"/>
+              <a:defRPr sz="850"/>
             </a:lvl4pPr>
             <a:lvl5pPr>
-              <a:defRPr sz="1050"/>
+              <a:defRPr sz="850"/>
             </a:lvl5pPr>
             <a:lvl6pPr>
-              <a:defRPr sz="1050"/>
+              <a:defRPr sz="850"/>
             </a:lvl6pPr>
             <a:lvl7pPr>
-              <a:defRPr sz="1050"/>
+              <a:defRPr sz="850"/>
             </a:lvl7pPr>
             <a:lvl8pPr>
-              <a:defRPr sz="1050"/>
+              <a:defRPr sz="850"/>
             </a:lvl8pPr>
             <a:lvl9pPr>
-              <a:defRPr sz="1050"/>
+              <a:defRPr sz="850"/>
             </a:lvl9pPr>
           </a:lstStyle>
           <a:p>
@@ -1502,39 +1502,39 @@
           <a:lstStyle>
             <a:lvl1pPr marL="0" indent="0">
               <a:buNone/>
-              <a:defRPr sz="1400" b="1"/>
+              <a:defRPr sz="1100" b="1"/>
             </a:lvl1pPr>
             <a:lvl2pPr marL="342900" indent="0">
               <a:buNone/>
-              <a:defRPr sz="1150" b="1"/>
+              <a:defRPr sz="950" b="1"/>
             </a:lvl2pPr>
             <a:lvl3pPr marL="685800" indent="0">
               <a:buNone/>
-              <a:defRPr sz="1050" b="1"/>
+              <a:defRPr sz="850" b="1"/>
             </a:lvl3pPr>
             <a:lvl4pPr marL="1028700" indent="0">
               <a:buNone/>
-              <a:defRPr sz="950" b="1"/>
+              <a:defRPr sz="750" b="1"/>
             </a:lvl4pPr>
             <a:lvl5pPr marL="1371600" indent="0">
               <a:buNone/>
-              <a:defRPr sz="950" b="1"/>
+              <a:defRPr sz="750" b="1"/>
             </a:lvl5pPr>
             <a:lvl6pPr marL="1714500" indent="0">
               <a:buNone/>
-              <a:defRPr sz="950" b="1"/>
+              <a:defRPr sz="750" b="1"/>
             </a:lvl6pPr>
             <a:lvl7pPr marL="2057400" indent="0">
               <a:buNone/>
-              <a:defRPr sz="950" b="1"/>
+              <a:defRPr sz="750" b="1"/>
             </a:lvl7pPr>
             <a:lvl8pPr marL="2400300" indent="0">
               <a:buNone/>
-              <a:defRPr sz="950" b="1"/>
+              <a:defRPr sz="750" b="1"/>
             </a:lvl8pPr>
             <a:lvl9pPr marL="2743200" indent="0">
               <a:buNone/>
-              <a:defRPr sz="950" b="1"/>
+              <a:defRPr sz="750" b="1"/>
             </a:lvl9pPr>
           </a:lstStyle>
           <a:p>
@@ -1566,31 +1566,31 @@
           <a:bodyPr/>
           <a:lstStyle>
             <a:lvl1pPr>
-              <a:defRPr sz="1400"/>
+              <a:defRPr sz="1100"/>
             </a:lvl1pPr>
             <a:lvl2pPr>
-              <a:defRPr sz="1150"/>
+              <a:defRPr sz="950"/>
             </a:lvl2pPr>
             <a:lvl3pPr>
-              <a:defRPr sz="1050"/>
+              <a:defRPr sz="850"/>
             </a:lvl3pPr>
             <a:lvl4pPr>
-              <a:defRPr sz="950"/>
+              <a:defRPr sz="750"/>
             </a:lvl4pPr>
             <a:lvl5pPr>
-              <a:defRPr sz="950"/>
+              <a:defRPr sz="750"/>
             </a:lvl5pPr>
             <a:lvl6pPr>
-              <a:defRPr sz="950"/>
+              <a:defRPr sz="750"/>
             </a:lvl6pPr>
             <a:lvl7pPr>
-              <a:defRPr sz="950"/>
+              <a:defRPr sz="750"/>
             </a:lvl7pPr>
             <a:lvl8pPr>
-              <a:defRPr sz="950"/>
+              <a:defRPr sz="750"/>
             </a:lvl8pPr>
             <a:lvl9pPr>
-              <a:defRPr sz="950"/>
+              <a:defRPr sz="750"/>
             </a:lvl9pPr>
           </a:lstStyle>
           <a:p>
@@ -1651,39 +1651,39 @@
           <a:lstStyle>
             <a:lvl1pPr marL="0" indent="0">
               <a:buNone/>
-              <a:defRPr sz="1400" b="1"/>
+              <a:defRPr sz="1100" b="1"/>
             </a:lvl1pPr>
             <a:lvl2pPr marL="342900" indent="0">
               <a:buNone/>
-              <a:defRPr sz="1150" b="1"/>
+              <a:defRPr sz="950" b="1"/>
             </a:lvl2pPr>
             <a:lvl3pPr marL="685800" indent="0">
               <a:buNone/>
-              <a:defRPr sz="1050" b="1"/>
+              <a:defRPr sz="850" b="1"/>
             </a:lvl3pPr>
             <a:lvl4pPr marL="1028700" indent="0">
               <a:buNone/>
-              <a:defRPr sz="950" b="1"/>
+              <a:defRPr sz="750" b="1"/>
             </a:lvl4pPr>
             <a:lvl5pPr marL="1371600" indent="0">
               <a:buNone/>
-              <a:defRPr sz="950" b="1"/>
+              <a:defRPr sz="750" b="1"/>
             </a:lvl5pPr>
             <a:lvl6pPr marL="1714500" indent="0">
               <a:buNone/>
-              <a:defRPr sz="950" b="1"/>
+              <a:defRPr sz="750" b="1"/>
             </a:lvl6pPr>
             <a:lvl7pPr marL="2057400" indent="0">
               <a:buNone/>
-              <a:defRPr sz="950" b="1"/>
+              <a:defRPr sz="750" b="1"/>
             </a:lvl7pPr>
             <a:lvl8pPr marL="2400300" indent="0">
               <a:buNone/>
-              <a:defRPr sz="950" b="1"/>
+              <a:defRPr sz="750" b="1"/>
             </a:lvl8pPr>
             <a:lvl9pPr marL="2743200" indent="0">
               <a:buNone/>
-              <a:defRPr sz="950" b="1"/>
+              <a:defRPr sz="750" b="1"/>
             </a:lvl9pPr>
           </a:lstStyle>
           <a:p>
@@ -1715,31 +1715,31 @@
           <a:bodyPr/>
           <a:lstStyle>
             <a:lvl1pPr>
-              <a:defRPr sz="1400"/>
+              <a:defRPr sz="1100"/>
             </a:lvl1pPr>
             <a:lvl2pPr>
-              <a:defRPr sz="1150"/>
+              <a:defRPr sz="950"/>
             </a:lvl2pPr>
             <a:lvl3pPr>
-              <a:defRPr sz="1050"/>
+              <a:defRPr sz="850"/>
             </a:lvl3pPr>
             <a:lvl4pPr>
-              <a:defRPr sz="950"/>
+              <a:defRPr sz="750"/>
             </a:lvl4pPr>
             <a:lvl5pPr>
-              <a:defRPr sz="950"/>
+              <a:defRPr sz="750"/>
             </a:lvl5pPr>
             <a:lvl6pPr>
-              <a:defRPr sz="950"/>
+              <a:defRPr sz="750"/>
             </a:lvl6pPr>
             <a:lvl7pPr>
-              <a:defRPr sz="950"/>
+              <a:defRPr sz="750"/>
             </a:lvl7pPr>
             <a:lvl8pPr>
-              <a:defRPr sz="950"/>
+              <a:defRPr sz="750"/>
             </a:lvl8pPr>
             <a:lvl9pPr>
-              <a:defRPr sz="950"/>
+              <a:defRPr sz="750"/>
             </a:lvl9pPr>
           </a:lstStyle>
           <a:p>
@@ -2106,7 +2106,7 @@
           <a:bodyPr anchor="b"/>
           <a:lstStyle>
             <a:lvl1pPr algn="l">
-              <a:defRPr sz="1150" b="1"/>
+              <a:defRPr sz="950" b="1"/>
             </a:lvl1pPr>
           </a:lstStyle>
           <a:p>
@@ -2137,31 +2137,31 @@
           <a:bodyPr/>
           <a:lstStyle>
             <a:lvl1pPr>
-              <a:defRPr sz="1850"/>
+              <a:defRPr sz="1500"/>
             </a:lvl1pPr>
             <a:lvl2pPr>
-              <a:defRPr sz="1650"/>
+              <a:defRPr sz="1300"/>
             </a:lvl2pPr>
             <a:lvl3pPr>
-              <a:defRPr sz="1400"/>
+              <a:defRPr sz="1100"/>
             </a:lvl3pPr>
             <a:lvl4pPr>
-              <a:defRPr sz="1150"/>
+              <a:defRPr sz="950"/>
             </a:lvl4pPr>
             <a:lvl5pPr>
-              <a:defRPr sz="1150"/>
+              <a:defRPr sz="950"/>
             </a:lvl5pPr>
             <a:lvl6pPr>
-              <a:defRPr sz="1150"/>
+              <a:defRPr sz="950"/>
             </a:lvl6pPr>
             <a:lvl7pPr>
-              <a:defRPr sz="1150"/>
+              <a:defRPr sz="950"/>
             </a:lvl7pPr>
             <a:lvl8pPr>
-              <a:defRPr sz="1150"/>
+              <a:defRPr sz="950"/>
             </a:lvl8pPr>
             <a:lvl9pPr>
-              <a:defRPr sz="1150"/>
+              <a:defRPr sz="950"/>
             </a:lvl9pPr>
           </a:lstStyle>
           <a:p>
@@ -2222,39 +2222,39 @@
           <a:lstStyle>
             <a:lvl1pPr marL="0" indent="0">
               <a:buNone/>
-              <a:defRPr sz="800"/>
+              <a:defRPr sz="650"/>
             </a:lvl1pPr>
             <a:lvl2pPr marL="342900" indent="0">
               <a:buNone/>
-              <a:defRPr sz="700"/>
+              <a:defRPr sz="550"/>
             </a:lvl2pPr>
             <a:lvl3pPr marL="685800" indent="0">
               <a:buNone/>
-              <a:defRPr sz="700"/>
+              <a:defRPr sz="550"/>
             </a:lvl3pPr>
             <a:lvl4pPr marL="1028700" indent="0">
               <a:buNone/>
-              <a:defRPr sz="700"/>
+              <a:defRPr sz="550"/>
             </a:lvl4pPr>
             <a:lvl5pPr marL="1371600" indent="0">
               <a:buNone/>
-              <a:defRPr sz="700"/>
+              <a:defRPr sz="550"/>
             </a:lvl5pPr>
             <a:lvl6pPr marL="1714500" indent="0">
               <a:buNone/>
-              <a:defRPr sz="700"/>
+              <a:defRPr sz="550"/>
             </a:lvl6pPr>
             <a:lvl7pPr marL="2057400" indent="0">
               <a:buNone/>
-              <a:defRPr sz="700"/>
+              <a:defRPr sz="550"/>
             </a:lvl7pPr>
             <a:lvl8pPr marL="2400300" indent="0">
               <a:buNone/>
-              <a:defRPr sz="700"/>
+              <a:defRPr sz="550"/>
             </a:lvl8pPr>
             <a:lvl9pPr marL="2743200" indent="0">
               <a:buNone/>
-              <a:defRPr sz="700"/>
+              <a:defRPr sz="550"/>
             </a:lvl9pPr>
           </a:lstStyle>
           <a:p>
@@ -2381,7 +2381,7 @@
           <a:bodyPr anchor="b"/>
           <a:lstStyle>
             <a:lvl1pPr algn="l">
-              <a:defRPr sz="1150" b="1"/>
+              <a:defRPr sz="950" b="1"/>
             </a:lvl1pPr>
           </a:lstStyle>
           <a:p>
@@ -2413,39 +2413,39 @@
           <a:lstStyle>
             <a:lvl1pPr marL="0" indent="0">
               <a:buNone/>
-              <a:defRPr sz="1850"/>
+              <a:defRPr sz="1500"/>
             </a:lvl1pPr>
             <a:lvl2pPr marL="342900" indent="0">
               <a:buNone/>
-              <a:defRPr sz="1650"/>
+              <a:defRPr sz="1300"/>
             </a:lvl2pPr>
             <a:lvl3pPr marL="685800" indent="0">
               <a:buNone/>
-              <a:defRPr sz="1400"/>
+              <a:defRPr sz="1100"/>
             </a:lvl3pPr>
             <a:lvl4pPr marL="1028700" indent="0">
               <a:buNone/>
-              <a:defRPr sz="1150"/>
+              <a:defRPr sz="950"/>
             </a:lvl4pPr>
             <a:lvl5pPr marL="1371600" indent="0">
               <a:buNone/>
-              <a:defRPr sz="1150"/>
+              <a:defRPr sz="950"/>
             </a:lvl5pPr>
             <a:lvl6pPr marL="1714500" indent="0">
               <a:buNone/>
-              <a:defRPr sz="1150"/>
+              <a:defRPr sz="950"/>
             </a:lvl6pPr>
             <a:lvl7pPr marL="2057400" indent="0">
               <a:buNone/>
-              <a:defRPr sz="1150"/>
+              <a:defRPr sz="950"/>
             </a:lvl7pPr>
             <a:lvl8pPr marL="2400300" indent="0">
               <a:buNone/>
-              <a:defRPr sz="1150"/>
+              <a:defRPr sz="950"/>
             </a:lvl8pPr>
             <a:lvl9pPr marL="2743200" indent="0">
               <a:buNone/>
-              <a:defRPr sz="1150"/>
+              <a:defRPr sz="950"/>
             </a:lvl9pPr>
           </a:lstStyle>
           <a:p>
@@ -2474,39 +2474,39 @@
           <a:lstStyle>
             <a:lvl1pPr marL="0" indent="0">
               <a:buNone/>
-              <a:defRPr sz="800"/>
+              <a:defRPr sz="650"/>
             </a:lvl1pPr>
             <a:lvl2pPr marL="342900" indent="0">
               <a:buNone/>
-              <a:defRPr sz="700"/>
+              <a:defRPr sz="550"/>
             </a:lvl2pPr>
             <a:lvl3pPr marL="685800" indent="0">
               <a:buNone/>
-              <a:defRPr sz="700"/>
+              <a:defRPr sz="550"/>
             </a:lvl3pPr>
             <a:lvl4pPr marL="1028700" indent="0">
               <a:buNone/>
-              <a:defRPr sz="700"/>
+              <a:defRPr sz="550"/>
             </a:lvl4pPr>
             <a:lvl5pPr marL="1371600" indent="0">
               <a:buNone/>
-              <a:defRPr sz="700"/>
+              <a:defRPr sz="550"/>
             </a:lvl5pPr>
             <a:lvl6pPr marL="1714500" indent="0">
               <a:buNone/>
-              <a:defRPr sz="700"/>
+              <a:defRPr sz="550"/>
             </a:lvl6pPr>
             <a:lvl7pPr marL="2057400" indent="0">
               <a:buNone/>
-              <a:defRPr sz="700"/>
+              <a:defRPr sz="550"/>
             </a:lvl7pPr>
             <a:lvl8pPr marL="2400300" indent="0">
               <a:buNone/>
-              <a:defRPr sz="700"/>
+              <a:defRPr sz="550"/>
             </a:lvl8pPr>
             <a:lvl9pPr marL="2743200" indent="0">
               <a:buNone/>
-              <a:defRPr sz="700"/>
+              <a:defRPr sz="550"/>
             </a:lvl9pPr>
           </a:lstStyle>
           <a:p>
@@ -2734,7 +2734,7 @@
           <a:bodyPr anchor="ctr" bIns="45720" lIns="91440" rIns="91440" rtlCol="0" tIns="45720" vert="horz"/>
           <a:lstStyle>
             <a:lvl1pPr algn="l">
-              <a:defRPr sz="700">
+              <a:defRPr sz="550">
                 <a:solidFill>
                   <a:schemeClr val="tx1">
                     <a:tint val="75000"/>
@@ -2775,7 +2775,7 @@
           <a:bodyPr anchor="ctr" bIns="45720" lIns="91440" rIns="91440" rtlCol="0" tIns="45720" vert="horz"/>
           <a:lstStyle>
             <a:lvl1pPr algn="ctr">
-              <a:defRPr sz="700">
+              <a:defRPr sz="550">
                 <a:solidFill>
                   <a:schemeClr val="tx1">
                     <a:tint val="75000"/>
@@ -2812,7 +2812,7 @@
           <a:bodyPr anchor="ctr" bIns="45720" lIns="91440" rIns="91440" rtlCol="0" tIns="45720" vert="horz"/>
           <a:lstStyle>
             <a:lvl1pPr algn="r">
-              <a:defRPr sz="700">
+              <a:defRPr sz="550">
                 <a:solidFill>
                   <a:schemeClr val="tx1">
                     <a:tint val="75000"/>
@@ -2858,7 +2858,7 @@
           <a:spcPct val="0"/>
         </a:spcBef>
         <a:buNone/>
-        <a:defRPr kern="1200" sz="2550">
+        <a:defRPr kern="1200" sz="2050">
           <a:solidFill>
             <a:schemeClr val="tx1"/>
           </a:solidFill>
@@ -2875,7 +2875,7 @@
         </a:spcBef>
         <a:buFont typeface="Arial"/>
         <a:buChar char="•"/>
-        <a:defRPr kern="1200" sz="1850">
+        <a:defRPr kern="1200" sz="1500">
           <a:solidFill>
             <a:schemeClr val="tx1"/>
           </a:solidFill>
@@ -2890,7 +2890,7 @@
         </a:spcBef>
         <a:buFont typeface="Arial"/>
         <a:buChar char="–"/>
-        <a:defRPr kern="1200" sz="1650">
+        <a:defRPr kern="1200" sz="1300">
           <a:solidFill>
             <a:schemeClr val="tx1"/>
           </a:solidFill>
@@ -2905,7 +2905,7 @@
         </a:spcBef>
         <a:buFont typeface="Arial"/>
         <a:buChar char="•"/>
-        <a:defRPr kern="1200" sz="1400">
+        <a:defRPr kern="1200" sz="1100">
           <a:solidFill>
             <a:schemeClr val="tx1"/>
           </a:solidFill>
@@ -2920,7 +2920,7 @@
         </a:spcBef>
         <a:buFont typeface="Arial"/>
         <a:buChar char="–"/>
-        <a:defRPr kern="1200" sz="1150">
+        <a:defRPr kern="1200" sz="950">
           <a:solidFill>
             <a:schemeClr val="tx1"/>
           </a:solidFill>
@@ -2935,7 +2935,7 @@
         </a:spcBef>
         <a:buFont typeface="Arial"/>
         <a:buChar char="»"/>
-        <a:defRPr kern="1200" sz="1150">
+        <a:defRPr kern="1200" sz="950">
           <a:solidFill>
             <a:schemeClr val="tx1"/>
           </a:solidFill>
@@ -2950,7 +2950,7 @@
         </a:spcBef>
         <a:buFont typeface="Arial"/>
         <a:buChar char="•"/>
-        <a:defRPr kern="1200" sz="1150">
+        <a:defRPr kern="1200" sz="950">
           <a:solidFill>
             <a:schemeClr val="tx1"/>
           </a:solidFill>
@@ -2965,7 +2965,7 @@
         </a:spcBef>
         <a:buFont typeface="Arial"/>
         <a:buChar char="•"/>
-        <a:defRPr kern="1200" sz="1150">
+        <a:defRPr kern="1200" sz="950">
           <a:solidFill>
             <a:schemeClr val="tx1"/>
           </a:solidFill>
@@ -2980,7 +2980,7 @@
         </a:spcBef>
         <a:buFont typeface="Arial"/>
         <a:buChar char="•"/>
-        <a:defRPr kern="1200" sz="1150">
+        <a:defRPr kern="1200" sz="950">
           <a:solidFill>
             <a:schemeClr val="tx1"/>
           </a:solidFill>
@@ -2995,7 +2995,7 @@
         </a:spcBef>
         <a:buFont typeface="Arial"/>
         <a:buChar char="•"/>
-        <a:defRPr kern="1200" sz="1150">
+        <a:defRPr kern="1200" sz="950">
           <a:solidFill>
             <a:schemeClr val="tx1"/>
           </a:solidFill>
@@ -3010,7 +3010,7 @@
         <a:defRPr lang="en-US"/>
       </a:defPPr>
       <a:lvl1pPr algn="l" defTabSz="342900" eaLnBrk="1" hangingPunct="1" latinLnBrk="0" marL="0" rtl="0">
-        <a:defRPr kern="1200" sz="1050">
+        <a:defRPr kern="1200" sz="850">
           <a:solidFill>
             <a:schemeClr val="tx1"/>
           </a:solidFill>
@@ -3020,7 +3020,7 @@
         </a:defRPr>
       </a:lvl1pPr>
       <a:lvl2pPr algn="l" defTabSz="342900" eaLnBrk="1" hangingPunct="1" latinLnBrk="0" marL="342900" rtl="0">
-        <a:defRPr kern="1200" sz="1050">
+        <a:defRPr kern="1200" sz="850">
           <a:solidFill>
             <a:schemeClr val="tx1"/>
           </a:solidFill>
@@ -3030,7 +3030,7 @@
         </a:defRPr>
       </a:lvl2pPr>
       <a:lvl3pPr algn="l" defTabSz="342900" eaLnBrk="1" hangingPunct="1" latinLnBrk="0" marL="685800" rtl="0">
-        <a:defRPr kern="1200" sz="1050">
+        <a:defRPr kern="1200" sz="850">
           <a:solidFill>
             <a:schemeClr val="tx1"/>
           </a:solidFill>
@@ -3040,7 +3040,7 @@
         </a:defRPr>
       </a:lvl3pPr>
       <a:lvl4pPr algn="l" defTabSz="342900" eaLnBrk="1" hangingPunct="1" latinLnBrk="0" marL="1028700" rtl="0">
-        <a:defRPr kern="1200" sz="1050">
+        <a:defRPr kern="1200" sz="850">
           <a:solidFill>
             <a:schemeClr val="tx1"/>
           </a:solidFill>
@@ -3050,7 +3050,7 @@
         </a:defRPr>
       </a:lvl4pPr>
       <a:lvl5pPr algn="l" defTabSz="342900" eaLnBrk="1" hangingPunct="1" latinLnBrk="0" marL="1371600" rtl="0">
-        <a:defRPr kern="1200" sz="1050">
+        <a:defRPr kern="1200" sz="850">
           <a:solidFill>
             <a:schemeClr val="tx1"/>
           </a:solidFill>
@@ -3060,7 +3060,7 @@
         </a:defRPr>
       </a:lvl5pPr>
       <a:lvl6pPr algn="l" defTabSz="342900" eaLnBrk="1" hangingPunct="1" latinLnBrk="0" marL="1714500" rtl="0">
-        <a:defRPr kern="1200" sz="1050">
+        <a:defRPr kern="1200" sz="850">
           <a:solidFill>
             <a:schemeClr val="tx1"/>
           </a:solidFill>
@@ -3070,7 +3070,7 @@
         </a:defRPr>
       </a:lvl6pPr>
       <a:lvl7pPr algn="l" defTabSz="342900" eaLnBrk="1" hangingPunct="1" latinLnBrk="0" marL="2057400" rtl="0">
-        <a:defRPr kern="1200" sz="1050">
+        <a:defRPr kern="1200" sz="850">
           <a:solidFill>
             <a:schemeClr val="tx1"/>
           </a:solidFill>
@@ -3080,7 +3080,7 @@
         </a:defRPr>
       </a:lvl7pPr>
       <a:lvl8pPr algn="l" defTabSz="342900" eaLnBrk="1" hangingPunct="1" latinLnBrk="0" marL="2400300" rtl="0">
-        <a:defRPr kern="1200" sz="1050">
+        <a:defRPr kern="1200" sz="850">
           <a:solidFill>
             <a:schemeClr val="tx1"/>
           </a:solidFill>
@@ -3090,7 +3090,7 @@
         </a:defRPr>
       </a:lvl8pPr>
       <a:lvl9pPr algn="l" defTabSz="342900" eaLnBrk="1" hangingPunct="1" latinLnBrk="0" marL="2743200" rtl="0">
-        <a:defRPr kern="1200" sz="1050">
+        <a:defRPr kern="1200" sz="850">
           <a:solidFill>
             <a:schemeClr val="tx1"/>
           </a:solidFill>

--- a/02-geometry-of-least-squares/00-pre-session/slides-github-and-teamwork.pptx
+++ b/02-geometry-of-least-squares/00-pre-session/slides-github-and-teamwork.pptx
@@ -2827,6 +2827,72 @@
               <a:t>‹#›</a:t>
             </a:fld>
             <a:endParaRPr lang="en-US"/>
+          </a:p>
+        </p:txBody>
+      </p:sp>
+      <p:sp>
+        <p:nvSpPr>
+          <p:cNvPr id="7" name="Author Footer"/>
+          <p:cNvSpPr txBox="1"/>
+          <p:nvPr/>
+        </p:nvSpPr>
+        <p:spPr>
+          <a:xfrm>
+            <a:off x="457200" y="4735000"/>
+            <a:ext cx="5000000" cy="260000"/>
+          </a:xfrm>
+          <a:prstGeom prst="rect">
+            <a:avLst/>
+          </a:prstGeom>
+          <a:noFill/>
+        </p:spPr>
+        <p:txBody>
+          <a:bodyPr anchor="ctr" bIns="0" lIns="0" rIns="0" tIns="0" wrap="square"/>
+          <a:lstStyle/>
+          <a:p>
+            <a:pPr algn="l"/>
+            <a:r>
+              <a:rPr dirty="0" lang="en-US" sz="900">
+                <a:solidFill>
+                  <a:srgbClr val="6E7275"/>
+                </a:solidFill>
+                <a:latin typeface="+mn-lt"/>
+              </a:rPr>
+              <a:t>Thierry Warin, PhD</a:t>
+            </a:r>
+          </a:p>
+        </p:txBody>
+      </p:sp>
+      <p:sp>
+        <p:nvSpPr>
+          <p:cNvPr id="8" name="Slide Number Footer"/>
+          <p:cNvSpPr txBox="1"/>
+          <p:nvPr/>
+        </p:nvSpPr>
+        <p:spPr>
+          <a:xfrm>
+            <a:off x="7200000" y="4735000"/>
+            <a:ext cx="1486800" cy="260000"/>
+          </a:xfrm>
+          <a:prstGeom prst="rect">
+            <a:avLst/>
+          </a:prstGeom>
+          <a:noFill/>
+        </p:spPr>
+        <p:txBody>
+          <a:bodyPr anchor="ctr" bIns="0" lIns="0" rIns="0" tIns="0" wrap="square"/>
+          <a:lstStyle/>
+          <a:p>
+            <a:pPr algn="r"/>
+            <a:fld id="{9B1A2C3D-4E5F-6A7B-8C9D-0E1F2A3B4C5D}" type="slidenum">
+              <a:rPr dirty="0" lang="en-US" sz="900">
+                <a:solidFill>
+                  <a:srgbClr val="6E7275"/>
+                </a:solidFill>
+                <a:latin typeface="+mn-lt"/>
+              </a:rPr>
+              <a:t>2</a:t>
+            </a:fld>
           </a:p>
         </p:txBody>
       </p:sp>
@@ -3207,7 +3273,7 @@
             </a:pPr>
             <a:r>
               <a:rPr/>
-              <a:t>18 August 2026</a:t>
+              <a:t>19 August 2026</a:t>
             </a:r>
           </a:p>
         </p:txBody>

--- a/02-geometry-of-least-squares/00-pre-session/slides-github-and-teamwork.pptx
+++ b/02-geometry-of-least-squares/00-pre-session/slides-github-and-teamwork.pptx
@@ -3273,7 +3273,7 @@
             </a:pPr>
             <a:r>
               <a:rPr/>
-              <a:t>19 August 2026</a:t>
+              <a:t>20 August 2026</a:t>
             </a:r>
           </a:p>
         </p:txBody>
@@ -3638,269 +3638,112 @@
             <p:ph type="title"/>
           </p:nvPr>
         </p:nvSpPr>
-        <p:spPr>
-          <a:xfrm>
-            <a:off x="457201" y="204787"/>
-            <a:ext cx="3008313" cy="871538"/>
-          </a:xfrm>
-        </p:spPr>
-        <p:txBody>
-          <a:bodyPr/>
-          <a:lstStyle/>
-          <a:p>
-            <a:pPr lvl="0" indent="0" marL="0">
-              <a:buNone/>
-            </a:pPr>
-            <a:r>
-              <a:rPr/>
-              <a:t>Create your group repository</a:t>
-            </a:r>
-          </a:p>
-        </p:txBody>
-      </p:sp>
-      <p:sp>
-        <p:nvSpPr>
-          <p:cNvPr id="4" name="Text Placeholder 3"/>
-          <p:cNvSpPr>
-            <a:spLocks noGrp="1"/>
-          </p:cNvSpPr>
-          <p:nvPr>
-            <p:ph idx="2" sz="half" type="body"/>
-          </p:nvPr>
-        </p:nvSpPr>
-        <p:spPr/>
-        <p:txBody>
-          <a:bodyPr/>
-          <a:lstStyle/>
-          <a:p>
-            <a:pPr lvl="0" indent="0" marL="0">
-              <a:buNone/>
-            </a:pPr>
+        <p:spPr/>
+        <p:txBody>
+          <a:bodyPr/>
+          <a:lstStyle/>
+          <a:p>
+            <a:pPr lvl="0" indent="0" marL="0">
+              <a:buNone/>
+            </a:pPr>
+            <a:r>
+              <a:rPr/>
+              <a:t>You do not create a repository</a:t>
+            </a:r>
+          </a:p>
+        </p:txBody>
+      </p:sp>
+      <p:sp>
+        <p:nvSpPr>
+          <p:cNvPr id="3" name="Content Placeholder 2"/>
+          <p:cNvSpPr>
+            <a:spLocks noGrp="1"/>
+          </p:cNvSpPr>
+          <p:nvPr>
+            <p:ph idx="1"/>
+          </p:nvPr>
+        </p:nvSpPr>
+        <p:spPr/>
+        <p:txBody>
+          <a:bodyPr/>
+          <a:lstStyle/>
+          <a:p>
+            <a:pPr lvl="0" indent="0" marL="0">
+              <a:buNone/>
+            </a:pPr>
+            <a:r>
+              <a:rPr/>
+              <a:t>There is </a:t>
+            </a:r>
             <a:r>
               <a:rPr b="1"/>
-              <a:t>One person per group</a:t>
-            </a:r>
-            <a:r>
-              <a:rPr/>
-              <a:t> does this. On github.com, click </a:t>
+              <a:t>one repository for the whole course</a:t>
+            </a:r>
+            <a:r>
+              <a:rPr/>
+              <a:t> — the one you downloaded as a ZIP in Session 01.</a:t>
+            </a:r>
+          </a:p>
+          <a:p>
+            <a:pPr lvl="0"/>
+            <a:r>
+              <a:rPr>
+                <a:latin typeface="Courier"/>
+              </a:rPr>
+              <a:t>main</a:t>
+            </a:r>
+            <a:r>
+              <a:rPr/>
+              <a:t> is the instructor’s branch. You never push to it.</a:t>
+            </a:r>
+          </a:p>
+          <a:p>
+            <a:pPr lvl="0"/>
+            <a:r>
+              <a:rPr/>
+              <a:t>Your group gets </a:t>
             </a:r>
             <a:r>
               <a:rPr b="1"/>
-              <a:t>+</a:t>
-            </a:r>
-            <a:r>
-              <a:rPr/>
-              <a:t> → </a:t>
-            </a:r>
+              <a:t>one branch</a:t>
+            </a:r>
+            <a:r>
+              <a:rPr/>
+              <a:t>, </a:t>
+            </a:r>
+            <a:r>
+              <a:rPr>
+                <a:latin typeface="Courier"/>
+              </a:rPr>
+              <a:t>group-XX</a:t>
+            </a:r>
+            <a:r>
+              <a:rPr/>
+              <a:t>.</a:t>
+            </a:r>
+          </a:p>
+          <a:p>
+            <a:pPr lvl="0"/>
+            <a:r>
+              <a:rPr/>
+              <a:t>Everything your group produces is committed there.</a:t>
+            </a:r>
+          </a:p>
+          <a:p>
+            <a:pPr lvl="0" indent="0" marL="0">
+              <a:buNone/>
+            </a:pPr>
             <a:r>
               <a:rPr b="1"/>
-              <a:t>New repository</a:t>
-            </a:r>
-            <a:r>
-              <a:rPr/>
-              <a:t>.</a:t>
-            </a:r>
-          </a:p>
-        </p:txBody>
-      </p:sp>
-      <p:graphicFrame>
-        <p:nvGraphicFramePr>
-          <p:cNvPr id="6" name="Content Placeholder 5"/>
-          <p:cNvGraphicFramePr>
-            <a:graphicFrameLocks noGrp="1"/>
-          </p:cNvGraphicFramePr>
-          <p:nvPr>
-            <p:ph idx="1"/>
-          </p:nvPr>
-        </p:nvGraphicFramePr>
-        <p:xfrm>
-          <a:off x="3568700" y="203200"/>
-          <a:ext cx="5105400" cy="4381500"/>
-        </p:xfrm>
-        <a:graphic>
-          <a:graphicData uri="http://schemas.openxmlformats.org/drawingml/2006/table">
-            <a:tbl>
-              <a:tblPr firstRow="1" bandRow="1">
-                <a:tableStyleId>{5C22544A-7EE6-4342-B048-85BDC9FD1C3A}</a:tableStyleId>
-              </a:tblPr>
-              <a:tblGrid>
-                <a:gridCol w="2552700"/>
-                <a:gridCol w="2552700"/>
-              </a:tblGrid>
-              <a:tr h="0">
-                <a:tc>
-                  <a:txBody>
-                    <a:bodyPr/>
-                    <a:lstStyle/>
-                    <a:p>
-                      <a:pPr lvl="0" indent="0" marL="0">
-                        <a:buNone/>
-                      </a:pPr>
-                      <a:r>
-                        <a:rPr/>
-                        <a:t>Field</a:t>
-                      </a:r>
-                    </a:p>
-                  </a:txBody>
-                  <a:tcPr/>
-                </a:tc>
-                <a:tc>
-                  <a:txBody>
-                    <a:bodyPr/>
-                    <a:lstStyle/>
-                    <a:p>
-                      <a:pPr lvl="0" indent="0" marL="0">
-                        <a:buNone/>
-                      </a:pPr>
-                      <a:r>
-                        <a:rPr/>
-                        <a:t>What to put</a:t>
-                      </a:r>
-                    </a:p>
-                  </a:txBody>
-                  <a:tcPr/>
-                </a:tc>
-              </a:tr>
-              <a:tr h="0">
-                <a:tc>
-                  <a:txBody>
-                    <a:bodyPr/>
-                    <a:lstStyle/>
-                    <a:p>
-                      <a:pPr lvl="0" indent="0" marL="0">
-                        <a:buNone/>
-                      </a:pPr>
-                      <a:r>
-                        <a:rPr b="1"/>
-                        <a:t>Repository name</a:t>
-                      </a:r>
-                    </a:p>
-                  </a:txBody>
-                </a:tc>
-                <a:tc>
-                  <a:txBody>
-                    <a:bodyPr/>
-                    <a:lstStyle/>
-                    <a:p>
-                      <a:pPr lvl="0" indent="0" marL="0">
-                        <a:buNone/>
-                      </a:pPr>
-                      <a:r>
-                        <a:rPr>
-                          <a:latin typeface="Courier"/>
-                        </a:rPr>
-                        <a:t>qmib-gXX</a:t>
-                      </a:r>
-                      <a:r>
-                        <a:rPr/>
-                        <a:t> (XX = your group number)</a:t>
-                      </a:r>
-                    </a:p>
-                  </a:txBody>
-                </a:tc>
-              </a:tr>
-              <a:tr h="0">
-                <a:tc>
-                  <a:txBody>
-                    <a:bodyPr/>
-                    <a:lstStyle/>
-                    <a:p>
-                      <a:pPr lvl="0" indent="0" marL="0">
-                        <a:buNone/>
-                      </a:pPr>
-                      <a:r>
-                        <a:rPr b="1"/>
-                        <a:t>Description</a:t>
-                      </a:r>
-                    </a:p>
-                  </a:txBody>
-                </a:tc>
-                <a:tc>
-                  <a:txBody>
-                    <a:bodyPr/>
-                    <a:lstStyle/>
-                    <a:p>
-                      <a:pPr lvl="0" indent="0" marL="0">
-                        <a:buNone/>
-                      </a:pPr>
-                      <a:r>
-                        <a:rPr>
-                          <a:latin typeface="Courier"/>
-                        </a:rPr>
-                        <a:t>Group work</a:t>
-                      </a:r>
-                    </a:p>
-                  </a:txBody>
-                </a:tc>
-              </a:tr>
-              <a:tr h="0">
-                <a:tc>
-                  <a:txBody>
-                    <a:bodyPr/>
-                    <a:lstStyle/>
-                    <a:p>
-                      <a:pPr lvl="0" indent="0" marL="0">
-                        <a:buNone/>
-                      </a:pPr>
-                      <a:r>
-                        <a:rPr b="1"/>
-                        <a:t>Visibility</a:t>
-                      </a:r>
-                    </a:p>
-                  </a:txBody>
-                </a:tc>
-                <a:tc>
-                  <a:txBody>
-                    <a:bodyPr/>
-                    <a:lstStyle/>
-                    <a:p>
-                      <a:pPr lvl="0" indent="0" marL="0">
-                        <a:buNone/>
-                      </a:pPr>
-                      <a:r>
-                        <a:rPr b="1"/>
-                        <a:t>Private</a:t>
-                      </a:r>
-                    </a:p>
-                  </a:txBody>
-                </a:tc>
-              </a:tr>
-              <a:tr h="0">
-                <a:tc>
-                  <a:txBody>
-                    <a:bodyPr/>
-                    <a:lstStyle/>
-                    <a:p>
-                      <a:pPr lvl="0" indent="0" marL="0">
-                        <a:buNone/>
-                      </a:pPr>
-                      <a:r>
-                        <a:rPr b="1"/>
-                        <a:t>Initialize with README</a:t>
-                      </a:r>
-                    </a:p>
-                  </a:txBody>
-                </a:tc>
-                <a:tc>
-                  <a:txBody>
-                    <a:bodyPr/>
-                    <a:lstStyle/>
-                    <a:p>
-                      <a:pPr lvl="0" indent="0" marL="0">
-                        <a:buNone/>
-                      </a:pPr>
-                      <a:r>
-                        <a:rPr/>
-                        <a:t>✅ tick it</a:t>
-                      </a:r>
-                    </a:p>
-                  </a:txBody>
-                </a:tc>
-              </a:tr>
-            </a:tbl>
-          </a:graphicData>
-        </a:graphic>
-      </p:graphicFrame>
+              <a:t>Send your GitHub username to me.</a:t>
+            </a:r>
+            <a:r>
+              <a:rPr/>
+              <a:t> I add you as a collaborator by hand. You cannot push until I have.</a:t>
+            </a:r>
+          </a:p>
+        </p:txBody>
+      </p:sp>
     </p:spTree>
   </p:cSld>
 </p:sld>
@@ -3925,6 +3768,31 @@
       </p:grpSpPr>
       <p:sp>
         <p:nvSpPr>
+          <p:cNvPr id="2" name="Title 1"/>
+          <p:cNvSpPr>
+            <a:spLocks noGrp="1"/>
+          </p:cNvSpPr>
+          <p:nvPr>
+            <p:ph type="title"/>
+          </p:nvPr>
+        </p:nvSpPr>
+        <p:spPr/>
+        <p:txBody>
+          <a:bodyPr/>
+          <a:lstStyle/>
+          <a:p>
+            <a:pPr lvl="0" indent="0" marL="0">
+              <a:buNone/>
+            </a:pPr>
+            <a:r>
+              <a:rPr/>
+              <a:t>Where your work goes</a:t>
+            </a:r>
+          </a:p>
+        </p:txBody>
+      </p:sp>
+      <p:sp>
+        <p:nvSpPr>
           <p:cNvPr id="3" name="Content Placeholder 2"/>
           <p:cNvSpPr>
             <a:spLocks noGrp="1"/>
@@ -3938,12 +3806,39 @@
           <a:bodyPr/>
           <a:lstStyle/>
           <a:p>
-            <a:pPr lvl="0" indent="0" marL="0">
-              <a:buNone/>
-            </a:pPr>
-            <a:r>
-              <a:rPr/>
-              <a:t>[ github.com/new — owner, name, description, Public/Private, README checkbox ]</a:t>
+            <a:pPr lvl="0" indent="0">
+              <a:buNone/>
+            </a:pPr>
+            <a:r>
+              <a:rPr>
+                <a:latin typeface="Courier"/>
+              </a:rPr>
+              <a:t>github.com/warint/quantitative-methods
+│
+├── main         ← mine
+├── group-01
+├── group-02
+└── group-XX     ← yours</a:t>
+            </a:r>
+          </a:p>
+          <a:p>
+            <a:pPr lvl="0" indent="0" marL="0">
+              <a:buNone/>
+            </a:pPr>
+            <a:r>
+              <a:rPr/>
+              <a:t>Deliverables live in the session folder:</a:t>
+            </a:r>
+          </a:p>
+          <a:p>
+            <a:pPr lvl="0" indent="0">
+              <a:buNone/>
+            </a:pPr>
+            <a:r>
+              <a:rPr>
+                <a:latin typeface="Courier"/>
+              </a:rPr>
+              <a:t>NN-session-name/02-lab/submissions/group-XX/</a:t>
             </a:r>
           </a:p>
         </p:txBody>
@@ -3990,7 +3885,7 @@
             </a:pPr>
             <a:r>
               <a:rPr/>
-              <a:t>Add the other three people</a:t>
+              <a:t>Why one repository</a:t>
             </a:r>
           </a:p>
         </p:txBody>
@@ -4014,31 +3909,35 @@
               <a:buNone/>
             </a:pPr>
             <a:r>
+              <a:rPr/>
+              <a:t>Your commit history is one of four records used to check that all three of you did the work, and </a:t>
+            </a:r>
+            <a:r>
+              <a:rPr>
+                <a:latin typeface="Courier"/>
+              </a:rPr>
+              <a:t>scripts/assess.py contributions</a:t>
+            </a:r>
+            <a:r>
+              <a:rPr/>
+              <a:t> reads it </a:t>
+            </a:r>
+            <a:r>
               <a:rPr b="1"/>
-              <a:t>Settings → Collaborators → Add people.</a:t>
-            </a:r>
-          </a:p>
-          <a:p>
-            <a:pPr lvl="0"/>
-            <a:r>
-              <a:rPr/>
-              <a:t>Your two teammates</a:t>
-            </a:r>
-          </a:p>
-          <a:p>
-            <a:pPr lvl="0"/>
-            <a:r>
-              <a:rPr/>
-              <a:t>Me</a:t>
-            </a:r>
-          </a:p>
-          <a:p>
-            <a:pPr lvl="0" indent="0" marL="0">
-              <a:buNone/>
-            </a:pPr>
-            <a:r>
-              <a:rPr/>
-              <a:t>A private repository I cannot see is a repository I cannot mark. Do this in the same sitting — it is the step groups most often forget.</a:t>
+              <a:t>from this repository</a:t>
+            </a:r>
+            <a:r>
+              <a:rPr/>
+              <a:t>.</a:t>
+            </a:r>
+          </a:p>
+          <a:p>
+            <a:pPr lvl="0" indent="0" marL="0">
+              <a:buNone/>
+            </a:pPr>
+            <a:r>
+              <a:rPr/>
+              <a:t>Work pushed anywhere else is invisible to it — and invisible work counts as work you did not do.</a:t>
             </a:r>
           </a:p>
         </p:txBody>
@@ -4137,7 +4036,7 @@
             </a:pPr>
             <a:r>
               <a:rPr/>
-              <a:t>Clone it into VS Codium</a:t>
+              <a:t>Clone the course repository</a:t>
             </a:r>
           </a:p>
         </p:txBody>
@@ -4162,23 +4061,15 @@
             </a:pPr>
             <a:r>
               <a:rPr/>
-              <a:t>On the repository page, click the green </a:t>
+              <a:t>This </a:t>
             </a:r>
             <a:r>
               <a:rPr b="1"/>
-              <a:t>Code</a:t>
-            </a:r>
-            <a:r>
-              <a:rPr/>
-              <a:t> button and copy the </a:t>
-            </a:r>
-            <a:r>
-              <a:rPr b="1"/>
-              <a:t>HTTPS</a:t>
-            </a:r>
-            <a:r>
-              <a:rPr/>
-              <a:t> URL.</a:t>
+              <a:t>replaces</a:t>
+            </a:r>
+            <a:r>
+              <a:rPr/>
+              <a:t> the Session 01 ZIP. Delete the unzipped folder after, so you cannot edit the wrong copy.</a:t>
             </a:r>
           </a:p>
           <a:p>
@@ -4207,7 +4098,7 @@
               <a:rPr>
                 <a:latin typeface="Courier"/>
               </a:rPr>
-              <a:t> clone https://github.com/OWNER/qmib-gXX.git</a:t>
+              <a:t> clone https://github.com/warint/quantitative-methods.git qmib</a:t>
             </a:r>
             <a:br/>
             <a:r>
@@ -4223,7 +4114,7 @@
               <a:rPr>
                 <a:latin typeface="Courier"/>
               </a:rPr>
-              <a:t> qmib-gXX</a:t>
+              <a:t> qmib</a:t>
             </a:r>
           </a:p>
           <a:p>
@@ -4242,32 +4133,42 @@
             </a:r>
             <a:r>
               <a:rPr/>
-              <a:t> and choose that folder.</a:t>
-            </a:r>
-          </a:p>
-          <a:p>
-            <a:pPr lvl="0" indent="0" marL="0">
-              <a:buNone/>
-            </a:pPr>
-            <a:r>
-              <a:rPr/>
-              <a:t>The Explorer shows </a:t>
-            </a:r>
-            <a:r>
-              <a:rPr>
-                <a:latin typeface="Courier"/>
-              </a:rPr>
-              <a:t>README.md</a:t>
-            </a:r>
-            <a:r>
-              <a:rPr/>
-              <a:t>, and the bottom-left shows the branch </a:t>
-            </a:r>
-            <a:r>
-              <a:rPr>
-                <a:latin typeface="Courier"/>
-              </a:rPr>
-              <a:t>main</a:t>
+              <a:t> and choose </a:t>
+            </a:r>
+            <a:r>
+              <a:rPr>
+                <a:latin typeface="Courier"/>
+              </a:rPr>
+              <a:t>qmib</a:t>
+            </a:r>
+            <a:r>
+              <a:rPr/>
+              <a:t>.</a:t>
+            </a:r>
+          </a:p>
+          <a:p>
+            <a:pPr lvl="0" indent="0" marL="0">
+              <a:buNone/>
+            </a:pPr>
+            <a:r>
+              <a:rPr/>
+              <a:t>Rebuild the environment inside the clone — </a:t>
+            </a:r>
+            <a:r>
+              <a:rPr>
+                <a:latin typeface="Courier"/>
+              </a:rPr>
+              <a:t>python3 -m venv .venv</a:t>
+            </a:r>
+            <a:r>
+              <a:rPr/>
+              <a:t>, activate, </a:t>
+            </a:r>
+            <a:r>
+              <a:rPr>
+                <a:latin typeface="Courier"/>
+              </a:rPr>
+              <a:t>pip install -r requirements.txt</a:t>
             </a:r>
             <a:r>
               <a:rPr/>
@@ -5085,24 +4986,8 @@
               <a:rPr>
                 <a:latin typeface="Courier"/>
               </a:rPr>
-              <a:t> checkout </a:t>
-            </a:r>
-            <a:r>
-              <a:rPr>
-                <a:solidFill>
-                  <a:srgbClr val="7D9029"/>
-                </a:solidFill>
-                <a:latin typeface="Courier"/>
-              </a:rPr>
-              <a:t>-b</a:t>
-            </a:r>
-            <a:r>
-              <a:rPr>
-                <a:latin typeface="Courier"/>
-              </a:rPr>
-              <a:t> s02-fwl-analysis</a:t>
-            </a:r>
-            <a:br/>
+              <a:t> checkout group-XX      </a:t>
+            </a:r>
             <a:r>
               <a:rPr i="1">
                 <a:solidFill>
@@ -5110,7 +4995,7 @@
                 </a:solidFill>
                 <a:latin typeface="Courier"/>
               </a:rPr>
-              <a:t># ... work, commit ...</a:t>
+              <a:t># your group's branch</a:t>
             </a:r>
             <a:br/>
             <a:r>
@@ -5126,22 +5011,42 @@
               <a:rPr>
                 <a:latin typeface="Courier"/>
               </a:rPr>
-              <a:t> push </a:t>
-            </a:r>
-            <a:r>
-              <a:rPr>
+              <a:t> pull                   </a:t>
+            </a:r>
+            <a:r>
+              <a:rPr i="1">
                 <a:solidFill>
-                  <a:srgbClr val="7D9029"/>
+                  <a:srgbClr val="60A0B0"/>
                 </a:solidFill>
                 <a:latin typeface="Courier"/>
               </a:rPr>
-              <a:t>-u</a:t>
-            </a:r>
-            <a:r>
-              <a:rPr>
-                <a:latin typeface="Courier"/>
-              </a:rPr>
-              <a:t> origin s02-fwl-analysis</a:t>
+              <a:t># take teammates' work first</a:t>
+            </a:r>
+            <a:br/>
+            <a:r>
+              <a:rPr i="1">
+                <a:solidFill>
+                  <a:srgbClr val="60A0B0"/>
+                </a:solidFill>
+                <a:latin typeface="Courier"/>
+              </a:rPr>
+              <a:t># ... work, commit ...</a:t>
+            </a:r>
+            <a:br/>
+            <a:r>
+              <a:rPr>
+                <a:solidFill>
+                  <a:srgbClr val="06287E"/>
+                </a:solidFill>
+                <a:latin typeface="Courier"/>
+              </a:rPr>
+              <a:t>git</a:t>
+            </a:r>
+            <a:r>
+              <a:rPr>
+                <a:latin typeface="Courier"/>
+              </a:rPr>
+              <a:t> push</a:t>
             </a:r>
           </a:p>
           <a:p>
@@ -6292,22 +6197,39 @@
             <a:pPr lvl="0"/>
             <a:r>
               <a:rPr/>
-              <a:t>✅ One private group repository, with both teammates </a:t>
+              <a:t>✅ </a:t>
             </a:r>
             <a:r>
               <a:rPr b="1"/>
-              <a:t>and me</a:t>
-            </a:r>
-            <a:r>
-              <a:rPr/>
-              <a:t> added</a:t>
+              <a:t>GitHub username sent to me</a:t>
+            </a:r>
+            <a:r>
+              <a:rPr/>
+              <a:t> — you cannot push until I add you</a:t>
             </a:r>
           </a:p>
           <a:p>
             <a:pPr lvl="0"/>
             <a:r>
               <a:rPr/>
-              <a:t>✅ Cloned to your machine and opened in VS Codium</a:t>
+              <a:t>✅ Course repository cloned; the Session 01 ZIP folder deleted</a:t>
+            </a:r>
+          </a:p>
+          <a:p>
+            <a:pPr lvl="0"/>
+            <a:r>
+              <a:rPr/>
+              <a:t>✅ </a:t>
+            </a:r>
+            <a:r>
+              <a:rPr>
+                <a:latin typeface="Courier"/>
+              </a:rPr>
+              <a:t>group-XX</a:t>
+            </a:r>
+            <a:r>
+              <a:rPr/>
+              <a:t> branch checked out</a:t>
             </a:r>
           </a:p>
           <a:p>
@@ -6322,14 +6244,20 @@
             </a:r>
             <a:r>
               <a:rPr/>
-              <a:t>, visible on github.com</a:t>
+              <a:t> to </a:t>
+            </a:r>
+            <a:r>
+              <a:rPr>
+                <a:latin typeface="Courier"/>
+              </a:rPr>
+              <a:t>group-XX</a:t>
             </a:r>
           </a:p>
           <a:p>
             <a:pPr lvl="0"/>
             <a:r>
               <a:rPr/>
-              <a:t>✅ Your exact </a:t>
+              <a:t>✅ Your </a:t>
             </a:r>
             <a:r>
               <a:rPr>

--- a/02-geometry-of-least-squares/00-pre-session/slides-github-and-teamwork.pptx
+++ b/02-geometry-of-least-squares/00-pre-session/slides-github-and-teamwork.pptx
@@ -37,6 +37,9 @@
     <p:sldId id="285" r:id="rId31"/>
     <p:sldId id="286" r:id="rId32"/>
     <p:sldId id="287" r:id="rId33"/>
+    <p:sldId id="288" r:id="rId34"/>
+    <p:sldId id="289" r:id="rId35"/>
+    <p:sldId id="290" r:id="rId36"/>
   </p:sldIdLst>
   <p:sldSz cx="9144000" cy="5143500" type="screen16x9"/>
   <p:notesSz cx="6858000" cy="9144000"/>
@@ -3320,7 +3323,7 @@
             </a:pPr>
             <a:r>
               <a:rPr/>
-              <a:t>What a commit is</a:t>
+              <a:t>Tell git who you are</a:t>
             </a:r>
           </a:p>
         </p:txBody>
@@ -3345,61 +3348,139 @@
             </a:pPr>
             <a:r>
               <a:rPr/>
-              <a:t>A commit is a </a:t>
-            </a:r>
+              <a:t>VS Codium terminal</a:t>
+            </a:r>
+          </a:p>
+          <a:p>
+            <a:pPr lvl="0" indent="0">
+              <a:buNone/>
+            </a:pPr>
+            <a:r>
+              <a:rPr>
+                <a:solidFill>
+                  <a:srgbClr val="06287E"/>
+                </a:solidFill>
+                <a:latin typeface="Courier"/>
+              </a:rPr>
+              <a:t>git</a:t>
+            </a:r>
+            <a:r>
+              <a:rPr>
+                <a:latin typeface="Courier"/>
+              </a:rPr>
+              <a:t> </a:t>
+            </a:r>
+            <a:r>
+              <a:rPr>
+                <a:solidFill>
+                  <a:srgbClr val="7D9029"/>
+                </a:solidFill>
+                <a:latin typeface="Courier"/>
+              </a:rPr>
+              <a:t>--version</a:t>
+            </a:r>
+            <a:br/>
+            <a:r>
+              <a:rPr>
+                <a:solidFill>
+                  <a:srgbClr val="06287E"/>
+                </a:solidFill>
+                <a:latin typeface="Courier"/>
+              </a:rPr>
+              <a:t>git</a:t>
+            </a:r>
+            <a:r>
+              <a:rPr>
+                <a:latin typeface="Courier"/>
+              </a:rPr>
+              <a:t> config </a:t>
+            </a:r>
+            <a:r>
+              <a:rPr>
+                <a:solidFill>
+                  <a:srgbClr val="7D9029"/>
+                </a:solidFill>
+                <a:latin typeface="Courier"/>
+              </a:rPr>
+              <a:t>--global</a:t>
+            </a:r>
+            <a:r>
+              <a:rPr>
+                <a:latin typeface="Courier"/>
+              </a:rPr>
+              <a:t> user.name  </a:t>
+            </a:r>
+            <a:r>
+              <a:rPr>
+                <a:solidFill>
+                  <a:srgbClr val="4070A0"/>
+                </a:solidFill>
+                <a:latin typeface="Courier"/>
+              </a:rPr>
+              <a:t>"Your Full Name"</a:t>
+            </a:r>
+            <a:br/>
+            <a:r>
+              <a:rPr>
+                <a:solidFill>
+                  <a:srgbClr val="06287E"/>
+                </a:solidFill>
+                <a:latin typeface="Courier"/>
+              </a:rPr>
+              <a:t>git</a:t>
+            </a:r>
+            <a:r>
+              <a:rPr>
+                <a:latin typeface="Courier"/>
+              </a:rPr>
+              <a:t> config </a:t>
+            </a:r>
+            <a:r>
+              <a:rPr>
+                <a:solidFill>
+                  <a:srgbClr val="7D9029"/>
+                </a:solidFill>
+                <a:latin typeface="Courier"/>
+              </a:rPr>
+              <a:t>--global</a:t>
+            </a:r>
+            <a:r>
+              <a:rPr>
+                <a:latin typeface="Courier"/>
+              </a:rPr>
+              <a:t> user.email </a:t>
+            </a:r>
+            <a:r>
+              <a:rPr>
+                <a:solidFill>
+                  <a:srgbClr val="4070A0"/>
+                </a:solidFill>
+                <a:latin typeface="Courier"/>
+              </a:rPr>
+              <a:t>"your.name@hec.ca"</a:t>
+            </a:r>
+          </a:p>
+          <a:p>
+            <a:pPr lvl="0" indent="0" marL="0">
+              <a:buNone/>
+            </a:pPr>
             <a:r>
               <a:rPr b="1"/>
-              <a:t>labelled snapshot</a:t>
-            </a:r>
-            <a:r>
-              <a:rPr/>
-              <a:t> of your work, with an author and a message.</a:t>
-            </a:r>
-          </a:p>
-          <a:p>
-            <a:pPr lvl="0"/>
-            <a:r>
-              <a:rPr/>
-              <a:t>It is not a backup — it is a statement about what changed and why</a:t>
-            </a:r>
-          </a:p>
-          <a:p>
-            <a:pPr lvl="0"/>
-            <a:r>
-              <a:rPr/>
-              <a:t>The message is written for the person reading it in six weeks</a:t>
-            </a:r>
-          </a:p>
-          <a:p>
-            <a:pPr lvl="0"/>
-            <a:r>
-              <a:rPr/>
-              <a:t>That person is usually you</a:t>
-            </a:r>
-          </a:p>
-          <a:p>
-            <a:pPr lvl="0" indent="0" marL="0">
-              <a:buNone/>
-            </a:pPr>
-            <a:r>
-              <a:rPr>
-                <a:latin typeface="Courier"/>
-              </a:rPr>
-              <a:t>git commit -m "update"</a:t>
-            </a:r>
-            <a:r>
-              <a:rPr/>
-              <a:t> tells nobody anything. </a:t>
-            </a:r>
-            <a:r>
-              <a:rPr>
-                <a:latin typeface="Courier"/>
-              </a:rPr>
-              <a:t>"Fix leakage: move scaler inside the CV pipeline"</a:t>
-            </a:r>
-            <a:r>
-              <a:rPr/>
-              <a:t> tells them everything.</a:t>
+              <a:t>Use your real name and your university email.</a:t>
+            </a:r>
+            <a:r>
+              <a:rPr/>
+              <a:t> Commits from </a:t>
+            </a:r>
+            <a:r>
+              <a:rPr>
+                <a:latin typeface="Courier"/>
+              </a:rPr>
+              <a:t>unknown@localhost</a:t>
+            </a:r>
+            <a:r>
+              <a:rPr/>
+              <a:t> cannot be attributed to you, and unattributed work counts as work you did not do.</a:t>
             </a:r>
           </a:p>
         </p:txBody>
@@ -3436,22 +3517,137 @@
             <p:ph type="title"/>
           </p:nvPr>
         </p:nvSpPr>
-        <p:spPr>
-          <a:xfrm>
-            <a:off x="722313" y="3305176"/>
-            <a:ext cx="7772400" cy="1021556"/>
-          </a:xfrm>
-        </p:spPr>
-        <p:txBody>
-          <a:bodyPr/>
-          <a:lstStyle/>
-          <a:p>
-            <a:pPr lvl="0" indent="0" marL="0">
-              <a:buNone/>
-            </a:pPr>
-            <a:r>
-              <a:rPr/>
-              <a:t>GitHub</a:t>
+        <p:spPr/>
+        <p:txBody>
+          <a:bodyPr/>
+          <a:lstStyle/>
+          <a:p>
+            <a:pPr lvl="0" indent="0" marL="0">
+              <a:buNone/>
+            </a:pPr>
+            <a:r>
+              <a:rPr/>
+              <a:t>Report it to me</a:t>
+            </a:r>
+          </a:p>
+        </p:txBody>
+      </p:sp>
+      <p:sp>
+        <p:nvSpPr>
+          <p:cNvPr id="3" name="Content Placeholder 2"/>
+          <p:cNvSpPr>
+            <a:spLocks noGrp="1"/>
+          </p:cNvSpPr>
+          <p:nvPr>
+            <p:ph idx="1"/>
+          </p:nvPr>
+        </p:nvSpPr>
+        <p:spPr/>
+        <p:txBody>
+          <a:bodyPr/>
+          <a:lstStyle/>
+          <a:p>
+            <a:pPr lvl="0" indent="0" marL="0">
+              <a:buNone/>
+            </a:pPr>
+            <a:r>
+              <a:rPr/>
+              <a:t>Bring your exact </a:t>
+            </a:r>
+            <a:r>
+              <a:rPr>
+                <a:latin typeface="Courier"/>
+              </a:rPr>
+              <a:t>user.name</a:t>
+            </a:r>
+            <a:r>
+              <a:rPr/>
+              <a:t> and </a:t>
+            </a:r>
+            <a:r>
+              <a:rPr>
+                <a:latin typeface="Courier"/>
+              </a:rPr>
+              <a:t>user.email</a:t>
+            </a:r>
+            <a:r>
+              <a:rPr/>
+              <a:t> to Session 02.</a:t>
+            </a:r>
+          </a:p>
+          <a:p>
+            <a:pPr lvl="0" indent="0">
+              <a:buNone/>
+            </a:pPr>
+            <a:r>
+              <a:rPr>
+                <a:solidFill>
+                  <a:srgbClr val="06287E"/>
+                </a:solidFill>
+                <a:latin typeface="Courier"/>
+              </a:rPr>
+              <a:t>git</a:t>
+            </a:r>
+            <a:r>
+              <a:rPr>
+                <a:latin typeface="Courier"/>
+              </a:rPr>
+              <a:t> config </a:t>
+            </a:r>
+            <a:r>
+              <a:rPr>
+                <a:solidFill>
+                  <a:srgbClr val="7D9029"/>
+                </a:solidFill>
+                <a:latin typeface="Courier"/>
+              </a:rPr>
+              <a:t>--global</a:t>
+            </a:r>
+            <a:r>
+              <a:rPr>
+                <a:latin typeface="Courier"/>
+              </a:rPr>
+              <a:t> user.name</a:t>
+            </a:r>
+            <a:br/>
+            <a:r>
+              <a:rPr>
+                <a:solidFill>
+                  <a:srgbClr val="06287E"/>
+                </a:solidFill>
+                <a:latin typeface="Courier"/>
+              </a:rPr>
+              <a:t>git</a:t>
+            </a:r>
+            <a:r>
+              <a:rPr>
+                <a:latin typeface="Courier"/>
+              </a:rPr>
+              <a:t> config </a:t>
+            </a:r>
+            <a:r>
+              <a:rPr>
+                <a:solidFill>
+                  <a:srgbClr val="7D9029"/>
+                </a:solidFill>
+                <a:latin typeface="Courier"/>
+              </a:rPr>
+              <a:t>--global</a:t>
+            </a:r>
+            <a:r>
+              <a:rPr>
+                <a:latin typeface="Courier"/>
+              </a:rPr>
+              <a:t> user.email</a:t>
+            </a:r>
+          </a:p>
+          <a:p>
+            <a:pPr lvl="0" indent="0" marL="0">
+              <a:buNone/>
+            </a:pPr>
+            <a:r>
+              <a:rPr/>
+              <a:t>If your git email differs from the one on the roster, your commits will not be matched to you, and the contribution report will show you as having done nothing. This takes ten seconds to prevent and is tedious to repair.</a:t>
             </a:r>
           </a:p>
         </p:txBody>
@@ -3498,7 +3694,7 @@
             </a:pPr>
             <a:r>
               <a:rPr/>
-              <a:t>Create your account</a:t>
+              <a:t>What a commit is</a:t>
             </a:r>
           </a:p>
         </p:txBody>
@@ -3518,90 +3714,66 @@
           <a:bodyPr/>
           <a:lstStyle/>
           <a:p>
-            <a:pPr lvl="0" indent="-342900" marL="342900">
-              <a:buAutoNum type="arabicPeriod"/>
-            </a:pPr>
-            <a:r>
-              <a:rPr/>
-              <a:t>Go to </a:t>
+            <a:pPr lvl="0" indent="0" marL="0">
+              <a:buNone/>
+            </a:pPr>
+            <a:r>
+              <a:rPr/>
+              <a:t>A commit is a </a:t>
             </a:r>
             <a:r>
               <a:rPr b="1"/>
-              <a:t>github.com</a:t>
-            </a:r>
-            <a:r>
-              <a:rPr/>
-              <a:t> and choose </a:t>
-            </a:r>
-            <a:r>
-              <a:rPr b="1"/>
-              <a:t>Sign up</a:t>
-            </a:r>
-            <a:r>
-              <a:rPr/>
-              <a:t>.</a:t>
-            </a:r>
-          </a:p>
-          <a:p>
-            <a:pPr lvl="0" indent="-342900" marL="342900">
-              <a:buAutoNum type="arabicPeriod"/>
-            </a:pPr>
-            <a:r>
-              <a:rPr/>
-              <a:t>Use an email you will still have after you graduate.</a:t>
-            </a:r>
-          </a:p>
-          <a:p>
-            <a:pPr lvl="0" indent="-342900" marL="342900">
-              <a:buAutoNum type="arabicPeriod"/>
-            </a:pPr>
-            <a:r>
-              <a:rPr/>
-              <a:t>Pick a username you would put on a CV — this is a professional record.</a:t>
-            </a:r>
-          </a:p>
-          <a:p>
-            <a:pPr lvl="0" indent="-342900" marL="342900">
-              <a:buAutoNum type="arabicPeriod"/>
-            </a:pPr>
-            <a:r>
-              <a:rPr/>
-              <a:t>Verify the email GitHub sends you.</a:t>
-            </a:r>
-          </a:p>
-          <a:p>
-            <a:pPr lvl="0" indent="-342900" marL="342900">
-              <a:buAutoNum type="arabicPeriod"/>
-            </a:pPr>
-            <a:r>
-              <a:rPr/>
-              <a:t>Enable </a:t>
-            </a:r>
-            <a:r>
-              <a:rPr b="1"/>
-              <a:t>two-factor authentication</a:t>
-            </a:r>
-            <a:r>
-              <a:rPr/>
-              <a:t> when prompted. GitHub requires it.</a:t>
-            </a:r>
-          </a:p>
-          <a:p>
-            <a:pPr lvl="0" indent="0" marL="0">
-              <a:buNone/>
-            </a:pPr>
-            <a:r>
-              <a:rPr/>
-              <a:t>[ github.com/signup — email, password, username, then a verification step ]</a:t>
-            </a:r>
-          </a:p>
-          <a:p>
-            <a:pPr lvl="0" indent="0" marL="0">
-              <a:buNone/>
-            </a:pPr>
-            <a:r>
-              <a:rPr/>
-              <a:t>Free accounts include unlimited private repositories.</a:t>
+              <a:t>labelled snapshot</a:t>
+            </a:r>
+            <a:r>
+              <a:rPr/>
+              <a:t> of your work, with an author and a message.</a:t>
+            </a:r>
+          </a:p>
+          <a:p>
+            <a:pPr lvl="0"/>
+            <a:r>
+              <a:rPr/>
+              <a:t>It is not a backup — it is a statement about what changed and why</a:t>
+            </a:r>
+          </a:p>
+          <a:p>
+            <a:pPr lvl="0"/>
+            <a:r>
+              <a:rPr/>
+              <a:t>The message is written for the person reading it in six weeks</a:t>
+            </a:r>
+          </a:p>
+          <a:p>
+            <a:pPr lvl="0"/>
+            <a:r>
+              <a:rPr/>
+              <a:t>That person is usually you</a:t>
+            </a:r>
+          </a:p>
+          <a:p>
+            <a:pPr lvl="0" indent="0" marL="0">
+              <a:buNone/>
+            </a:pPr>
+            <a:r>
+              <a:rPr>
+                <a:latin typeface="Courier"/>
+              </a:rPr>
+              <a:t>git commit -m "update"</a:t>
+            </a:r>
+            <a:r>
+              <a:rPr/>
+              <a:t> tells nobody anything. </a:t>
+            </a:r>
+            <a:r>
+              <a:rPr>
+                <a:latin typeface="Courier"/>
+              </a:rPr>
+              <a:t>"Fix leakage: move scaler inside the CV pipeline"</a:t>
+            </a:r>
+            <a:r>
+              <a:rPr/>
+              <a:t> tells them everything.</a:t>
             </a:r>
           </a:p>
         </p:txBody>
@@ -3638,108 +3810,22 @@
             <p:ph type="title"/>
           </p:nvPr>
         </p:nvSpPr>
-        <p:spPr/>
-        <p:txBody>
-          <a:bodyPr/>
-          <a:lstStyle/>
-          <a:p>
-            <a:pPr lvl="0" indent="0" marL="0">
-              <a:buNone/>
-            </a:pPr>
-            <a:r>
-              <a:rPr/>
-              <a:t>You do not create a repository</a:t>
-            </a:r>
-          </a:p>
-        </p:txBody>
-      </p:sp>
-      <p:sp>
-        <p:nvSpPr>
-          <p:cNvPr id="3" name="Content Placeholder 2"/>
-          <p:cNvSpPr>
-            <a:spLocks noGrp="1"/>
-          </p:cNvSpPr>
-          <p:nvPr>
-            <p:ph idx="1"/>
-          </p:nvPr>
-        </p:nvSpPr>
-        <p:spPr/>
-        <p:txBody>
-          <a:bodyPr/>
-          <a:lstStyle/>
-          <a:p>
-            <a:pPr lvl="0" indent="0" marL="0">
-              <a:buNone/>
-            </a:pPr>
-            <a:r>
-              <a:rPr/>
-              <a:t>There is </a:t>
-            </a:r>
-            <a:r>
-              <a:rPr b="1"/>
-              <a:t>one repository for the whole course</a:t>
-            </a:r>
-            <a:r>
-              <a:rPr/>
-              <a:t> — the one you downloaded as a ZIP in Session 01.</a:t>
-            </a:r>
-          </a:p>
-          <a:p>
-            <a:pPr lvl="0"/>
-            <a:r>
-              <a:rPr>
-                <a:latin typeface="Courier"/>
-              </a:rPr>
-              <a:t>main</a:t>
-            </a:r>
-            <a:r>
-              <a:rPr/>
-              <a:t> is the instructor’s branch. You never push to it.</a:t>
-            </a:r>
-          </a:p>
-          <a:p>
-            <a:pPr lvl="0"/>
-            <a:r>
-              <a:rPr/>
-              <a:t>Your group gets </a:t>
-            </a:r>
-            <a:r>
-              <a:rPr b="1"/>
-              <a:t>one branch</a:t>
-            </a:r>
-            <a:r>
-              <a:rPr/>
-              <a:t>, </a:t>
-            </a:r>
-            <a:r>
-              <a:rPr>
-                <a:latin typeface="Courier"/>
-              </a:rPr>
-              <a:t>group-XX</a:t>
-            </a:r>
-            <a:r>
-              <a:rPr/>
-              <a:t>.</a:t>
-            </a:r>
-          </a:p>
-          <a:p>
-            <a:pPr lvl="0"/>
-            <a:r>
-              <a:rPr/>
-              <a:t>Everything your group produces is committed there.</a:t>
-            </a:r>
-          </a:p>
-          <a:p>
-            <a:pPr lvl="0" indent="0" marL="0">
-              <a:buNone/>
-            </a:pPr>
-            <a:r>
-              <a:rPr b="1"/>
-              <a:t>Send your GitHub username to me.</a:t>
-            </a:r>
-            <a:r>
-              <a:rPr/>
-              <a:t> I add you as a collaborator by hand. You cannot push until I have.</a:t>
+        <p:spPr>
+          <a:xfrm>
+            <a:off x="722313" y="3305176"/>
+            <a:ext cx="7772400" cy="1021556"/>
+          </a:xfrm>
+        </p:spPr>
+        <p:txBody>
+          <a:bodyPr/>
+          <a:lstStyle/>
+          <a:p>
+            <a:pPr lvl="0" indent="0" marL="0">
+              <a:buNone/>
+            </a:pPr>
+            <a:r>
+              <a:rPr/>
+              <a:t>GitHub</a:t>
             </a:r>
           </a:p>
         </p:txBody>
@@ -3786,7 +3872,7 @@
             </a:pPr>
             <a:r>
               <a:rPr/>
-              <a:t>Where your work goes</a:t>
+              <a:t>Create your account</a:t>
             </a:r>
           </a:p>
         </p:txBody>
@@ -3806,39 +3892,90 @@
           <a:bodyPr/>
           <a:lstStyle/>
           <a:p>
-            <a:pPr lvl="0" indent="0">
-              <a:buNone/>
-            </a:pPr>
-            <a:r>
-              <a:rPr>
-                <a:latin typeface="Courier"/>
-              </a:rPr>
-              <a:t>github.com/warint/quantitative-methods
-│
-├── main         ← mine
-├── group-01
-├── group-02
-└── group-XX     ← yours</a:t>
-            </a:r>
-          </a:p>
-          <a:p>
-            <a:pPr lvl="0" indent="0" marL="0">
-              <a:buNone/>
-            </a:pPr>
-            <a:r>
-              <a:rPr/>
-              <a:t>Deliverables live in the session folder:</a:t>
-            </a:r>
-          </a:p>
-          <a:p>
-            <a:pPr lvl="0" indent="0">
-              <a:buNone/>
-            </a:pPr>
-            <a:r>
-              <a:rPr>
-                <a:latin typeface="Courier"/>
-              </a:rPr>
-              <a:t>NN-session-name/02-lab/submissions/group-XX/</a:t>
+            <a:pPr lvl="0" indent="-342900" marL="342900">
+              <a:buAutoNum type="arabicPeriod"/>
+            </a:pPr>
+            <a:r>
+              <a:rPr/>
+              <a:t>Go to </a:t>
+            </a:r>
+            <a:r>
+              <a:rPr b="1"/>
+              <a:t>github.com</a:t>
+            </a:r>
+            <a:r>
+              <a:rPr/>
+              <a:t> and choose </a:t>
+            </a:r>
+            <a:r>
+              <a:rPr b="1"/>
+              <a:t>Sign up</a:t>
+            </a:r>
+            <a:r>
+              <a:rPr/>
+              <a:t>.</a:t>
+            </a:r>
+          </a:p>
+          <a:p>
+            <a:pPr lvl="0" indent="-342900" marL="342900">
+              <a:buAutoNum type="arabicPeriod"/>
+            </a:pPr>
+            <a:r>
+              <a:rPr/>
+              <a:t>Use an email you will still have after you graduate.</a:t>
+            </a:r>
+          </a:p>
+          <a:p>
+            <a:pPr lvl="0" indent="-342900" marL="342900">
+              <a:buAutoNum type="arabicPeriod"/>
+            </a:pPr>
+            <a:r>
+              <a:rPr/>
+              <a:t>Pick a username you would put on a CV — this is a professional record.</a:t>
+            </a:r>
+          </a:p>
+          <a:p>
+            <a:pPr lvl="0" indent="-342900" marL="342900">
+              <a:buAutoNum type="arabicPeriod"/>
+            </a:pPr>
+            <a:r>
+              <a:rPr/>
+              <a:t>Verify the email GitHub sends you.</a:t>
+            </a:r>
+          </a:p>
+          <a:p>
+            <a:pPr lvl="0" indent="-342900" marL="342900">
+              <a:buAutoNum type="arabicPeriod"/>
+            </a:pPr>
+            <a:r>
+              <a:rPr/>
+              <a:t>Enable </a:t>
+            </a:r>
+            <a:r>
+              <a:rPr b="1"/>
+              <a:t>two-factor authentication</a:t>
+            </a:r>
+            <a:r>
+              <a:rPr/>
+              <a:t> when prompted. GitHub requires it.</a:t>
+            </a:r>
+          </a:p>
+          <a:p>
+            <a:pPr lvl="0" indent="0" marL="0">
+              <a:buNone/>
+            </a:pPr>
+            <a:r>
+              <a:rPr/>
+              <a:t>[ github.com/signup — email, password, username, then a verification step ]</a:t>
+            </a:r>
+          </a:p>
+          <a:p>
+            <a:pPr lvl="0" indent="0" marL="0">
+              <a:buNone/>
+            </a:pPr>
+            <a:r>
+              <a:rPr/>
+              <a:t>Free accounts include unlimited private repositories.</a:t>
             </a:r>
           </a:p>
         </p:txBody>
@@ -3885,7 +4022,7 @@
             </a:pPr>
             <a:r>
               <a:rPr/>
-              <a:t>Why one repository</a:t>
+              <a:t>You do not create a repository</a:t>
             </a:r>
           </a:p>
         </p:txBody>
@@ -3910,34 +4047,73 @@
             </a:pPr>
             <a:r>
               <a:rPr/>
-              <a:t>Your commit history is one of four records used to check that all three of you did the work, and </a:t>
-            </a:r>
-            <a:r>
-              <a:rPr>
-                <a:latin typeface="Courier"/>
-              </a:rPr>
-              <a:t>scripts/assess.py contributions</a:t>
-            </a:r>
-            <a:r>
-              <a:rPr/>
-              <a:t> reads it </a:t>
+              <a:t>There is </a:t>
             </a:r>
             <a:r>
               <a:rPr b="1"/>
-              <a:t>from this repository</a:t>
-            </a:r>
-            <a:r>
-              <a:rPr/>
-              <a:t>.</a:t>
-            </a:r>
-          </a:p>
-          <a:p>
-            <a:pPr lvl="0" indent="0" marL="0">
-              <a:buNone/>
-            </a:pPr>
-            <a:r>
-              <a:rPr/>
-              <a:t>Work pushed anywhere else is invisible to it — and invisible work counts as work you did not do.</a:t>
+              <a:t>one repository for the whole course</a:t>
+            </a:r>
+            <a:r>
+              <a:rPr/>
+              <a:t> — the one you downloaded as a ZIP in Session 01.</a:t>
+            </a:r>
+          </a:p>
+          <a:p>
+            <a:pPr lvl="0"/>
+            <a:r>
+              <a:rPr>
+                <a:latin typeface="Courier"/>
+              </a:rPr>
+              <a:t>main</a:t>
+            </a:r>
+            <a:r>
+              <a:rPr/>
+              <a:t> is the instructor’s branch. You never push to it.</a:t>
+            </a:r>
+          </a:p>
+          <a:p>
+            <a:pPr lvl="0"/>
+            <a:r>
+              <a:rPr/>
+              <a:t>Your group gets </a:t>
+            </a:r>
+            <a:r>
+              <a:rPr b="1"/>
+              <a:t>one branch</a:t>
+            </a:r>
+            <a:r>
+              <a:rPr/>
+              <a:t>, </a:t>
+            </a:r>
+            <a:r>
+              <a:rPr>
+                <a:latin typeface="Courier"/>
+              </a:rPr>
+              <a:t>group-NN</a:t>
+            </a:r>
+            <a:r>
+              <a:rPr/>
+              <a:t> — your own number.</a:t>
+            </a:r>
+          </a:p>
+          <a:p>
+            <a:pPr lvl="0"/>
+            <a:r>
+              <a:rPr/>
+              <a:t>Everything your group produces is committed there.</a:t>
+            </a:r>
+          </a:p>
+          <a:p>
+            <a:pPr lvl="0" indent="0" marL="0">
+              <a:buNone/>
+            </a:pPr>
+            <a:r>
+              <a:rPr b="1"/>
+              <a:t>Send your GitHub username to me.</a:t>
+            </a:r>
+            <a:r>
+              <a:rPr/>
+              <a:t> I add you as a collaborator by hand. You cannot push until I have.</a:t>
             </a:r>
           </a:p>
         </p:txBody>
@@ -3974,22 +4150,69 @@
             <p:ph type="title"/>
           </p:nvPr>
         </p:nvSpPr>
-        <p:spPr>
-          <a:xfrm>
-            <a:off x="722313" y="3305176"/>
-            <a:ext cx="7772400" cy="1021556"/>
-          </a:xfrm>
-        </p:spPr>
-        <p:txBody>
-          <a:bodyPr/>
-          <a:lstStyle/>
-          <a:p>
-            <a:pPr lvl="0" indent="0" marL="0">
-              <a:buNone/>
-            </a:pPr>
-            <a:r>
-              <a:rPr/>
-              <a:t>Connecting it</a:t>
+        <p:spPr/>
+        <p:txBody>
+          <a:bodyPr/>
+          <a:lstStyle/>
+          <a:p>
+            <a:pPr lvl="0" indent="0" marL="0">
+              <a:buNone/>
+            </a:pPr>
+            <a:r>
+              <a:rPr/>
+              <a:t>Where your work goes</a:t>
+            </a:r>
+          </a:p>
+        </p:txBody>
+      </p:sp>
+      <p:sp>
+        <p:nvSpPr>
+          <p:cNvPr id="3" name="Content Placeholder 2"/>
+          <p:cNvSpPr>
+            <a:spLocks noGrp="1"/>
+          </p:cNvSpPr>
+          <p:nvPr>
+            <p:ph idx="1"/>
+          </p:nvPr>
+        </p:nvSpPr>
+        <p:spPr/>
+        <p:txBody>
+          <a:bodyPr/>
+          <a:lstStyle/>
+          <a:p>
+            <a:pPr lvl="0" indent="0">
+              <a:buNone/>
+            </a:pPr>
+            <a:r>
+              <a:rPr>
+                <a:latin typeface="Courier"/>
+              </a:rPr>
+              <a:t>github.com/warint/quantitative-methods
+│
+├── main         ← mine
+├── group-01
+├── group-02
+└── group-07     ← yours (your own number)</a:t>
+            </a:r>
+          </a:p>
+          <a:p>
+            <a:pPr lvl="0" indent="0" marL="0">
+              <a:buNone/>
+            </a:pPr>
+            <a:r>
+              <a:rPr/>
+              <a:t>Deliverables live in the session folder:</a:t>
+            </a:r>
+          </a:p>
+          <a:p>
+            <a:pPr lvl="0" indent="0">
+              <a:buNone/>
+            </a:pPr>
+            <a:r>
+              <a:rPr>
+                <a:latin typeface="Courier"/>
+              </a:rPr>
+              <a:t>NN-session-name/02-lab/submissions/group-07/</a:t>
             </a:r>
           </a:p>
         </p:txBody>
@@ -4036,7 +4259,7 @@
             </a:pPr>
             <a:r>
               <a:rPr/>
-              <a:t>Clone the course repository</a:t>
+              <a:t>Why one repository</a:t>
             </a:r>
           </a:p>
         </p:txBody>
@@ -4061,85 +4284,21 @@
             </a:pPr>
             <a:r>
               <a:rPr/>
-              <a:t>This </a:t>
+              <a:t>Your commit history is one of four records used to check that all three of you did the work, and </a:t>
+            </a:r>
+            <a:r>
+              <a:rPr>
+                <a:latin typeface="Courier"/>
+              </a:rPr>
+              <a:t>scripts/assess.py contributions</a:t>
+            </a:r>
+            <a:r>
+              <a:rPr/>
+              <a:t> reads it </a:t>
             </a:r>
             <a:r>
               <a:rPr b="1"/>
-              <a:t>replaces</a:t>
-            </a:r>
-            <a:r>
-              <a:rPr/>
-              <a:t> the Session 01 ZIP. Delete the unzipped folder after, so you cannot edit the wrong copy.</a:t>
-            </a:r>
-          </a:p>
-          <a:p>
-            <a:pPr lvl="0" indent="0" marL="0">
-              <a:buNone/>
-            </a:pPr>
-            <a:r>
-              <a:rPr/>
-              <a:t>VS Codium terminal</a:t>
-            </a:r>
-          </a:p>
-          <a:p>
-            <a:pPr lvl="0" indent="0">
-              <a:buNone/>
-            </a:pPr>
-            <a:r>
-              <a:rPr>
-                <a:solidFill>
-                  <a:srgbClr val="06287E"/>
-                </a:solidFill>
-                <a:latin typeface="Courier"/>
-              </a:rPr>
-              <a:t>git</a:t>
-            </a:r>
-            <a:r>
-              <a:rPr>
-                <a:latin typeface="Courier"/>
-              </a:rPr>
-              <a:t> clone https://github.com/warint/quantitative-methods.git qmib</a:t>
-            </a:r>
-            <a:br/>
-            <a:r>
-              <a:rPr>
-                <a:solidFill>
-                  <a:srgbClr val="008000"/>
-                </a:solidFill>
-                <a:latin typeface="Courier"/>
-              </a:rPr>
-              <a:t>cd</a:t>
-            </a:r>
-            <a:r>
-              <a:rPr>
-                <a:latin typeface="Courier"/>
-              </a:rPr>
-              <a:t> qmib</a:t>
-            </a:r>
-          </a:p>
-          <a:p>
-            <a:pPr lvl="0" indent="0" marL="0">
-              <a:buNone/>
-            </a:pPr>
-            <a:r>
-              <a:rPr/>
-              <a:t>Then </a:t>
-            </a:r>
-            <a:r>
-              <a:rPr>
-                <a:latin typeface="Courier"/>
-              </a:rPr>
-              <a:t>File → Open Folder…</a:t>
-            </a:r>
-            <a:r>
-              <a:rPr/>
-              <a:t> and choose </a:t>
-            </a:r>
-            <a:r>
-              <a:rPr>
-                <a:latin typeface="Courier"/>
-              </a:rPr>
-              <a:t>qmib</a:t>
+              <a:t>from this repository</a:t>
             </a:r>
             <a:r>
               <a:rPr/>
@@ -4152,27 +4311,7 @@
             </a:pPr>
             <a:r>
               <a:rPr/>
-              <a:t>Rebuild the environment inside the clone — </a:t>
-            </a:r>
-            <a:r>
-              <a:rPr>
-                <a:latin typeface="Courier"/>
-              </a:rPr>
-              <a:t>python3 -m venv .venv</a:t>
-            </a:r>
-            <a:r>
-              <a:rPr/>
-              <a:t>, activate, </a:t>
-            </a:r>
-            <a:r>
-              <a:rPr>
-                <a:latin typeface="Courier"/>
-              </a:rPr>
-              <a:t>pip install -r requirements.txt</a:t>
-            </a:r>
-            <a:r>
-              <a:rPr/>
-              <a:t>.</a:t>
+              <a:t>Work pushed anywhere else is invisible to it — and invisible work counts as work you did not do.</a:t>
             </a:r>
           </a:p>
         </p:txBody>
@@ -4209,119 +4348,22 @@
             <p:ph type="title"/>
           </p:nvPr>
         </p:nvSpPr>
-        <p:spPr/>
-        <p:txBody>
-          <a:bodyPr/>
-          <a:lstStyle/>
-          <a:p>
-            <a:pPr lvl="0" indent="0" marL="0">
-              <a:buNone/>
-            </a:pPr>
-            <a:r>
-              <a:rPr/>
-              <a:t>Your password will not work</a:t>
-            </a:r>
-          </a:p>
-        </p:txBody>
-      </p:sp>
-      <p:sp>
-        <p:nvSpPr>
-          <p:cNvPr id="3" name="Content Placeholder 2"/>
-          <p:cNvSpPr>
-            <a:spLocks noGrp="1"/>
-          </p:cNvSpPr>
-          <p:nvPr>
-            <p:ph idx="1"/>
-          </p:nvPr>
-        </p:nvSpPr>
-        <p:spPr/>
-        <p:txBody>
-          <a:bodyPr/>
-          <a:lstStyle/>
-          <a:p>
-            <a:pPr lvl="0" indent="0" marL="0">
-              <a:buNone/>
-            </a:pPr>
-            <a:r>
-              <a:rPr/>
-              <a:t>When you first push, GitHub asks for credentials and </a:t>
-            </a:r>
-            <a:r>
-              <a:rPr b="1"/>
-              <a:t>rejects your account password</a:t>
-            </a:r>
-            <a:r>
-              <a:rPr/>
-              <a:t>. It wants a </a:t>
-            </a:r>
-            <a:r>
-              <a:rPr i="1"/>
-              <a:t>token</a:t>
-            </a:r>
-            <a:r>
-              <a:rPr/>
-              <a:t>.</a:t>
-            </a:r>
-          </a:p>
-          <a:p>
-            <a:pPr lvl="0" indent="-342900" marL="342900">
-              <a:buAutoNum type="arabicPeriod"/>
-            </a:pPr>
-            <a:r>
-              <a:rPr/>
-              <a:t>github.com → your avatar → </a:t>
-            </a:r>
-            <a:r>
-              <a:rPr b="1"/>
-              <a:t>Settings</a:t>
-            </a:r>
-          </a:p>
-          <a:p>
-            <a:pPr lvl="0" indent="-342900" marL="342900">
-              <a:buAutoNum type="arabicPeriod"/>
-            </a:pPr>
-            <a:r>
-              <a:rPr b="1"/>
-              <a:t>Developer settings</a:t>
-            </a:r>
-            <a:r>
-              <a:rPr/>
-              <a:t> → </a:t>
-            </a:r>
-            <a:r>
-              <a:rPr b="1"/>
-              <a:t>Personal access tokens</a:t>
-            </a:r>
-            <a:r>
-              <a:rPr/>
-              <a:t> → </a:t>
-            </a:r>
-            <a:r>
-              <a:rPr b="1"/>
-              <a:t>Tokens (classic)</a:t>
-            </a:r>
-          </a:p>
-          <a:p>
-            <a:pPr lvl="0" indent="-342900" marL="342900">
-              <a:buAutoNum type="arabicPeriod"/>
-            </a:pPr>
-            <a:r>
-              <a:rPr b="1"/>
-              <a:t>Generate new token</a:t>
-            </a:r>
-            <a:r>
-              <a:rPr/>
-              <a:t>, tick the </a:t>
-            </a:r>
-            <a:r>
-              <a:rPr b="1">
-                <a:latin typeface="Courier"/>
-              </a:rPr>
-              <a:t>repo</a:t>
-            </a:r>
-            <a:r>
-              <a:rPr/>
-              <a:t> scope, set an expiry</a:t>
+        <p:spPr>
+          <a:xfrm>
+            <a:off x="722313" y="3305176"/>
+            <a:ext cx="7772400" cy="1021556"/>
+          </a:xfrm>
+        </p:spPr>
+        <p:txBody>
+          <a:bodyPr/>
+          <a:lstStyle/>
+          <a:p>
+            <a:pPr lvl="0" indent="0" marL="0">
+              <a:buNone/>
+            </a:pPr>
+            <a:r>
+              <a:rPr/>
+              <a:t>Connecting it</a:t>
             </a:r>
           </a:p>
         </p:txBody>
@@ -4368,7 +4410,7 @@
             </a:pPr>
             <a:r>
               <a:rPr/>
-              <a:t>Using the token</a:t>
+              <a:t>Clone the course repository</a:t>
             </a:r>
           </a:p>
         </p:txBody>
@@ -4388,29 +4430,29 @@
           <a:bodyPr/>
           <a:lstStyle/>
           <a:p>
-            <a:pPr lvl="0" indent="-342900" marL="342900">
-              <a:buAutoNum startAt="4" type="arabicPeriod"/>
-            </a:pPr>
-            <a:r>
-              <a:rPr/>
-              <a:t>Copy the token — </a:t>
+            <a:pPr lvl="0" indent="0" marL="0">
+              <a:buNone/>
+            </a:pPr>
+            <a:r>
+              <a:rPr/>
+              <a:t>This </a:t>
             </a:r>
             <a:r>
               <a:rPr b="1"/>
-              <a:t>it is shown once</a:t>
-            </a:r>
-          </a:p>
-          <a:p>
-            <a:pPr lvl="0" indent="-342900" marL="342900">
-              <a:buAutoNum startAt="4" type="arabicPeriod"/>
-            </a:pPr>
-            <a:r>
-              <a:rPr/>
-              <a:t>Paste it when git asks for your </a:t>
-            </a:r>
-            <a:r>
-              <a:rPr i="1"/>
-              <a:t>password</a:t>
+              <a:t>replaces</a:t>
+            </a:r>
+            <a:r>
+              <a:rPr/>
+              <a:t> the Session 01 ZIP. Delete the unzipped folder after, so you cannot edit the wrong copy.</a:t>
+            </a:r>
+          </a:p>
+          <a:p>
+            <a:pPr lvl="0" indent="0" marL="0">
+              <a:buNone/>
+            </a:pPr>
+            <a:r>
+              <a:rPr/>
+              <a:t>VS Codium terminal</a:t>
             </a:r>
           </a:p>
           <a:p>
@@ -4430,31 +4472,81 @@
               <a:rPr>
                 <a:latin typeface="Courier"/>
               </a:rPr>
-              <a:t> config </a:t>
-            </a:r>
+              <a:t> clone https://github.com/warint/quantitative-methods.git qmib</a:t>
+            </a:r>
+            <a:br/>
             <a:r>
               <a:rPr>
                 <a:solidFill>
-                  <a:srgbClr val="7D9029"/>
+                  <a:srgbClr val="008000"/>
                 </a:solidFill>
                 <a:latin typeface="Courier"/>
               </a:rPr>
-              <a:t>--global</a:t>
-            </a:r>
-            <a:r>
-              <a:rPr>
-                <a:latin typeface="Courier"/>
-              </a:rPr>
-              <a:t> credential.helper store</a:t>
-            </a:r>
-          </a:p>
-          <a:p>
-            <a:pPr lvl="0" indent="0" marL="0">
-              <a:buNone/>
-            </a:pPr>
-            <a:r>
-              <a:rPr/>
-              <a:t>Stores it, so you are asked only once.</a:t>
+              <a:t>cd</a:t>
+            </a:r>
+            <a:r>
+              <a:rPr>
+                <a:latin typeface="Courier"/>
+              </a:rPr>
+              <a:t> qmib</a:t>
+            </a:r>
+          </a:p>
+          <a:p>
+            <a:pPr lvl="0" indent="0" marL="0">
+              <a:buNone/>
+            </a:pPr>
+            <a:r>
+              <a:rPr/>
+              <a:t>Then </a:t>
+            </a:r>
+            <a:r>
+              <a:rPr>
+                <a:latin typeface="Courier"/>
+              </a:rPr>
+              <a:t>File → Open Folder…</a:t>
+            </a:r>
+            <a:r>
+              <a:rPr/>
+              <a:t> and choose </a:t>
+            </a:r>
+            <a:r>
+              <a:rPr>
+                <a:latin typeface="Courier"/>
+              </a:rPr>
+              <a:t>qmib</a:t>
+            </a:r>
+            <a:r>
+              <a:rPr/>
+              <a:t>.</a:t>
+            </a:r>
+          </a:p>
+          <a:p>
+            <a:pPr lvl="0" indent="0" marL="0">
+              <a:buNone/>
+            </a:pPr>
+            <a:r>
+              <a:rPr/>
+              <a:t>Rebuild the environment inside the clone — </a:t>
+            </a:r>
+            <a:r>
+              <a:rPr>
+                <a:latin typeface="Courier"/>
+              </a:rPr>
+              <a:t>python3 -m venv .venv</a:t>
+            </a:r>
+            <a:r>
+              <a:rPr/>
+              <a:t>, activate, </a:t>
+            </a:r>
+            <a:r>
+              <a:rPr>
+                <a:latin typeface="Courier"/>
+              </a:rPr>
+              <a:t>pip install -r requirements.txt</a:t>
+            </a:r>
+            <a:r>
+              <a:rPr/>
+              <a:t>.</a:t>
             </a:r>
           </a:p>
         </p:txBody>
@@ -4553,7 +4645,7 @@
             </a:pPr>
             <a:r>
               <a:rPr/>
-              <a:t>The round trip</a:t>
+              <a:t>Your password will not work</a:t>
             </a:r>
           </a:p>
         </p:txBody>
@@ -4578,147 +4670,84 @@
             </a:pPr>
             <a:r>
               <a:rPr/>
-              <a:t>VS Codium terminal</a:t>
-            </a:r>
-          </a:p>
-          <a:p>
-            <a:pPr lvl="0" indent="0">
-              <a:buNone/>
-            </a:pPr>
-            <a:r>
-              <a:rPr>
-                <a:solidFill>
-                  <a:srgbClr val="008000"/>
-                </a:solidFill>
-                <a:latin typeface="Courier"/>
-              </a:rPr>
-              <a:t>echo</a:t>
-            </a:r>
-            <a:r>
-              <a:rPr>
-                <a:latin typeface="Courier"/>
-              </a:rPr>
-              <a:t> </a:t>
-            </a:r>
-            <a:r>
-              <a:rPr>
-                <a:solidFill>
-                  <a:srgbClr val="4070A0"/>
-                </a:solidFill>
-                <a:latin typeface="Courier"/>
-              </a:rPr>
-              <a:t>"## Group XX"</a:t>
-            </a:r>
-            <a:r>
-              <a:rPr>
-                <a:latin typeface="Courier"/>
-              </a:rPr>
-              <a:t> </a:t>
-            </a:r>
-            <a:r>
-              <a:rPr>
-                <a:solidFill>
-                  <a:srgbClr val="666666"/>
-                </a:solidFill>
-                <a:latin typeface="Courier"/>
-              </a:rPr>
-              <a:t>&gt;&gt;</a:t>
-            </a:r>
-            <a:r>
-              <a:rPr>
-                <a:latin typeface="Courier"/>
-              </a:rPr>
-              <a:t> README.md</a:t>
-            </a:r>
-            <a:br/>
-            <a:r>
-              <a:rPr>
-                <a:solidFill>
-                  <a:srgbClr val="06287E"/>
-                </a:solidFill>
-                <a:latin typeface="Courier"/>
-              </a:rPr>
-              <a:t>git</a:t>
-            </a:r>
-            <a:r>
-              <a:rPr>
-                <a:latin typeface="Courier"/>
-              </a:rPr>
-              <a:t> add README.md</a:t>
-            </a:r>
-            <a:br/>
-            <a:r>
-              <a:rPr>
-                <a:solidFill>
-                  <a:srgbClr val="06287E"/>
-                </a:solidFill>
-                <a:latin typeface="Courier"/>
-              </a:rPr>
-              <a:t>git</a:t>
-            </a:r>
-            <a:r>
-              <a:rPr>
-                <a:latin typeface="Courier"/>
-              </a:rPr>
-              <a:t> commit </a:t>
-            </a:r>
-            <a:r>
-              <a:rPr>
-                <a:solidFill>
-                  <a:srgbClr val="7D9029"/>
-                </a:solidFill>
-                <a:latin typeface="Courier"/>
-              </a:rPr>
-              <a:t>-m</a:t>
-            </a:r>
-            <a:r>
-              <a:rPr>
-                <a:latin typeface="Courier"/>
-              </a:rPr>
-              <a:t> </a:t>
-            </a:r>
-            <a:r>
-              <a:rPr>
-                <a:solidFill>
-                  <a:srgbClr val="4070A0"/>
-                </a:solidFill>
-                <a:latin typeface="Courier"/>
-              </a:rPr>
-              <a:t>"Add group heading"</a:t>
-            </a:r>
-            <a:br/>
-            <a:r>
-              <a:rPr>
-                <a:solidFill>
-                  <a:srgbClr val="06287E"/>
-                </a:solidFill>
-                <a:latin typeface="Courier"/>
-              </a:rPr>
-              <a:t>git</a:t>
-            </a:r>
-            <a:r>
-              <a:rPr>
-                <a:latin typeface="Courier"/>
-              </a:rPr>
-              <a:t> push</a:t>
-            </a:r>
-          </a:p>
-          <a:p>
-            <a:pPr lvl="0" indent="0" marL="0">
-              <a:buNone/>
-            </a:pPr>
-            <a:r>
-              <a:rPr/>
-              <a:t>Refresh the repository page in your browser. Your line is there.</a:t>
-            </a:r>
-          </a:p>
-          <a:p>
-            <a:pPr lvl="0" indent="0" marL="0">
-              <a:buNone/>
-            </a:pPr>
-            <a:r>
-              <a:rPr/>
-              <a:t>Edit locally → commit → push → visible to your group. Everything this term is a variation on that loop.</a:t>
+              <a:t>When you first push, GitHub asks for credentials and </a:t>
+            </a:r>
+            <a:r>
+              <a:rPr b="1"/>
+              <a:t>rejects your account password</a:t>
+            </a:r>
+            <a:r>
+              <a:rPr/>
+              <a:t>. It wants a </a:t>
+            </a:r>
+            <a:r>
+              <a:rPr i="1"/>
+              <a:t>token</a:t>
+            </a:r>
+            <a:r>
+              <a:rPr/>
+              <a:t>.</a:t>
+            </a:r>
+          </a:p>
+          <a:p>
+            <a:pPr lvl="0" indent="-342900" marL="342900">
+              <a:buAutoNum type="arabicPeriod"/>
+            </a:pPr>
+            <a:r>
+              <a:rPr/>
+              <a:t>github.com → your avatar → </a:t>
+            </a:r>
+            <a:r>
+              <a:rPr b="1"/>
+              <a:t>Settings</a:t>
+            </a:r>
+          </a:p>
+          <a:p>
+            <a:pPr lvl="0" indent="-342900" marL="342900">
+              <a:buAutoNum type="arabicPeriod"/>
+            </a:pPr>
+            <a:r>
+              <a:rPr b="1"/>
+              <a:t>Developer settings</a:t>
+            </a:r>
+            <a:r>
+              <a:rPr/>
+              <a:t> → </a:t>
+            </a:r>
+            <a:r>
+              <a:rPr b="1"/>
+              <a:t>Personal access tokens</a:t>
+            </a:r>
+            <a:r>
+              <a:rPr/>
+              <a:t> → </a:t>
+            </a:r>
+            <a:r>
+              <a:rPr b="1"/>
+              <a:t>Tokens (classic)</a:t>
+            </a:r>
+          </a:p>
+          <a:p>
+            <a:pPr lvl="0" indent="-342900" marL="342900">
+              <a:buAutoNum type="arabicPeriod"/>
+            </a:pPr>
+            <a:r>
+              <a:rPr b="1"/>
+              <a:t>Generate new token</a:t>
+            </a:r>
+            <a:r>
+              <a:rPr/>
+              <a:t>, tick the </a:t>
+            </a:r>
+            <a:r>
+              <a:rPr b="1">
+                <a:latin typeface="Courier"/>
+              </a:rPr>
+              <a:t>repo</a:t>
+            </a:r>
+            <a:r>
+              <a:rPr/>
+              <a:t> scope, set an expiry</a:t>
             </a:r>
           </a:p>
         </p:txBody>
@@ -4765,7 +4794,7 @@
             </a:pPr>
             <a:r>
               <a:rPr/>
-              <a:t>Getting other people’s work</a:t>
+              <a:t>Using the token</a:t>
             </a:r>
           </a:p>
         </p:txBody>
@@ -4785,12 +4814,29 @@
           <a:bodyPr/>
           <a:lstStyle/>
           <a:p>
-            <a:pPr lvl="0" indent="0" marL="0">
-              <a:buNone/>
-            </a:pPr>
-            <a:r>
-              <a:rPr/>
-              <a:t>VS Codium terminal</a:t>
+            <a:pPr lvl="0" indent="-342900" marL="342900">
+              <a:buAutoNum startAt="4" type="arabicPeriod"/>
+            </a:pPr>
+            <a:r>
+              <a:rPr/>
+              <a:t>Copy the token — </a:t>
+            </a:r>
+            <a:r>
+              <a:rPr b="1"/>
+              <a:t>it is shown once</a:t>
+            </a:r>
+          </a:p>
+          <a:p>
+            <a:pPr lvl="0" indent="-342900" marL="342900">
+              <a:buAutoNum startAt="4" type="arabicPeriod"/>
+            </a:pPr>
+            <a:r>
+              <a:rPr/>
+              <a:t>Paste it when git asks for your </a:t>
+            </a:r>
+            <a:r>
+              <a:rPr i="1"/>
+              <a:t>password</a:t>
             </a:r>
           </a:p>
           <a:p>
@@ -4810,20 +4856,31 @@
               <a:rPr>
                 <a:latin typeface="Courier"/>
               </a:rPr>
-              <a:t> pull</a:t>
-            </a:r>
-          </a:p>
-          <a:p>
-            <a:pPr lvl="0" indent="0" marL="0">
-              <a:buNone/>
-            </a:pPr>
-            <a:r>
-              <a:rPr b="1"/>
-              <a:t>Pull before you start working, every time.</a:t>
-            </a:r>
-            <a:r>
-              <a:rPr/>
-              <a:t> Most merge conflicts are caused by someone editing a stale copy of a file for two hours.</a:t>
+              <a:t> config </a:t>
+            </a:r>
+            <a:r>
+              <a:rPr>
+                <a:solidFill>
+                  <a:srgbClr val="7D9029"/>
+                </a:solidFill>
+                <a:latin typeface="Courier"/>
+              </a:rPr>
+              <a:t>--global</a:t>
+            </a:r>
+            <a:r>
+              <a:rPr>
+                <a:latin typeface="Courier"/>
+              </a:rPr>
+              <a:t> credential.helper store</a:t>
+            </a:r>
+          </a:p>
+          <a:p>
+            <a:pPr lvl="0" indent="0" marL="0">
+              <a:buNone/>
+            </a:pPr>
+            <a:r>
+              <a:rPr/>
+              <a:t>Stores it, so you are asked only once.</a:t>
             </a:r>
           </a:p>
         </p:txBody>
@@ -4860,22 +4917,222 @@
             <p:ph type="title"/>
           </p:nvPr>
         </p:nvSpPr>
-        <p:spPr>
-          <a:xfrm>
-            <a:off x="722313" y="3305176"/>
-            <a:ext cx="7772400" cy="1021556"/>
-          </a:xfrm>
-        </p:spPr>
-        <p:txBody>
-          <a:bodyPr/>
-          <a:lstStyle/>
-          <a:p>
-            <a:pPr lvl="0" indent="0" marL="0">
-              <a:buNone/>
-            </a:pPr>
-            <a:r>
-              <a:rPr/>
-              <a:t>Working together</a:t>
+        <p:spPr/>
+        <p:txBody>
+          <a:bodyPr/>
+          <a:lstStyle/>
+          <a:p>
+            <a:pPr lvl="0" indent="0" marL="0">
+              <a:buNone/>
+            </a:pPr>
+            <a:r>
+              <a:rPr/>
+              <a:t>The round trip</a:t>
+            </a:r>
+          </a:p>
+        </p:txBody>
+      </p:sp>
+      <p:sp>
+        <p:nvSpPr>
+          <p:cNvPr id="3" name="Content Placeholder 2"/>
+          <p:cNvSpPr>
+            <a:spLocks noGrp="1"/>
+          </p:cNvSpPr>
+          <p:nvPr>
+            <p:ph idx="1"/>
+          </p:nvPr>
+        </p:nvSpPr>
+        <p:spPr/>
+        <p:txBody>
+          <a:bodyPr/>
+          <a:lstStyle/>
+          <a:p>
+            <a:pPr lvl="0" indent="0" marL="0">
+              <a:buNone/>
+            </a:pPr>
+            <a:r>
+              <a:rPr/>
+              <a:t>VS Codium terminal · on your group branch</a:t>
+            </a:r>
+          </a:p>
+          <a:p>
+            <a:pPr lvl="0" indent="0">
+              <a:buNone/>
+            </a:pPr>
+            <a:r>
+              <a:rPr i="1">
+                <a:solidFill>
+                  <a:srgbClr val="60A0B0"/>
+                </a:solidFill>
+                <a:latin typeface="Courier"/>
+              </a:rPr>
+              <a:t># group 07 shown — use your own number</a:t>
+            </a:r>
+            <a:br/>
+            <a:r>
+              <a:rPr>
+                <a:solidFill>
+                  <a:srgbClr val="06287E"/>
+                </a:solidFill>
+                <a:latin typeface="Courier"/>
+              </a:rPr>
+              <a:t>mkdir</a:t>
+            </a:r>
+            <a:r>
+              <a:rPr>
+                <a:latin typeface="Courier"/>
+              </a:rPr>
+              <a:t> </a:t>
+            </a:r>
+            <a:r>
+              <a:rPr>
+                <a:solidFill>
+                  <a:srgbClr val="7D9029"/>
+                </a:solidFill>
+                <a:latin typeface="Courier"/>
+              </a:rPr>
+              <a:t>-p</a:t>
+            </a:r>
+            <a:r>
+              <a:rPr>
+                <a:latin typeface="Courier"/>
+              </a:rPr>
+              <a:t> 02-geometry-of-least-squares/02-lab/submissions/group-07</a:t>
+            </a:r>
+            <a:br/>
+            <a:r>
+              <a:rPr>
+                <a:solidFill>
+                  <a:srgbClr val="008000"/>
+                </a:solidFill>
+                <a:latin typeface="Courier"/>
+              </a:rPr>
+              <a:t>echo</a:t>
+            </a:r>
+            <a:r>
+              <a:rPr>
+                <a:latin typeface="Courier"/>
+              </a:rPr>
+              <a:t> </a:t>
+            </a:r>
+            <a:r>
+              <a:rPr>
+                <a:solidFill>
+                  <a:srgbClr val="4070A0"/>
+                </a:solidFill>
+                <a:latin typeface="Courier"/>
+              </a:rPr>
+              <a:t>"# Group 07"</a:t>
+            </a:r>
+            <a:r>
+              <a:rPr>
+                <a:latin typeface="Courier"/>
+              </a:rPr>
+              <a:t> </a:t>
+            </a:r>
+            <a:r>
+              <a:rPr>
+                <a:solidFill>
+                  <a:srgbClr val="666666"/>
+                </a:solidFill>
+                <a:latin typeface="Courier"/>
+              </a:rPr>
+              <a:t>&gt;</a:t>
+            </a:r>
+            <a:r>
+              <a:rPr>
+                <a:latin typeface="Courier"/>
+              </a:rPr>
+              <a:t> </a:t>
+            </a:r>
+            <a:r>
+              <a:rPr>
+                <a:solidFill>
+                  <a:srgbClr val="902000"/>
+                </a:solidFill>
+                <a:latin typeface="Courier"/>
+              </a:rPr>
+              <a:t>\</a:t>
+            </a:r>
+            <a:br/>
+            <a:r>
+              <a:rPr>
+                <a:latin typeface="Courier"/>
+              </a:rPr>
+              <a:t>  02-geometry-of-least-squares/02-lab/submissions/group-07/NOTES.md</a:t>
+            </a:r>
+            <a:br/>
+            <a:br/>
+            <a:r>
+              <a:rPr>
+                <a:solidFill>
+                  <a:srgbClr val="06287E"/>
+                </a:solidFill>
+                <a:latin typeface="Courier"/>
+              </a:rPr>
+              <a:t>git</a:t>
+            </a:r>
+            <a:r>
+              <a:rPr>
+                <a:latin typeface="Courier"/>
+              </a:rPr>
+              <a:t> add 02-geometry-of-least-squares/02-lab/submissions/group-07/</a:t>
+            </a:r>
+            <a:br/>
+            <a:r>
+              <a:rPr>
+                <a:solidFill>
+                  <a:srgbClr val="06287E"/>
+                </a:solidFill>
+                <a:latin typeface="Courier"/>
+              </a:rPr>
+              <a:t>git</a:t>
+            </a:r>
+            <a:r>
+              <a:rPr>
+                <a:latin typeface="Courier"/>
+              </a:rPr>
+              <a:t> commit </a:t>
+            </a:r>
+            <a:r>
+              <a:rPr>
+                <a:solidFill>
+                  <a:srgbClr val="7D9029"/>
+                </a:solidFill>
+                <a:latin typeface="Courier"/>
+              </a:rPr>
+              <a:t>-m</a:t>
+            </a:r>
+            <a:r>
+              <a:rPr>
+                <a:latin typeface="Courier"/>
+              </a:rPr>
+              <a:t> </a:t>
+            </a:r>
+            <a:r>
+              <a:rPr>
+                <a:solidFill>
+                  <a:srgbClr val="4070A0"/>
+                </a:solidFill>
+                <a:latin typeface="Courier"/>
+              </a:rPr>
+              <a:t>"Add group 07 notes"</a:t>
+            </a:r>
+            <a:br/>
+            <a:r>
+              <a:rPr>
+                <a:solidFill>
+                  <a:srgbClr val="06287E"/>
+                </a:solidFill>
+                <a:latin typeface="Courier"/>
+              </a:rPr>
+              <a:t>git</a:t>
+            </a:r>
+            <a:r>
+              <a:rPr>
+                <a:latin typeface="Courier"/>
+              </a:rPr>
+              <a:t> push</a:t>
             </a:r>
           </a:p>
         </p:txBody>
@@ -4922,7 +5179,7 @@
             </a:pPr>
             <a:r>
               <a:rPr/>
-              <a:t>Branches</a:t>
+              <a:t>What just happened</a:t>
             </a:r>
           </a:p>
         </p:txBody>
@@ -4947,7 +5204,53 @@
             </a:pPr>
             <a:r>
               <a:rPr/>
-              <a:t>Work on a branch, not directly on </a:t>
+              <a:t>Refresh the repository page, switch to your group’s branch, and the file is there.</a:t>
+            </a:r>
+          </a:p>
+          <a:p>
+            <a:pPr lvl="0" indent="0" marL="0">
+              <a:buNone/>
+            </a:pPr>
+            <a:r>
+              <a:rPr/>
+              <a:t>Edit locally → commit → push → visible to your group. Everything this term is a variation on that loop.</a:t>
+            </a:r>
+          </a:p>
+          <a:p>
+            <a:pPr lvl="0" indent="0" marL="0">
+              <a:buNone/>
+            </a:pPr>
+            <a:r>
+              <a:rPr/>
+              <a:t>Write </a:t>
+            </a:r>
+            <a:r>
+              <a:rPr b="1"/>
+              <a:t>only inside your own </a:t>
+            </a:r>
+            <a:r>
+              <a:rPr b="1">
+                <a:latin typeface="Courier"/>
+              </a:rPr>
+              <a:t>submissions/group-NN/</a:t>
+            </a:r>
+            <a:r>
+              <a:rPr b="1"/>
+              <a:t> folder.</a:t>
+            </a:r>
+            <a:r>
+              <a:rPr/>
+              <a:t> Never edit the course files or the top-level </a:t>
+            </a:r>
+            <a:r>
+              <a:rPr>
+                <a:latin typeface="Courier"/>
+              </a:rPr>
+              <a:t>README.md</a:t>
+            </a:r>
+            <a:r>
+              <a:rPr/>
+              <a:t> — those are mine, and </a:t>
             </a:r>
             <a:r>
               <a:rPr>
@@ -4957,131 +5260,7 @@
             </a:r>
             <a:r>
               <a:rPr/>
-              <a:t>:</a:t>
-            </a:r>
-          </a:p>
-          <a:p>
-            <a:pPr lvl="0" indent="0" marL="0">
-              <a:buNone/>
-            </a:pPr>
-            <a:r>
-              <a:rPr/>
-              <a:t>VS Codium terminal</a:t>
-            </a:r>
-          </a:p>
-          <a:p>
-            <a:pPr lvl="0" indent="0">
-              <a:buNone/>
-            </a:pPr>
-            <a:r>
-              <a:rPr>
-                <a:solidFill>
-                  <a:srgbClr val="06287E"/>
-                </a:solidFill>
-                <a:latin typeface="Courier"/>
-              </a:rPr>
-              <a:t>git</a:t>
-            </a:r>
-            <a:r>
-              <a:rPr>
-                <a:latin typeface="Courier"/>
-              </a:rPr>
-              <a:t> checkout group-XX      </a:t>
-            </a:r>
-            <a:r>
-              <a:rPr i="1">
-                <a:solidFill>
-                  <a:srgbClr val="60A0B0"/>
-                </a:solidFill>
-                <a:latin typeface="Courier"/>
-              </a:rPr>
-              <a:t># your group's branch</a:t>
-            </a:r>
-            <a:br/>
-            <a:r>
-              <a:rPr>
-                <a:solidFill>
-                  <a:srgbClr val="06287E"/>
-                </a:solidFill>
-                <a:latin typeface="Courier"/>
-              </a:rPr>
-              <a:t>git</a:t>
-            </a:r>
-            <a:r>
-              <a:rPr>
-                <a:latin typeface="Courier"/>
-              </a:rPr>
-              <a:t> pull                   </a:t>
-            </a:r>
-            <a:r>
-              <a:rPr i="1">
-                <a:solidFill>
-                  <a:srgbClr val="60A0B0"/>
-                </a:solidFill>
-                <a:latin typeface="Courier"/>
-              </a:rPr>
-              <a:t># take teammates' work first</a:t>
-            </a:r>
-            <a:br/>
-            <a:r>
-              <a:rPr i="1">
-                <a:solidFill>
-                  <a:srgbClr val="60A0B0"/>
-                </a:solidFill>
-                <a:latin typeface="Courier"/>
-              </a:rPr>
-              <a:t># ... work, commit ...</a:t>
-            </a:r>
-            <a:br/>
-            <a:r>
-              <a:rPr>
-                <a:solidFill>
-                  <a:srgbClr val="06287E"/>
-                </a:solidFill>
-                <a:latin typeface="Courier"/>
-              </a:rPr>
-              <a:t>git</a:t>
-            </a:r>
-            <a:r>
-              <a:rPr>
-                <a:latin typeface="Courier"/>
-              </a:rPr>
-              <a:t> push</a:t>
-            </a:r>
-          </a:p>
-          <a:p>
-            <a:pPr lvl="0" indent="0" marL="0">
-              <a:buNone/>
-            </a:pPr>
-            <a:r>
-              <a:rPr/>
-              <a:t>Then open a </a:t>
-            </a:r>
-            <a:r>
-              <a:rPr b="1"/>
-              <a:t>pull request</a:t>
-            </a:r>
-            <a:r>
-              <a:rPr/>
-              <a:t> on GitHub so a teammate reads the change before it joins </a:t>
-            </a:r>
-            <a:r>
-              <a:rPr>
-                <a:latin typeface="Courier"/>
-              </a:rPr>
-              <a:t>main</a:t>
-            </a:r>
-            <a:r>
-              <a:rPr/>
-              <a:t>. That review </a:t>
-            </a:r>
-            <a:r>
-              <a:rPr i="1"/>
-              <a:t>is</a:t>
-            </a:r>
-            <a:r>
-              <a:rPr/>
-              <a:t> the group work.</a:t>
+              <a:t> is protected.</a:t>
             </a:r>
           </a:p>
         </p:txBody>
@@ -5128,7 +5307,7 @@
             </a:pPr>
             <a:r>
               <a:rPr/>
-              <a:t>When two of you edit the same lines</a:t>
+              <a:t>Getting other people’s work</a:t>
             </a:r>
           </a:p>
         </p:txBody>
@@ -5153,7 +5332,7 @@
             </a:pPr>
             <a:r>
               <a:rPr/>
-              <a:t>Git stops and marks the conflict in the file:</a:t>
+              <a:t>VS Codium terminal</a:t>
             </a:r>
           </a:p>
           <a:p>
@@ -5162,48 +5341,31 @@
             </a:pPr>
             <a:r>
               <a:rPr>
-                <a:latin typeface="Courier"/>
-              </a:rPr>
-              <a:t>&lt;&lt;&lt;&lt;&lt;&lt;&lt; HEAD
-alpha = 0.05
-=======
-alpha = 0.01
-&gt;&gt;&gt;&gt;&gt;&gt;&gt; their-branch</a:t>
-            </a:r>
-          </a:p>
-          <a:p>
-            <a:pPr lvl="0"/>
-            <a:r>
-              <a:rPr/>
-              <a:t>Delete the markers and keep the version you both agree on</a:t>
-            </a:r>
-          </a:p>
-          <a:p>
-            <a:pPr lvl="0"/>
-            <a:r>
-              <a:rPr>
-                <a:latin typeface="Courier"/>
-              </a:rPr>
-              <a:t>git add</a:t>
-            </a:r>
-            <a:r>
-              <a:rPr/>
-              <a:t> the file, then </a:t>
-            </a:r>
-            <a:r>
-              <a:rPr>
-                <a:latin typeface="Courier"/>
-              </a:rPr>
-              <a:t>git commit</a:t>
-            </a:r>
-          </a:p>
-          <a:p>
-            <a:pPr lvl="0" indent="0" marL="0">
-              <a:buNone/>
-            </a:pPr>
-            <a:r>
-              <a:rPr/>
-              <a:t>A conflict is not a failure. It is git refusing to guess which of you was right.</a:t>
+                <a:solidFill>
+                  <a:srgbClr val="06287E"/>
+                </a:solidFill>
+                <a:latin typeface="Courier"/>
+              </a:rPr>
+              <a:t>git</a:t>
+            </a:r>
+            <a:r>
+              <a:rPr>
+                <a:latin typeface="Courier"/>
+              </a:rPr>
+              <a:t> pull</a:t>
+            </a:r>
+          </a:p>
+          <a:p>
+            <a:pPr lvl="0" indent="0" marL="0">
+              <a:buNone/>
+            </a:pPr>
+            <a:r>
+              <a:rPr b="1"/>
+              <a:t>Pull before you start working, every time.</a:t>
+            </a:r>
+            <a:r>
+              <a:rPr/>
+              <a:t> Most merge conflicts are caused by someone editing a stale copy of a file for two hours.</a:t>
             </a:r>
           </a:p>
         </p:txBody>
@@ -5240,136 +5402,22 @@
             <p:ph type="title"/>
           </p:nvPr>
         </p:nvSpPr>
-        <p:spPr/>
-        <p:txBody>
-          <a:bodyPr/>
-          <a:lstStyle/>
-          <a:p>
-            <a:pPr lvl="0" indent="0" marL="0">
-              <a:buNone/>
-            </a:pPr>
-            <a:r>
-              <a:rPr/>
-              <a:t>What aider does to your history</a:t>
-            </a:r>
-          </a:p>
-        </p:txBody>
-      </p:sp>
-      <p:sp>
-        <p:nvSpPr>
-          <p:cNvPr id="3" name="Content Placeholder 2"/>
-          <p:cNvSpPr>
-            <a:spLocks noGrp="1"/>
-          </p:cNvSpPr>
-          <p:nvPr>
-            <p:ph idx="1"/>
-          </p:nvPr>
-        </p:nvSpPr>
-        <p:spPr/>
-        <p:txBody>
-          <a:bodyPr/>
-          <a:lstStyle/>
-          <a:p>
-            <a:pPr lvl="0" indent="0" marL="0">
-              <a:buNone/>
-            </a:pPr>
-            <a:r>
-              <a:rPr/>
-              <a:t>aider </a:t>
-            </a:r>
-            <a:r>
-              <a:rPr b="1"/>
-              <a:t>commits automatically</a:t>
-            </a:r>
-            <a:r>
-              <a:rPr/>
-              <a:t> after each change it applies — and this course counts commits as evidence of who did the work.</a:t>
-            </a:r>
-          </a:p>
-          <a:p>
-            <a:pPr lvl="0" indent="0" marL="0">
-              <a:buNone/>
-            </a:pPr>
-            <a:r>
-              <a:rPr/>
-              <a:t>VS Codium terminal</a:t>
-            </a:r>
-          </a:p>
-          <a:p>
-            <a:pPr lvl="0" indent="0">
-              <a:buNone/>
-            </a:pPr>
-            <a:r>
-              <a:rPr>
-                <a:solidFill>
-                  <a:srgbClr val="06287E"/>
-                </a:solidFill>
-                <a:latin typeface="Courier"/>
-              </a:rPr>
-              <a:t>git</a:t>
-            </a:r>
-            <a:r>
-              <a:rPr>
-                <a:latin typeface="Courier"/>
-              </a:rPr>
-              <a:t> log </a:t>
-            </a:r>
-            <a:r>
-              <a:rPr>
-                <a:solidFill>
-                  <a:srgbClr val="7D9029"/>
-                </a:solidFill>
-                <a:latin typeface="Courier"/>
-              </a:rPr>
-              <a:t>--oneline</a:t>
-            </a:r>
-            <a:br/>
-            <a:r>
-              <a:rPr>
-                <a:latin typeface="Courier"/>
-              </a:rPr>
-              <a:t>aider </a:t>
-            </a:r>
-            <a:r>
-              <a:rPr>
-                <a:solidFill>
-                  <a:srgbClr val="7D9029"/>
-                </a:solidFill>
-                <a:latin typeface="Courier"/>
-              </a:rPr>
-              <a:t>--model</a:t>
-            </a:r>
-            <a:r>
-              <a:rPr>
-                <a:latin typeface="Courier"/>
-              </a:rPr>
-              <a:t> ollama_chat/qwen2.5-coder:7b </a:t>
-            </a:r>
-            <a:r>
-              <a:rPr>
-                <a:solidFill>
-                  <a:srgbClr val="7D9029"/>
-                </a:solidFill>
-                <a:latin typeface="Courier"/>
-              </a:rPr>
-              <a:t>--no-auto-commits</a:t>
-            </a:r>
-          </a:p>
-          <a:p>
-            <a:pPr lvl="0" indent="0" marL="0">
-              <a:buNone/>
-            </a:pPr>
-            <a:r>
-              <a:rPr/>
-              <a:t>Commits made by the agent are attributed to </a:t>
-            </a:r>
-            <a:r>
-              <a:rPr b="1"/>
-              <a:t>you</a:t>
-            </a:r>
-            <a:r>
-              <a:rPr/>
-              <a:t>. That is correct — you directed it. But read the diff before accepting: you are answerable for every line in your repository.</a:t>
+        <p:spPr>
+          <a:xfrm>
+            <a:off x="722313" y="3305176"/>
+            <a:ext cx="7772400" cy="1021556"/>
+          </a:xfrm>
+        </p:spPr>
+        <p:txBody>
+          <a:bodyPr/>
+          <a:lstStyle/>
+          <a:p>
+            <a:pPr lvl="0" indent="0" marL="0">
+              <a:buNone/>
+            </a:pPr>
+            <a:r>
+              <a:rPr/>
+              <a:t>Working together</a:t>
             </a:r>
           </a:p>
         </p:txBody>
@@ -5416,7 +5464,7 @@
             </a:pPr>
             <a:r>
               <a:rPr/>
-              <a:t>Rotate the roles</a:t>
+              <a:t>Branches</a:t>
             </a:r>
           </a:p>
         </p:txBody>
@@ -5441,73 +5489,141 @@
             </a:pPr>
             <a:r>
               <a:rPr/>
-              <a:t>Your group logs a Driver, an Analyst and a Reporter each session.</a:t>
-            </a:r>
-          </a:p>
-          <a:p>
-            <a:pPr lvl="0"/>
+              <a:t>Work on a branch, not directly on </a:t>
+            </a:r>
+            <a:r>
+              <a:rPr>
+                <a:latin typeface="Courier"/>
+              </a:rPr>
+              <a:t>main</a:t>
+            </a:r>
+            <a:r>
+              <a:rPr/>
+              <a:t>:</a:t>
+            </a:r>
+          </a:p>
+          <a:p>
+            <a:pPr lvl="0" indent="0" marL="0">
+              <a:buNone/>
+            </a:pPr>
+            <a:r>
+              <a:rPr/>
+              <a:t>VS Codium terminal</a:t>
+            </a:r>
+          </a:p>
+          <a:p>
+            <a:pPr lvl="0" indent="0">
+              <a:buNone/>
+            </a:pPr>
+            <a:r>
+              <a:rPr>
+                <a:solidFill>
+                  <a:srgbClr val="06287E"/>
+                </a:solidFill>
+                <a:latin typeface="Courier"/>
+              </a:rPr>
+              <a:t>git</a:t>
+            </a:r>
+            <a:r>
+              <a:rPr>
+                <a:latin typeface="Courier"/>
+              </a:rPr>
+              <a:t> checkout group-07      </a:t>
+            </a:r>
+            <a:r>
+              <a:rPr i="1">
+                <a:solidFill>
+                  <a:srgbClr val="60A0B0"/>
+                </a:solidFill>
+                <a:latin typeface="Courier"/>
+              </a:rPr>
+              <a:t># your group's branch</a:t>
+            </a:r>
+            <a:br/>
+            <a:r>
+              <a:rPr>
+                <a:solidFill>
+                  <a:srgbClr val="06287E"/>
+                </a:solidFill>
+                <a:latin typeface="Courier"/>
+              </a:rPr>
+              <a:t>git</a:t>
+            </a:r>
+            <a:r>
+              <a:rPr>
+                <a:latin typeface="Courier"/>
+              </a:rPr>
+              <a:t> pull                   </a:t>
+            </a:r>
+            <a:r>
+              <a:rPr i="1">
+                <a:solidFill>
+                  <a:srgbClr val="60A0B0"/>
+                </a:solidFill>
+                <a:latin typeface="Courier"/>
+              </a:rPr>
+              <a:t># take teammates' work first</a:t>
+            </a:r>
+            <a:br/>
+            <a:r>
+              <a:rPr i="1">
+                <a:solidFill>
+                  <a:srgbClr val="60A0B0"/>
+                </a:solidFill>
+                <a:latin typeface="Courier"/>
+              </a:rPr>
+              <a:t># ... work, commit ...</a:t>
+            </a:r>
+            <a:br/>
+            <a:r>
+              <a:rPr>
+                <a:solidFill>
+                  <a:srgbClr val="06287E"/>
+                </a:solidFill>
+                <a:latin typeface="Courier"/>
+              </a:rPr>
+              <a:t>git</a:t>
+            </a:r>
+            <a:r>
+              <a:rPr>
+                <a:latin typeface="Courier"/>
+              </a:rPr>
+              <a:t> push</a:t>
+            </a:r>
+          </a:p>
+          <a:p>
+            <a:pPr lvl="0" indent="0" marL="0">
+              <a:buNone/>
+            </a:pPr>
+            <a:r>
+              <a:rPr/>
+              <a:t>Then open a </a:t>
+            </a:r>
             <a:r>
               <a:rPr b="1"/>
-              <a:t>Driver</a:t>
-            </a:r>
-            <a:r>
-              <a:rPr/>
-              <a:t> writes the code</a:t>
-            </a:r>
-          </a:p>
-          <a:p>
-            <a:pPr lvl="0"/>
-            <a:r>
-              <a:rPr b="1"/>
-              <a:t>Analyst</a:t>
-            </a:r>
-            <a:r>
-              <a:rPr/>
-              <a:t> decides the specification and owns the interpretation</a:t>
-            </a:r>
-          </a:p>
-          <a:p>
-            <a:pPr lvl="0"/>
-            <a:r>
-              <a:rPr b="1"/>
-              <a:t>Reporter</a:t>
-            </a:r>
-            <a:r>
-              <a:rPr/>
-              <a:t> writes the three sentences and presents </a:t>
+              <a:t>pull request</a:t>
+            </a:r>
+            <a:r>
+              <a:rPr/>
+              <a:t> on GitHub so a teammate reads the change before it joins </a:t>
+            </a:r>
+            <a:r>
+              <a:rPr>
+                <a:latin typeface="Courier"/>
+              </a:rPr>
+              <a:t>main</a:t>
+            </a:r>
+            <a:r>
+              <a:rPr/>
+              <a:t>. That review </a:t>
             </a:r>
             <a:r>
               <a:rPr i="1"/>
-              <a:t>if drawn</a:t>
-            </a:r>
-          </a:p>
-          <a:p>
-            <a:pPr lvl="0" indent="0" marL="0">
-              <a:buNone/>
-            </a:pPr>
-            <a:r>
-              <a:rPr/>
-              <a:t>Over ten sessions each of you should hold each role three or four times. Logged in </a:t>
-            </a:r>
-            <a:r>
-              <a:rPr>
-                <a:latin typeface="Courier"/>
-              </a:rPr>
-              <a:t>assessment/role-logs/gXX.md</a:t>
-            </a:r>
-            <a:r>
-              <a:rPr/>
-              <a:t>, checked with </a:t>
-            </a:r>
-            <a:r>
-              <a:rPr>
-                <a:latin typeface="Courier"/>
-              </a:rPr>
-              <a:t>python scripts/assess.py roles</a:t>
-            </a:r>
-            <a:r>
-              <a:rPr/>
-              <a:t>.</a:t>
+              <a:t>is</a:t>
+            </a:r>
+            <a:r>
+              <a:rPr/>
+              <a:t> the group work.</a:t>
             </a:r>
           </a:p>
         </p:txBody>
@@ -5554,7 +5670,7 @@
             </a:pPr>
             <a:r>
               <a:rPr/>
-              <a:t>Why “if drawn” matters</a:t>
+              <a:t>When two of you edit the same lines</a:t>
             </a:r>
           </a:p>
         </p:txBody>
@@ -5579,24 +5695,57 @@
             </a:pPr>
             <a:r>
               <a:rPr/>
-              <a:t>The presenter is </a:t>
-            </a:r>
-            <a:r>
-              <a:rPr b="1"/>
-              <a:t>drawn at random</a:t>
-            </a:r>
-            <a:r>
-              <a:rPr/>
-              <a:t> at the start of the slot.</a:t>
-            </a:r>
-          </a:p>
-          <a:p>
-            <a:pPr lvl="0" indent="0" marL="0">
-              <a:buNone/>
-            </a:pPr>
-            <a:r>
-              <a:rPr/>
-              <a:t>A group where one person understands the model has not learned the material. The draw makes shared understanding the only viable strategy — and it is announced now, in week two, so nobody is surprised in week twelve.</a:t>
+              <a:t>Git stops and marks the conflict in the file:</a:t>
+            </a:r>
+          </a:p>
+          <a:p>
+            <a:pPr lvl="0" indent="0">
+              <a:buNone/>
+            </a:pPr>
+            <a:r>
+              <a:rPr>
+                <a:latin typeface="Courier"/>
+              </a:rPr>
+              <a:t>&lt;&lt;&lt;&lt;&lt;&lt;&lt; HEAD
+alpha = 0.05
+=======
+alpha = 0.01
+&gt;&gt;&gt;&gt;&gt;&gt;&gt; their-branch</a:t>
+            </a:r>
+          </a:p>
+          <a:p>
+            <a:pPr lvl="0"/>
+            <a:r>
+              <a:rPr/>
+              <a:t>Delete the markers and keep the version you both agree on</a:t>
+            </a:r>
+          </a:p>
+          <a:p>
+            <a:pPr lvl="0"/>
+            <a:r>
+              <a:rPr>
+                <a:latin typeface="Courier"/>
+              </a:rPr>
+              <a:t>git add</a:t>
+            </a:r>
+            <a:r>
+              <a:rPr/>
+              <a:t> the file, then </a:t>
+            </a:r>
+            <a:r>
+              <a:rPr>
+                <a:latin typeface="Courier"/>
+              </a:rPr>
+              <a:t>git commit</a:t>
+            </a:r>
+          </a:p>
+          <a:p>
+            <a:pPr lvl="0" indent="0" marL="0">
+              <a:buNone/>
+            </a:pPr>
+            <a:r>
+              <a:rPr/>
+              <a:t>A conflict is not a failure. It is git refusing to guess which of you was right.</a:t>
             </a:r>
           </a:p>
         </p:txBody>
@@ -5633,6 +5782,508 @@
             <p:ph type="title"/>
           </p:nvPr>
         </p:nvSpPr>
+        <p:spPr/>
+        <p:txBody>
+          <a:bodyPr/>
+          <a:lstStyle/>
+          <a:p>
+            <a:pPr lvl="0" indent="0" marL="0">
+              <a:buNone/>
+            </a:pPr>
+            <a:r>
+              <a:rPr/>
+              <a:t>What aider does to your history</a:t>
+            </a:r>
+          </a:p>
+        </p:txBody>
+      </p:sp>
+      <p:sp>
+        <p:nvSpPr>
+          <p:cNvPr id="3" name="Content Placeholder 2"/>
+          <p:cNvSpPr>
+            <a:spLocks noGrp="1"/>
+          </p:cNvSpPr>
+          <p:nvPr>
+            <p:ph idx="1"/>
+          </p:nvPr>
+        </p:nvSpPr>
+        <p:spPr/>
+        <p:txBody>
+          <a:bodyPr/>
+          <a:lstStyle/>
+          <a:p>
+            <a:pPr lvl="0" indent="0" marL="0">
+              <a:buNone/>
+            </a:pPr>
+            <a:r>
+              <a:rPr/>
+              <a:t>aider </a:t>
+            </a:r>
+            <a:r>
+              <a:rPr b="1"/>
+              <a:t>commits automatically</a:t>
+            </a:r>
+            <a:r>
+              <a:rPr/>
+              <a:t> after each change it applies — and this course counts commits as evidence of who did the work.</a:t>
+            </a:r>
+          </a:p>
+          <a:p>
+            <a:pPr lvl="0" indent="0" marL="0">
+              <a:buNone/>
+            </a:pPr>
+            <a:r>
+              <a:rPr/>
+              <a:t>VS Codium terminal</a:t>
+            </a:r>
+          </a:p>
+          <a:p>
+            <a:pPr lvl="0" indent="0">
+              <a:buNone/>
+            </a:pPr>
+            <a:r>
+              <a:rPr>
+                <a:solidFill>
+                  <a:srgbClr val="06287E"/>
+                </a:solidFill>
+                <a:latin typeface="Courier"/>
+              </a:rPr>
+              <a:t>git</a:t>
+            </a:r>
+            <a:r>
+              <a:rPr>
+                <a:latin typeface="Courier"/>
+              </a:rPr>
+              <a:t> log </a:t>
+            </a:r>
+            <a:r>
+              <a:rPr>
+                <a:solidFill>
+                  <a:srgbClr val="7D9029"/>
+                </a:solidFill>
+                <a:latin typeface="Courier"/>
+              </a:rPr>
+              <a:t>--oneline</a:t>
+            </a:r>
+            <a:br/>
+            <a:r>
+              <a:rPr>
+                <a:latin typeface="Courier"/>
+              </a:rPr>
+              <a:t>aider </a:t>
+            </a:r>
+            <a:r>
+              <a:rPr>
+                <a:solidFill>
+                  <a:srgbClr val="7D9029"/>
+                </a:solidFill>
+                <a:latin typeface="Courier"/>
+              </a:rPr>
+              <a:t>--model</a:t>
+            </a:r>
+            <a:r>
+              <a:rPr>
+                <a:latin typeface="Courier"/>
+              </a:rPr>
+              <a:t> ollama_chat/qwen2.5-coder:7b </a:t>
+            </a:r>
+            <a:r>
+              <a:rPr>
+                <a:solidFill>
+                  <a:srgbClr val="7D9029"/>
+                </a:solidFill>
+                <a:latin typeface="Courier"/>
+              </a:rPr>
+              <a:t>--no-auto-commits</a:t>
+            </a:r>
+          </a:p>
+          <a:p>
+            <a:pPr lvl="0" indent="0" marL="0">
+              <a:buNone/>
+            </a:pPr>
+            <a:r>
+              <a:rPr/>
+              <a:t>Commits made by the agent are attributed to </a:t>
+            </a:r>
+            <a:r>
+              <a:rPr b="1"/>
+              <a:t>you</a:t>
+            </a:r>
+            <a:r>
+              <a:rPr/>
+              <a:t>. That is correct — you directed it. But read the diff before accepting: you are answerable for every line in your repository.</a:t>
+            </a:r>
+          </a:p>
+        </p:txBody>
+      </p:sp>
+    </p:spTree>
+  </p:cSld>
+</p:sld>
+</file>
+
+<file path=ppt/slides/slide29.xml><?xml version="1.0" encoding="utf-8"?>
+<p:sld xmlns:a="http://schemas.openxmlformats.org/drawingml/2006/main" xmlns:r="http://schemas.openxmlformats.org/officeDocument/2006/relationships" xmlns:p="http://schemas.openxmlformats.org/presentationml/2006/main">
+  <p:cSld>
+    <p:spTree>
+      <p:nvGrpSpPr>
+        <p:cNvPr id="1" name=""/>
+        <p:cNvGrpSpPr/>
+        <p:nvPr/>
+      </p:nvGrpSpPr>
+      <p:grpSpPr>
+        <a:xfrm>
+          <a:off x="0" y="0"/>
+          <a:ext cx="0" cy="0"/>
+          <a:chOff x="0" y="0"/>
+          <a:chExt cx="0" cy="0"/>
+        </a:xfrm>
+      </p:grpSpPr>
+      <p:sp>
+        <p:nvSpPr>
+          <p:cNvPr id="2" name="Title 1"/>
+          <p:cNvSpPr>
+            <a:spLocks noGrp="1"/>
+          </p:cNvSpPr>
+          <p:nvPr>
+            <p:ph type="title"/>
+          </p:nvPr>
+        </p:nvSpPr>
+        <p:spPr/>
+        <p:txBody>
+          <a:bodyPr/>
+          <a:lstStyle/>
+          <a:p>
+            <a:pPr lvl="0" indent="0" marL="0">
+              <a:buNone/>
+            </a:pPr>
+            <a:r>
+              <a:rPr/>
+              <a:t>Rotate the roles</a:t>
+            </a:r>
+          </a:p>
+        </p:txBody>
+      </p:sp>
+      <p:sp>
+        <p:nvSpPr>
+          <p:cNvPr id="3" name="Content Placeholder 2"/>
+          <p:cNvSpPr>
+            <a:spLocks noGrp="1"/>
+          </p:cNvSpPr>
+          <p:nvPr>
+            <p:ph idx="1"/>
+          </p:nvPr>
+        </p:nvSpPr>
+        <p:spPr/>
+        <p:txBody>
+          <a:bodyPr/>
+          <a:lstStyle/>
+          <a:p>
+            <a:pPr lvl="0" indent="0" marL="0">
+              <a:buNone/>
+            </a:pPr>
+            <a:r>
+              <a:rPr/>
+              <a:t>Your group logs a Driver, an Analyst and a Reporter each session.</a:t>
+            </a:r>
+          </a:p>
+          <a:p>
+            <a:pPr lvl="0"/>
+            <a:r>
+              <a:rPr b="1"/>
+              <a:t>Driver</a:t>
+            </a:r>
+            <a:r>
+              <a:rPr/>
+              <a:t> writes the code</a:t>
+            </a:r>
+          </a:p>
+          <a:p>
+            <a:pPr lvl="0"/>
+            <a:r>
+              <a:rPr b="1"/>
+              <a:t>Analyst</a:t>
+            </a:r>
+            <a:r>
+              <a:rPr/>
+              <a:t> decides the specification and owns the interpretation</a:t>
+            </a:r>
+          </a:p>
+          <a:p>
+            <a:pPr lvl="0"/>
+            <a:r>
+              <a:rPr b="1"/>
+              <a:t>Reporter</a:t>
+            </a:r>
+            <a:r>
+              <a:rPr/>
+              <a:t> writes the three sentences and presents </a:t>
+            </a:r>
+            <a:r>
+              <a:rPr i="1"/>
+              <a:t>if drawn</a:t>
+            </a:r>
+          </a:p>
+          <a:p>
+            <a:pPr lvl="0" indent="0" marL="0">
+              <a:buNone/>
+            </a:pPr>
+            <a:r>
+              <a:rPr/>
+              <a:t>Over ten sessions each of you should hold each role three or four times. Logged in </a:t>
+            </a:r>
+            <a:r>
+              <a:rPr>
+                <a:latin typeface="Courier"/>
+              </a:rPr>
+              <a:t>assessment/role-logs/gNN.md</a:t>
+            </a:r>
+            <a:r>
+              <a:rPr/>
+              <a:t> — again, your own number — checked with </a:t>
+            </a:r>
+            <a:r>
+              <a:rPr>
+                <a:latin typeface="Courier"/>
+              </a:rPr>
+              <a:t>python scripts/assess.py roles</a:t>
+            </a:r>
+            <a:r>
+              <a:rPr/>
+              <a:t>.</a:t>
+            </a:r>
+          </a:p>
+        </p:txBody>
+      </p:sp>
+    </p:spTree>
+  </p:cSld>
+</p:sld>
+</file>
+
+<file path=ppt/slides/slide3.xml><?xml version="1.0" encoding="utf-8"?>
+<p:sld xmlns:a="http://schemas.openxmlformats.org/drawingml/2006/main" xmlns:r="http://schemas.openxmlformats.org/officeDocument/2006/relationships" xmlns:p="http://schemas.openxmlformats.org/presentationml/2006/main">
+  <p:cSld>
+    <p:spTree>
+      <p:nvGrpSpPr>
+        <p:cNvPr id="1" name=""/>
+        <p:cNvGrpSpPr/>
+        <p:nvPr/>
+      </p:nvGrpSpPr>
+      <p:grpSpPr>
+        <a:xfrm>
+          <a:off x="0" y="0"/>
+          <a:ext cx="0" cy="0"/>
+          <a:chOff x="0" y="0"/>
+          <a:chExt cx="0" cy="0"/>
+        </a:xfrm>
+      </p:grpSpPr>
+      <p:sp>
+        <p:nvSpPr>
+          <p:cNvPr id="2" name="Title 1"/>
+          <p:cNvSpPr>
+            <a:spLocks noGrp="1"/>
+          </p:cNvSpPr>
+          <p:nvPr>
+            <p:ph type="title"/>
+          </p:nvPr>
+        </p:nvSpPr>
+        <p:spPr/>
+        <p:txBody>
+          <a:bodyPr/>
+          <a:lstStyle/>
+          <a:p>
+            <a:pPr lvl="0" indent="0" marL="0">
+              <a:buNone/>
+            </a:pPr>
+            <a:r>
+              <a:rPr/>
+              <a:t>What you already have</a:t>
+            </a:r>
+          </a:p>
+        </p:txBody>
+      </p:sp>
+      <p:sp>
+        <p:nvSpPr>
+          <p:cNvPr id="3" name="Content Placeholder 2"/>
+          <p:cNvSpPr>
+            <a:spLocks noGrp="1"/>
+          </p:cNvSpPr>
+          <p:nvPr>
+            <p:ph idx="1"/>
+          </p:nvPr>
+        </p:nvSpPr>
+        <p:spPr/>
+        <p:txBody>
+          <a:bodyPr/>
+          <a:lstStyle/>
+          <a:p>
+            <a:pPr lvl="0" indent="0" marL="0">
+              <a:buNone/>
+            </a:pPr>
+            <a:r>
+              <a:rPr/>
+              <a:t>From the Session 01 pre-session, on the machine you are holding:</a:t>
+            </a:r>
+          </a:p>
+          <a:p>
+            <a:pPr lvl="0"/>
+            <a:r>
+              <a:rPr/>
+              <a:t>VS Codium, with its integrated terminal</a:t>
+            </a:r>
+          </a:p>
+          <a:p>
+            <a:pPr lvl="0"/>
+            <a:r>
+              <a:rPr/>
+              <a:t>A Python environment that imports numpy, pandas and scikit-learn</a:t>
+            </a:r>
+          </a:p>
+          <a:p>
+            <a:pPr lvl="0"/>
+            <a:r>
+              <a:rPr/>
+              <a:t>Ollama serving Qwen 2.5 Coder, verified with the wifi off</a:t>
+            </a:r>
+          </a:p>
+          <a:p>
+            <a:pPr lvl="0"/>
+            <a:r>
+              <a:rPr/>
+              <a:t>aider, editing real files from the terminal</a:t>
+            </a:r>
+          </a:p>
+          <a:p>
+            <a:pPr lvl="0" indent="0" marL="0">
+              <a:buNone/>
+            </a:pPr>
+            <a:r>
+              <a:rPr/>
+              <a:t>If any of those is missing, fix it before this. Everything below assumes a working workstation.</a:t>
+            </a:r>
+          </a:p>
+        </p:txBody>
+      </p:sp>
+    </p:spTree>
+  </p:cSld>
+</p:sld>
+</file>
+
+<file path=ppt/slides/slide30.xml><?xml version="1.0" encoding="utf-8"?>
+<p:sld xmlns:a="http://schemas.openxmlformats.org/drawingml/2006/main" xmlns:r="http://schemas.openxmlformats.org/officeDocument/2006/relationships" xmlns:p="http://schemas.openxmlformats.org/presentationml/2006/main">
+  <p:cSld>
+    <p:spTree>
+      <p:nvGrpSpPr>
+        <p:cNvPr id="1" name=""/>
+        <p:cNvGrpSpPr/>
+        <p:nvPr/>
+      </p:nvGrpSpPr>
+      <p:grpSpPr>
+        <a:xfrm>
+          <a:off x="0" y="0"/>
+          <a:ext cx="0" cy="0"/>
+          <a:chOff x="0" y="0"/>
+          <a:chExt cx="0" cy="0"/>
+        </a:xfrm>
+      </p:grpSpPr>
+      <p:sp>
+        <p:nvSpPr>
+          <p:cNvPr id="2" name="Title 1"/>
+          <p:cNvSpPr>
+            <a:spLocks noGrp="1"/>
+          </p:cNvSpPr>
+          <p:nvPr>
+            <p:ph type="title"/>
+          </p:nvPr>
+        </p:nvSpPr>
+        <p:spPr/>
+        <p:txBody>
+          <a:bodyPr/>
+          <a:lstStyle/>
+          <a:p>
+            <a:pPr lvl="0" indent="0" marL="0">
+              <a:buNone/>
+            </a:pPr>
+            <a:r>
+              <a:rPr/>
+              <a:t>Why “if drawn” matters</a:t>
+            </a:r>
+          </a:p>
+        </p:txBody>
+      </p:sp>
+      <p:sp>
+        <p:nvSpPr>
+          <p:cNvPr id="3" name="Content Placeholder 2"/>
+          <p:cNvSpPr>
+            <a:spLocks noGrp="1"/>
+          </p:cNvSpPr>
+          <p:nvPr>
+            <p:ph idx="1"/>
+          </p:nvPr>
+        </p:nvSpPr>
+        <p:spPr/>
+        <p:txBody>
+          <a:bodyPr/>
+          <a:lstStyle/>
+          <a:p>
+            <a:pPr lvl="0" indent="0" marL="0">
+              <a:buNone/>
+            </a:pPr>
+            <a:r>
+              <a:rPr/>
+              <a:t>The presenter is </a:t>
+            </a:r>
+            <a:r>
+              <a:rPr b="1"/>
+              <a:t>drawn at random</a:t>
+            </a:r>
+            <a:r>
+              <a:rPr/>
+              <a:t> at the start of the slot.</a:t>
+            </a:r>
+          </a:p>
+          <a:p>
+            <a:pPr lvl="0" indent="0" marL="0">
+              <a:buNone/>
+            </a:pPr>
+            <a:r>
+              <a:rPr/>
+              <a:t>A group where one person understands the model has not learned the material. The draw makes shared understanding the only viable strategy — and it is announced now, in week two, so nobody is surprised in week twelve.</a:t>
+            </a:r>
+          </a:p>
+        </p:txBody>
+      </p:sp>
+    </p:spTree>
+  </p:cSld>
+</p:sld>
+</file>
+
+<file path=ppt/slides/slide31.xml><?xml version="1.0" encoding="utf-8"?>
+<p:sld xmlns:a="http://schemas.openxmlformats.org/drawingml/2006/main" xmlns:r="http://schemas.openxmlformats.org/officeDocument/2006/relationships" xmlns:p="http://schemas.openxmlformats.org/presentationml/2006/main">
+  <p:cSld>
+    <p:spTree>
+      <p:nvGrpSpPr>
+        <p:cNvPr id="1" name=""/>
+        <p:cNvGrpSpPr/>
+        <p:nvPr/>
+      </p:nvGrpSpPr>
+      <p:grpSpPr>
+        <a:xfrm>
+          <a:off x="0" y="0"/>
+          <a:ext cx="0" cy="0"/>
+          <a:chOff x="0" y="0"/>
+          <a:chExt cx="0" cy="0"/>
+        </a:xfrm>
+      </p:grpSpPr>
+      <p:sp>
+        <p:nvSpPr>
+          <p:cNvPr id="2" name="Title 1"/>
+          <p:cNvSpPr>
+            <a:spLocks noGrp="1"/>
+          </p:cNvSpPr>
+          <p:nvPr>
+            <p:ph type="title"/>
+          </p:nvPr>
+        </p:nvSpPr>
         <p:spPr>
           <a:xfrm>
             <a:off x="722313" y="3305176"/>
@@ -5658,7 +6309,7 @@
 </p:sld>
 </file>
 
-<file path=ppt/slides/slide29.xml><?xml version="1.0" encoding="utf-8"?>
+<file path=ppt/slides/slide32.xml><?xml version="1.0" encoding="utf-8"?>
 <p:sld xmlns:a="http://schemas.openxmlformats.org/drawingml/2006/main" xmlns:r="http://schemas.openxmlformats.org/officeDocument/2006/relationships" xmlns:p="http://schemas.openxmlformats.org/presentationml/2006/main">
   <p:cSld>
     <p:spTree>
@@ -5947,7 +6598,7 @@
 </p:sld>
 </file>
 
-<file path=ppt/slides/slide3.xml><?xml version="1.0" encoding="utf-8"?>
+<file path=ppt/slides/slide33.xml><?xml version="1.0" encoding="utf-8"?>
 <p:sld xmlns:a="http://schemas.openxmlformats.org/drawingml/2006/main" xmlns:r="http://schemas.openxmlformats.org/officeDocument/2006/relationships" xmlns:p="http://schemas.openxmlformats.org/presentationml/2006/main">
   <p:cSld>
     <p:spTree>
@@ -5966,31 +6617,6 @@
       </p:grpSpPr>
       <p:sp>
         <p:nvSpPr>
-          <p:cNvPr id="2" name="Title 1"/>
-          <p:cNvSpPr>
-            <a:spLocks noGrp="1"/>
-          </p:cNvSpPr>
-          <p:nvPr>
-            <p:ph type="title"/>
-          </p:nvPr>
-        </p:nvSpPr>
-        <p:spPr/>
-        <p:txBody>
-          <a:bodyPr/>
-          <a:lstStyle/>
-          <a:p>
-            <a:pPr lvl="0" indent="0" marL="0">
-              <a:buNone/>
-            </a:pPr>
-            <a:r>
-              <a:rPr/>
-              <a:t>What you already have</a:t>
-            </a:r>
-          </a:p>
-        </p:txBody>
-      </p:sp>
-      <p:sp>
-        <p:nvSpPr>
           <p:cNvPr id="3" name="Content Placeholder 2"/>
           <p:cNvSpPr>
             <a:spLocks noGrp="1"/>
@@ -6009,44 +6635,7 @@
             </a:pPr>
             <a:r>
               <a:rPr/>
-              <a:t>From the Session 01 pre-session, on the machine you are holding:</a:t>
-            </a:r>
-          </a:p>
-          <a:p>
-            <a:pPr lvl="0"/>
-            <a:r>
-              <a:rPr/>
-              <a:t>VS Codium, with its integrated terminal</a:t>
-            </a:r>
-          </a:p>
-          <a:p>
-            <a:pPr lvl="0"/>
-            <a:r>
-              <a:rPr/>
-              <a:t>A Python environment that imports numpy, pandas and scikit-learn</a:t>
-            </a:r>
-          </a:p>
-          <a:p>
-            <a:pPr lvl="0"/>
-            <a:r>
-              <a:rPr/>
-              <a:t>Ollama serving Qwen 2.5 Coder, verified with the wifi off</a:t>
-            </a:r>
-          </a:p>
-          <a:p>
-            <a:pPr lvl="0"/>
-            <a:r>
-              <a:rPr/>
-              <a:t>aider, editing real files from the terminal</a:t>
-            </a:r>
-          </a:p>
-          <a:p>
-            <a:pPr lvl="0" indent="0" marL="0">
-              <a:buNone/>
-            </a:pPr>
-            <a:r>
-              <a:rPr/>
-              <a:t>If any of those is missing, fix it before this. Everything below assumes a working workstation.</a:t>
+              <a:t>Still stuck? Ask Qwen — it is good at git, and it runs on your laptop.</a:t>
             </a:r>
           </a:p>
         </p:txBody>
@@ -6056,7 +6645,7 @@
 </p:sld>
 </file>
 
-<file path=ppt/slides/slide30.xml><?xml version="1.0" encoding="utf-8"?>
+<file path=ppt/slides/slide34.xml><?xml version="1.0" encoding="utf-8"?>
 <p:sld xmlns:a="http://schemas.openxmlformats.org/drawingml/2006/main" xmlns:r="http://schemas.openxmlformats.org/officeDocument/2006/relationships" xmlns:p="http://schemas.openxmlformats.org/presentationml/2006/main">
   <p:cSld>
     <p:spTree>
@@ -6075,6 +6664,31 @@
       </p:grpSpPr>
       <p:sp>
         <p:nvSpPr>
+          <p:cNvPr id="2" name="Title 1"/>
+          <p:cNvSpPr>
+            <a:spLocks noGrp="1"/>
+          </p:cNvSpPr>
+          <p:nvPr>
+            <p:ph type="title"/>
+          </p:nvPr>
+        </p:nvSpPr>
+        <p:spPr/>
+        <p:txBody>
+          <a:bodyPr/>
+          <a:lstStyle/>
+          <a:p>
+            <a:pPr lvl="0" indent="0" marL="0">
+              <a:buNone/>
+            </a:pPr>
+            <a:r>
+              <a:rPr/>
+              <a:t>Before Session 02</a:t>
+            </a:r>
+          </a:p>
+        </p:txBody>
+      </p:sp>
+      <p:sp>
+        <p:nvSpPr>
           <p:cNvPr id="3" name="Content Placeholder 2"/>
           <p:cNvSpPr>
             <a:spLocks noGrp="1"/>
@@ -6088,12 +6702,123 @@
           <a:bodyPr/>
           <a:lstStyle/>
           <a:p>
-            <a:pPr lvl="0" indent="0" marL="0">
-              <a:buNone/>
-            </a:pPr>
-            <a:r>
-              <a:rPr/>
-              <a:t>Still stuck? Ask Qwen — it is good at git, and it runs on your laptop.</a:t>
+            <a:pPr lvl="0"/>
+            <a:r>
+              <a:rPr/>
+              <a:t>✅ Git installed, </a:t>
+            </a:r>
+            <a:r>
+              <a:rPr>
+                <a:latin typeface="Courier"/>
+              </a:rPr>
+              <a:t>user.name</a:t>
+            </a:r>
+            <a:r>
+              <a:rPr/>
+              <a:t> and </a:t>
+            </a:r>
+            <a:r>
+              <a:rPr>
+                <a:latin typeface="Courier"/>
+              </a:rPr>
+              <a:t>user.email</a:t>
+            </a:r>
+            <a:r>
+              <a:rPr/>
+              <a:t> set to your real details</a:t>
+            </a:r>
+          </a:p>
+          <a:p>
+            <a:pPr lvl="0"/>
+            <a:r>
+              <a:rPr/>
+              <a:t>✅ GitHub account with two-factor authentication</a:t>
+            </a:r>
+          </a:p>
+          <a:p>
+            <a:pPr lvl="0"/>
+            <a:r>
+              <a:rPr/>
+              <a:t>✅ </a:t>
+            </a:r>
+            <a:r>
+              <a:rPr b="1"/>
+              <a:t>GitHub username sent to me</a:t>
+            </a:r>
+            <a:r>
+              <a:rPr/>
+              <a:t> — you cannot push until I add you</a:t>
+            </a:r>
+          </a:p>
+          <a:p>
+            <a:pPr lvl="0"/>
+            <a:r>
+              <a:rPr/>
+              <a:t>✅ Course repository cloned; the Session 01 ZIP folder deleted</a:t>
+            </a:r>
+          </a:p>
+          <a:p>
+            <a:pPr lvl="0"/>
+            <a:r>
+              <a:rPr/>
+              <a:t>✅ Your group branch checked out — your own number, not </a:t>
+            </a:r>
+            <a:r>
+              <a:rPr>
+                <a:latin typeface="Courier"/>
+              </a:rPr>
+              <a:t>XX</a:t>
+            </a:r>
+          </a:p>
+          <a:p>
+            <a:pPr lvl="0"/>
+            <a:r>
+              <a:rPr/>
+              <a:t>✅ One commit pushed </a:t>
+            </a:r>
+            <a:r>
+              <a:rPr b="1"/>
+              <a:t>by you personally</a:t>
+            </a:r>
+            <a:r>
+              <a:rPr/>
+              <a:t> to your group branch</a:t>
+            </a:r>
+          </a:p>
+          <a:p>
+            <a:pPr lvl="0"/>
+            <a:r>
+              <a:rPr/>
+              <a:t>✅ Your </a:t>
+            </a:r>
+            <a:r>
+              <a:rPr>
+                <a:latin typeface="Courier"/>
+              </a:rPr>
+              <a:t>user.name</a:t>
+            </a:r>
+            <a:r>
+              <a:rPr/>
+              <a:t> and </a:t>
+            </a:r>
+            <a:r>
+              <a:rPr>
+                <a:latin typeface="Courier"/>
+              </a:rPr>
+              <a:t>user.email</a:t>
+            </a:r>
+            <a:r>
+              <a:rPr/>
+              <a:t> written down to report</a:t>
+            </a:r>
+          </a:p>
+          <a:p>
+            <a:pPr lvl="0" indent="0" marL="0">
+              <a:buNone/>
+            </a:pPr>
+            <a:r>
+              <a:rPr/>
+              <a:t>“One commit pushed by you personally” means each of the three of you. Not one per group.</a:t>
             </a:r>
           </a:p>
         </p:txBody>
@@ -6103,200 +6828,7 @@
 </p:sld>
 </file>
 
-<file path=ppt/slides/slide31.xml><?xml version="1.0" encoding="utf-8"?>
-<p:sld xmlns:a="http://schemas.openxmlformats.org/drawingml/2006/main" xmlns:r="http://schemas.openxmlformats.org/officeDocument/2006/relationships" xmlns:p="http://schemas.openxmlformats.org/presentationml/2006/main">
-  <p:cSld>
-    <p:spTree>
-      <p:nvGrpSpPr>
-        <p:cNvPr id="1" name=""/>
-        <p:cNvGrpSpPr/>
-        <p:nvPr/>
-      </p:nvGrpSpPr>
-      <p:grpSpPr>
-        <a:xfrm>
-          <a:off x="0" y="0"/>
-          <a:ext cx="0" cy="0"/>
-          <a:chOff x="0" y="0"/>
-          <a:chExt cx="0" cy="0"/>
-        </a:xfrm>
-      </p:grpSpPr>
-      <p:sp>
-        <p:nvSpPr>
-          <p:cNvPr id="2" name="Title 1"/>
-          <p:cNvSpPr>
-            <a:spLocks noGrp="1"/>
-          </p:cNvSpPr>
-          <p:nvPr>
-            <p:ph type="title"/>
-          </p:nvPr>
-        </p:nvSpPr>
-        <p:spPr/>
-        <p:txBody>
-          <a:bodyPr/>
-          <a:lstStyle/>
-          <a:p>
-            <a:pPr lvl="0" indent="0" marL="0">
-              <a:buNone/>
-            </a:pPr>
-            <a:r>
-              <a:rPr/>
-              <a:t>Before Session 02</a:t>
-            </a:r>
-          </a:p>
-        </p:txBody>
-      </p:sp>
-      <p:sp>
-        <p:nvSpPr>
-          <p:cNvPr id="3" name="Content Placeholder 2"/>
-          <p:cNvSpPr>
-            <a:spLocks noGrp="1"/>
-          </p:cNvSpPr>
-          <p:nvPr>
-            <p:ph idx="1"/>
-          </p:nvPr>
-        </p:nvSpPr>
-        <p:spPr/>
-        <p:txBody>
-          <a:bodyPr/>
-          <a:lstStyle/>
-          <a:p>
-            <a:pPr lvl="0"/>
-            <a:r>
-              <a:rPr/>
-              <a:t>✅ Git installed, </a:t>
-            </a:r>
-            <a:r>
-              <a:rPr>
-                <a:latin typeface="Courier"/>
-              </a:rPr>
-              <a:t>user.name</a:t>
-            </a:r>
-            <a:r>
-              <a:rPr/>
-              <a:t> and </a:t>
-            </a:r>
-            <a:r>
-              <a:rPr>
-                <a:latin typeface="Courier"/>
-              </a:rPr>
-              <a:t>user.email</a:t>
-            </a:r>
-            <a:r>
-              <a:rPr/>
-              <a:t> set to your real details</a:t>
-            </a:r>
-          </a:p>
-          <a:p>
-            <a:pPr lvl="0"/>
-            <a:r>
-              <a:rPr/>
-              <a:t>✅ GitHub account with two-factor authentication</a:t>
-            </a:r>
-          </a:p>
-          <a:p>
-            <a:pPr lvl="0"/>
-            <a:r>
-              <a:rPr/>
-              <a:t>✅ </a:t>
-            </a:r>
-            <a:r>
-              <a:rPr b="1"/>
-              <a:t>GitHub username sent to me</a:t>
-            </a:r>
-            <a:r>
-              <a:rPr/>
-              <a:t> — you cannot push until I add you</a:t>
-            </a:r>
-          </a:p>
-          <a:p>
-            <a:pPr lvl="0"/>
-            <a:r>
-              <a:rPr/>
-              <a:t>✅ Course repository cloned; the Session 01 ZIP folder deleted</a:t>
-            </a:r>
-          </a:p>
-          <a:p>
-            <a:pPr lvl="0"/>
-            <a:r>
-              <a:rPr/>
-              <a:t>✅ </a:t>
-            </a:r>
-            <a:r>
-              <a:rPr>
-                <a:latin typeface="Courier"/>
-              </a:rPr>
-              <a:t>group-XX</a:t>
-            </a:r>
-            <a:r>
-              <a:rPr/>
-              <a:t> branch checked out</a:t>
-            </a:r>
-          </a:p>
-          <a:p>
-            <a:pPr lvl="0"/>
-            <a:r>
-              <a:rPr/>
-              <a:t>✅ One commit pushed </a:t>
-            </a:r>
-            <a:r>
-              <a:rPr b="1"/>
-              <a:t>by you personally</a:t>
-            </a:r>
-            <a:r>
-              <a:rPr/>
-              <a:t> to </a:t>
-            </a:r>
-            <a:r>
-              <a:rPr>
-                <a:latin typeface="Courier"/>
-              </a:rPr>
-              <a:t>group-XX</a:t>
-            </a:r>
-          </a:p>
-          <a:p>
-            <a:pPr lvl="0"/>
-            <a:r>
-              <a:rPr/>
-              <a:t>✅ Your </a:t>
-            </a:r>
-            <a:r>
-              <a:rPr>
-                <a:latin typeface="Courier"/>
-              </a:rPr>
-              <a:t>user.name</a:t>
-            </a:r>
-            <a:r>
-              <a:rPr/>
-              <a:t> and </a:t>
-            </a:r>
-            <a:r>
-              <a:rPr>
-                <a:latin typeface="Courier"/>
-              </a:rPr>
-              <a:t>user.email</a:t>
-            </a:r>
-            <a:r>
-              <a:rPr/>
-              <a:t> written down to report</a:t>
-            </a:r>
-          </a:p>
-          <a:p>
-            <a:pPr lvl="0" indent="0" marL="0">
-              <a:buNone/>
-            </a:pPr>
-            <a:r>
-              <a:rPr/>
-              <a:t>“One commit pushed by you personally” means each of the three of you. Not one per group.</a:t>
-            </a:r>
-          </a:p>
-        </p:txBody>
-      </p:sp>
-    </p:spTree>
-  </p:cSld>
-</p:sld>
-</file>
-
-<file path=ppt/slides/slide32.xml><?xml version="1.0" encoding="utf-8"?>
+<file path=ppt/slides/slide35.xml><?xml version="1.0" encoding="utf-8"?>
 <p:sld xmlns:a="http://schemas.openxmlformats.org/drawingml/2006/main" xmlns:r="http://schemas.openxmlformats.org/officeDocument/2006/relationships" xmlns:p="http://schemas.openxmlformats.org/presentationml/2006/main">
   <p:cSld>
     <p:spTree>
@@ -6508,66 +7040,235 @@
             <p:ph type="title"/>
           </p:nvPr>
         </p:nvSpPr>
-        <p:spPr/>
-        <p:txBody>
-          <a:bodyPr/>
-          <a:lstStyle/>
-          <a:p>
-            <a:pPr lvl="0" indent="0" marL="0">
-              <a:buNone/>
-            </a:pPr>
-            <a:r>
-              <a:rPr/>
-              <a:t>Why the record matters here</a:t>
-            </a:r>
-          </a:p>
-        </p:txBody>
-      </p:sp>
-      <p:sp>
-        <p:nvSpPr>
-          <p:cNvPr id="3" name="Content Placeholder 2"/>
-          <p:cNvSpPr>
-            <a:spLocks noGrp="1"/>
-          </p:cNvSpPr>
+        <p:spPr>
+          <a:xfrm>
+            <a:off x="457201" y="204787"/>
+            <a:ext cx="3008313" cy="871538"/>
+          </a:xfrm>
+        </p:spPr>
+        <p:txBody>
+          <a:bodyPr/>
+          <a:lstStyle/>
+          <a:p>
+            <a:pPr lvl="0" indent="0" marL="0">
+              <a:buNone/>
+            </a:pPr>
+            <a:r>
+              <a:rPr>
+                <a:latin typeface="Courier"/>
+              </a:rPr>
+              <a:t>XX</a:t>
+            </a:r>
+            <a:r>
+              <a:rPr/>
+              <a:t> means </a:t>
+            </a:r>
+            <a:r>
+              <a:rPr i="1"/>
+              <a:t>your group number</a:t>
+            </a:r>
+          </a:p>
+        </p:txBody>
+      </p:sp>
+      <p:sp>
+        <p:nvSpPr>
+          <p:cNvPr id="4" name="Text Placeholder 3"/>
+          <p:cNvSpPr>
+            <a:spLocks noGrp="1"/>
+          </p:cNvSpPr>
+          <p:nvPr>
+            <p:ph idx="2" sz="half" type="body"/>
+          </p:nvPr>
+        </p:nvSpPr>
+        <p:spPr/>
+        <p:txBody>
+          <a:bodyPr/>
+          <a:lstStyle/>
+          <a:p>
+            <a:pPr lvl="0" indent="0" marL="0">
+              <a:buNone/>
+            </a:pPr>
+            <a:r>
+              <a:rPr/>
+              <a:t>Wherever a command on these slides shows </a:t>
+            </a:r>
+            <a:r>
+              <a:rPr b="1">
+                <a:latin typeface="Courier"/>
+              </a:rPr>
+              <a:t>XX</a:t>
+            </a:r>
+            <a:r>
+              <a:rPr/>
+              <a:t>, type your own two-digit group number instead.</a:t>
+            </a:r>
+          </a:p>
+        </p:txBody>
+      </p:sp>
+      <p:graphicFrame>
+        <p:nvGraphicFramePr>
+          <p:cNvPr id="6" name="Content Placeholder 5"/>
+          <p:cNvGraphicFramePr>
+            <a:graphicFrameLocks noGrp="1"/>
+          </p:cNvGraphicFramePr>
           <p:nvPr>
             <p:ph idx="1"/>
           </p:nvPr>
-        </p:nvSpPr>
-        <p:spPr/>
-        <p:txBody>
-          <a:bodyPr/>
-          <a:lstStyle/>
-          <a:p>
-            <a:pPr lvl="0" indent="0" marL="0">
-              <a:buNone/>
-            </a:pPr>
-            <a:r>
-              <a:rPr/>
-              <a:t>Group marks reward the group. This course checks that the group mark reflects what each member did, using four records — and one of them is your commit history.</a:t>
-            </a:r>
-          </a:p>
-          <a:p>
-            <a:pPr lvl="0" indent="0" marL="0">
-              <a:buNone/>
-            </a:pPr>
-            <a:r>
-              <a:rPr/>
-              <a:t>See </a:t>
-            </a:r>
-            <a:r>
-              <a:rPr>
-                <a:hlinkClick r:id="rId2"/>
-                <a:latin typeface="Courier"/>
-              </a:rPr>
-              <a:t>GROUP-ASSESSMENT.md</a:t>
-            </a:r>
-            <a:r>
-              <a:rPr/>
-              <a:t> for the full policy. The short version: work that cannot be attributed to you counts as work you did not do.</a:t>
-            </a:r>
-          </a:p>
-        </p:txBody>
-      </p:sp>
+        </p:nvGraphicFramePr>
+        <p:xfrm>
+          <a:off x="3568700" y="203200"/>
+          <a:ext cx="5105400" cy="4381500"/>
+        </p:xfrm>
+        <a:graphic>
+          <a:graphicData uri="http://schemas.openxmlformats.org/drawingml/2006/table">
+            <a:tbl>
+              <a:tblPr firstRow="1" bandRow="1">
+                <a:tableStyleId>{5C22544A-7EE6-4342-B048-85BDC9FD1C3A}</a:tableStyleId>
+              </a:tblPr>
+              <a:tblGrid>
+                <a:gridCol w="2552700"/>
+                <a:gridCol w="2552700"/>
+              </a:tblGrid>
+              <a:tr h="0">
+                <a:tc>
+                  <a:txBody>
+                    <a:bodyPr/>
+                    <a:lstStyle/>
+                    <a:p>
+                      <a:pPr lvl="0" indent="0" marL="0">
+                        <a:buNone/>
+                      </a:pPr>
+                      <a:r>
+                        <a:rPr/>
+                        <a:t>If you are</a:t>
+                      </a:r>
+                    </a:p>
+                  </a:txBody>
+                  <a:tcPr/>
+                </a:tc>
+                <a:tc>
+                  <a:txBody>
+                    <a:bodyPr/>
+                    <a:lstStyle/>
+                    <a:p>
+                      <a:pPr lvl="0" indent="0" marL="0">
+                        <a:buNone/>
+                      </a:pPr>
+                      <a:r>
+                        <a:rPr/>
+                        <a:t>you type</a:t>
+                      </a:r>
+                    </a:p>
+                  </a:txBody>
+                  <a:tcPr/>
+                </a:tc>
+              </a:tr>
+              <a:tr h="0">
+                <a:tc>
+                  <a:txBody>
+                    <a:bodyPr/>
+                    <a:lstStyle/>
+                    <a:p>
+                      <a:pPr lvl="0" indent="0" marL="0">
+                        <a:buNone/>
+                      </a:pPr>
+                      <a:r>
+                        <a:rPr/>
+                        <a:t>Group 1</a:t>
+                      </a:r>
+                    </a:p>
+                  </a:txBody>
+                </a:tc>
+                <a:tc>
+                  <a:txBody>
+                    <a:bodyPr/>
+                    <a:lstStyle/>
+                    <a:p>
+                      <a:pPr lvl="0" indent="0" marL="0">
+                        <a:buNone/>
+                      </a:pPr>
+                      <a:r>
+                        <a:rPr>
+                          <a:latin typeface="Courier"/>
+                        </a:rPr>
+                        <a:t>group-01</a:t>
+                      </a:r>
+                    </a:p>
+                  </a:txBody>
+                </a:tc>
+              </a:tr>
+              <a:tr h="0">
+                <a:tc>
+                  <a:txBody>
+                    <a:bodyPr/>
+                    <a:lstStyle/>
+                    <a:p>
+                      <a:pPr lvl="0" indent="0" marL="0">
+                        <a:buNone/>
+                      </a:pPr>
+                      <a:r>
+                        <a:rPr/>
+                        <a:t>Group 7</a:t>
+                      </a:r>
+                    </a:p>
+                  </a:txBody>
+                </a:tc>
+                <a:tc>
+                  <a:txBody>
+                    <a:bodyPr/>
+                    <a:lstStyle/>
+                    <a:p>
+                      <a:pPr lvl="0" indent="0" marL="0">
+                        <a:buNone/>
+                      </a:pPr>
+                      <a:r>
+                        <a:rPr>
+                          <a:latin typeface="Courier"/>
+                        </a:rPr>
+                        <a:t>group-07</a:t>
+                      </a:r>
+                    </a:p>
+                  </a:txBody>
+                </a:tc>
+              </a:tr>
+              <a:tr h="0">
+                <a:tc>
+                  <a:txBody>
+                    <a:bodyPr/>
+                    <a:lstStyle/>
+                    <a:p>
+                      <a:pPr lvl="0" indent="0" marL="0">
+                        <a:buNone/>
+                      </a:pPr>
+                      <a:r>
+                        <a:rPr/>
+                        <a:t>Group 10</a:t>
+                      </a:r>
+                    </a:p>
+                  </a:txBody>
+                </a:tc>
+                <a:tc>
+                  <a:txBody>
+                    <a:bodyPr/>
+                    <a:lstStyle/>
+                    <a:p>
+                      <a:pPr lvl="0" indent="0" marL="0">
+                        <a:buNone/>
+                      </a:pPr>
+                      <a:r>
+                        <a:rPr>
+                          <a:latin typeface="Courier"/>
+                        </a:rPr>
+                        <a:t>group-10</a:t>
+                      </a:r>
+                    </a:p>
+                  </a:txBody>
+                </a:tc>
+              </a:tr>
+            </a:tbl>
+          </a:graphicData>
+        </a:graphic>
+      </p:graphicFrame>
     </p:spTree>
   </p:cSld>
 </p:sld>
@@ -6592,30 +7293,52 @@
       </p:grpSpPr>
       <p:sp>
         <p:nvSpPr>
-          <p:cNvPr id="2" name="Title 1"/>
-          <p:cNvSpPr>
-            <a:spLocks noGrp="1"/>
-          </p:cNvSpPr>
-          <p:nvPr>
-            <p:ph type="title"/>
-          </p:nvPr>
-        </p:nvSpPr>
-        <p:spPr>
-          <a:xfrm>
-            <a:off x="722313" y="3305176"/>
-            <a:ext cx="7772400" cy="1021556"/>
-          </a:xfrm>
-        </p:spPr>
-        <p:txBody>
-          <a:bodyPr/>
-          <a:lstStyle/>
-          <a:p>
-            <a:pPr lvl="0" indent="0" marL="0">
-              <a:buNone/>
-            </a:pPr>
-            <a:r>
-              <a:rPr/>
-              <a:t>Git</a:t>
+          <p:cNvPr id="3" name="Content Placeholder 2"/>
+          <p:cNvSpPr>
+            <a:spLocks noGrp="1"/>
+          </p:cNvSpPr>
+          <p:nvPr>
+            <p:ph idx="1"/>
+          </p:nvPr>
+        </p:nvSpPr>
+        <p:spPr/>
+        <p:txBody>
+          <a:bodyPr/>
+          <a:lstStyle/>
+          <a:p>
+            <a:pPr lvl="0" indent="0" marL="0">
+              <a:buNone/>
+            </a:pPr>
+            <a:r>
+              <a:rPr/>
+              <a:t>Never type the letters </a:t>
+            </a:r>
+            <a:r>
+              <a:rPr>
+                <a:latin typeface="Courier"/>
+              </a:rPr>
+              <a:t>XX</a:t>
+            </a:r>
+            <a:r>
+              <a:rPr/>
+              <a:t>. Every example from here on uses </a:t>
+            </a:r>
+            <a:r>
+              <a:rPr b="1"/>
+              <a:t>group 07</a:t>
+            </a:r>
+            <a:r>
+              <a:rPr/>
+              <a:t> — substitute your own.</a:t>
+            </a:r>
+          </a:p>
+          <a:p>
+            <a:pPr lvl="0" indent="0" marL="0">
+              <a:buNone/>
+            </a:pPr>
+            <a:r>
+              <a:rPr/>
+              <a:t>You get your group number in Session 01. Do not guess it.</a:t>
             </a:r>
           </a:p>
         </p:txBody>
@@ -6662,7 +7385,7 @@
             </a:pPr>
             <a:r>
               <a:rPr/>
-              <a:t>Install Git</a:t>
+              <a:t>Why the record matters here</a:t>
             </a:r>
           </a:p>
         </p:txBody>
@@ -6687,33 +7410,27 @@
             </a:pPr>
             <a:r>
               <a:rPr/>
-              <a:t>download</a:t>
-            </a:r>
-          </a:p>
-          <a:p>
-            <a:pPr lvl="0" indent="0" marL="0">
-              <a:buNone/>
-            </a:pPr>
-            <a:r>
-              <a:rPr/>
-              <a:t>Go to </a:t>
-            </a:r>
-            <a:r>
-              <a:rPr b="1"/>
-              <a:t>git-scm.com/downloads</a:t>
-            </a:r>
-            <a:r>
-              <a:rPr/>
-              <a:t> and run the installer for your system. Accept every default.</a:t>
-            </a:r>
-          </a:p>
-          <a:p>
-            <a:pPr lvl="0" indent="0" marL="0">
-              <a:buNone/>
-            </a:pPr>
-            <a:r>
-              <a:rPr/>
-              <a:t>macOS may already have it. The next slide tells you how to check.</a:t>
+              <a:t>Group marks reward the group. This course checks that the group mark reflects what each member did, using four records — and one of them is your commit history.</a:t>
+            </a:r>
+          </a:p>
+          <a:p>
+            <a:pPr lvl="0" indent="0" marL="0">
+              <a:buNone/>
+            </a:pPr>
+            <a:r>
+              <a:rPr/>
+              <a:t>See </a:t>
+            </a:r>
+            <a:r>
+              <a:rPr>
+                <a:hlinkClick r:id="rId2"/>
+                <a:latin typeface="Courier"/>
+              </a:rPr>
+              <a:t>GROUP-ASSESSMENT.md</a:t>
+            </a:r>
+            <a:r>
+              <a:rPr/>
+              <a:t> for the full policy. The short version: work that cannot be attributed to you counts as work you did not do.</a:t>
             </a:r>
           </a:p>
         </p:txBody>
@@ -6750,174 +7467,22 @@
             <p:ph type="title"/>
           </p:nvPr>
         </p:nvSpPr>
-        <p:spPr/>
-        <p:txBody>
-          <a:bodyPr/>
-          <a:lstStyle/>
-          <a:p>
-            <a:pPr lvl="0" indent="0" marL="0">
-              <a:buNone/>
-            </a:pPr>
-            <a:r>
-              <a:rPr/>
-              <a:t>Tell git who you are</a:t>
-            </a:r>
-          </a:p>
-        </p:txBody>
-      </p:sp>
-      <p:sp>
-        <p:nvSpPr>
-          <p:cNvPr id="3" name="Content Placeholder 2"/>
-          <p:cNvSpPr>
-            <a:spLocks noGrp="1"/>
-          </p:cNvSpPr>
-          <p:nvPr>
-            <p:ph idx="1"/>
-          </p:nvPr>
-        </p:nvSpPr>
-        <p:spPr/>
-        <p:txBody>
-          <a:bodyPr/>
-          <a:lstStyle/>
-          <a:p>
-            <a:pPr lvl="0" indent="0" marL="0">
-              <a:buNone/>
-            </a:pPr>
-            <a:r>
-              <a:rPr/>
-              <a:t>VS Codium terminal</a:t>
-            </a:r>
-          </a:p>
-          <a:p>
-            <a:pPr lvl="0" indent="0">
-              <a:buNone/>
-            </a:pPr>
-            <a:r>
-              <a:rPr>
-                <a:solidFill>
-                  <a:srgbClr val="06287E"/>
-                </a:solidFill>
-                <a:latin typeface="Courier"/>
-              </a:rPr>
-              <a:t>git</a:t>
-            </a:r>
-            <a:r>
-              <a:rPr>
-                <a:latin typeface="Courier"/>
-              </a:rPr>
-              <a:t> </a:t>
-            </a:r>
-            <a:r>
-              <a:rPr>
-                <a:solidFill>
-                  <a:srgbClr val="7D9029"/>
-                </a:solidFill>
-                <a:latin typeface="Courier"/>
-              </a:rPr>
-              <a:t>--version</a:t>
-            </a:r>
-            <a:br/>
-            <a:r>
-              <a:rPr>
-                <a:solidFill>
-                  <a:srgbClr val="06287E"/>
-                </a:solidFill>
-                <a:latin typeface="Courier"/>
-              </a:rPr>
-              <a:t>git</a:t>
-            </a:r>
-            <a:r>
-              <a:rPr>
-                <a:latin typeface="Courier"/>
-              </a:rPr>
-              <a:t> config </a:t>
-            </a:r>
-            <a:r>
-              <a:rPr>
-                <a:solidFill>
-                  <a:srgbClr val="7D9029"/>
-                </a:solidFill>
-                <a:latin typeface="Courier"/>
-              </a:rPr>
-              <a:t>--global</a:t>
-            </a:r>
-            <a:r>
-              <a:rPr>
-                <a:latin typeface="Courier"/>
-              </a:rPr>
-              <a:t> user.name  </a:t>
-            </a:r>
-            <a:r>
-              <a:rPr>
-                <a:solidFill>
-                  <a:srgbClr val="4070A0"/>
-                </a:solidFill>
-                <a:latin typeface="Courier"/>
-              </a:rPr>
-              <a:t>"Your Full Name"</a:t>
-            </a:r>
-            <a:br/>
-            <a:r>
-              <a:rPr>
-                <a:solidFill>
-                  <a:srgbClr val="06287E"/>
-                </a:solidFill>
-                <a:latin typeface="Courier"/>
-              </a:rPr>
-              <a:t>git</a:t>
-            </a:r>
-            <a:r>
-              <a:rPr>
-                <a:latin typeface="Courier"/>
-              </a:rPr>
-              <a:t> config </a:t>
-            </a:r>
-            <a:r>
-              <a:rPr>
-                <a:solidFill>
-                  <a:srgbClr val="7D9029"/>
-                </a:solidFill>
-                <a:latin typeface="Courier"/>
-              </a:rPr>
-              <a:t>--global</a:t>
-            </a:r>
-            <a:r>
-              <a:rPr>
-                <a:latin typeface="Courier"/>
-              </a:rPr>
-              <a:t> user.email </a:t>
-            </a:r>
-            <a:r>
-              <a:rPr>
-                <a:solidFill>
-                  <a:srgbClr val="4070A0"/>
-                </a:solidFill>
-                <a:latin typeface="Courier"/>
-              </a:rPr>
-              <a:t>"your.name@hec.ca"</a:t>
-            </a:r>
-          </a:p>
-          <a:p>
-            <a:pPr lvl="0" indent="0" marL="0">
-              <a:buNone/>
-            </a:pPr>
-            <a:r>
-              <a:rPr b="1"/>
-              <a:t>Use your real name and your university email.</a:t>
-            </a:r>
-            <a:r>
-              <a:rPr/>
-              <a:t> Commits from </a:t>
-            </a:r>
-            <a:r>
-              <a:rPr>
-                <a:latin typeface="Courier"/>
-              </a:rPr>
-              <a:t>unknown@localhost</a:t>
-            </a:r>
-            <a:r>
-              <a:rPr/>
-              <a:t> cannot be attributed to you, and unattributed work counts as work you did not do.</a:t>
+        <p:spPr>
+          <a:xfrm>
+            <a:off x="722313" y="3305176"/>
+            <a:ext cx="7772400" cy="1021556"/>
+          </a:xfrm>
+        </p:spPr>
+        <p:txBody>
+          <a:bodyPr/>
+          <a:lstStyle/>
+          <a:p>
+            <a:pPr lvl="0" indent="0" marL="0">
+              <a:buNone/>
+            </a:pPr>
+            <a:r>
+              <a:rPr/>
+              <a:t>Git</a:t>
             </a:r>
           </a:p>
         </p:txBody>
@@ -6964,7 +7529,7 @@
             </a:pPr>
             <a:r>
               <a:rPr/>
-              <a:t>Report it to me</a:t>
+              <a:t>Install Git</a:t>
             </a:r>
           </a:p>
         </p:txBody>
@@ -6989,102 +7554,33 @@
             </a:pPr>
             <a:r>
               <a:rPr/>
-              <a:t>Bring your exact </a:t>
-            </a:r>
-            <a:r>
-              <a:rPr>
-                <a:latin typeface="Courier"/>
-              </a:rPr>
-              <a:t>user.name</a:t>
-            </a:r>
-            <a:r>
-              <a:rPr/>
-              <a:t> and </a:t>
-            </a:r>
-            <a:r>
-              <a:rPr>
-                <a:latin typeface="Courier"/>
-              </a:rPr>
-              <a:t>user.email</a:t>
-            </a:r>
-            <a:r>
-              <a:rPr/>
-              <a:t> to Session 02.</a:t>
-            </a:r>
-          </a:p>
-          <a:p>
-            <a:pPr lvl="0" indent="0">
-              <a:buNone/>
-            </a:pPr>
-            <a:r>
-              <a:rPr>
-                <a:solidFill>
-                  <a:srgbClr val="06287E"/>
-                </a:solidFill>
-                <a:latin typeface="Courier"/>
-              </a:rPr>
-              <a:t>git</a:t>
-            </a:r>
-            <a:r>
-              <a:rPr>
-                <a:latin typeface="Courier"/>
-              </a:rPr>
-              <a:t> config </a:t>
-            </a:r>
-            <a:r>
-              <a:rPr>
-                <a:solidFill>
-                  <a:srgbClr val="7D9029"/>
-                </a:solidFill>
-                <a:latin typeface="Courier"/>
-              </a:rPr>
-              <a:t>--global</a:t>
-            </a:r>
-            <a:r>
-              <a:rPr>
-                <a:latin typeface="Courier"/>
-              </a:rPr>
-              <a:t> user.name</a:t>
-            </a:r>
-            <a:br/>
-            <a:r>
-              <a:rPr>
-                <a:solidFill>
-                  <a:srgbClr val="06287E"/>
-                </a:solidFill>
-                <a:latin typeface="Courier"/>
-              </a:rPr>
-              <a:t>git</a:t>
-            </a:r>
-            <a:r>
-              <a:rPr>
-                <a:latin typeface="Courier"/>
-              </a:rPr>
-              <a:t> config </a:t>
-            </a:r>
-            <a:r>
-              <a:rPr>
-                <a:solidFill>
-                  <a:srgbClr val="7D9029"/>
-                </a:solidFill>
-                <a:latin typeface="Courier"/>
-              </a:rPr>
-              <a:t>--global</a:t>
-            </a:r>
-            <a:r>
-              <a:rPr>
-                <a:latin typeface="Courier"/>
-              </a:rPr>
-              <a:t> user.email</a:t>
-            </a:r>
-          </a:p>
-          <a:p>
-            <a:pPr lvl="0" indent="0" marL="0">
-              <a:buNone/>
-            </a:pPr>
-            <a:r>
-              <a:rPr/>
-              <a:t>If your git email differs from the one on the roster, your commits will not be matched to you, and the contribution report will show you as having done nothing. This takes ten seconds to prevent and is tedious to repair.</a:t>
+              <a:t>download</a:t>
+            </a:r>
+          </a:p>
+          <a:p>
+            <a:pPr lvl="0" indent="0" marL="0">
+              <a:buNone/>
+            </a:pPr>
+            <a:r>
+              <a:rPr/>
+              <a:t>Go to </a:t>
+            </a:r>
+            <a:r>
+              <a:rPr b="1"/>
+              <a:t>git-scm.com/downloads</a:t>
+            </a:r>
+            <a:r>
+              <a:rPr/>
+              <a:t> and run the installer for your system. Accept every default.</a:t>
+            </a:r>
+          </a:p>
+          <a:p>
+            <a:pPr lvl="0" indent="0" marL="0">
+              <a:buNone/>
+            </a:pPr>
+            <a:r>
+              <a:rPr/>
+              <a:t>macOS may already have it. The next slide tells you how to check.</a:t>
             </a:r>
           </a:p>
         </p:txBody>

--- a/02-geometry-of-least-squares/00-pre-session/slides-github-and-teamwork.pptx
+++ b/02-geometry-of-least-squares/00-pre-session/slides-github-and-teamwork.pptx
@@ -40,6 +40,7 @@
     <p:sldId id="288" r:id="rId34"/>
     <p:sldId id="289" r:id="rId35"/>
     <p:sldId id="290" r:id="rId36"/>
+    <p:sldId id="291" r:id="rId37"/>
   </p:sldIdLst>
   <p:sldSz cx="9144000" cy="5143500" type="screen16x9"/>
   <p:notesSz cx="6858000" cy="9144000"/>
@@ -5958,7 +5959,7 @@
             </a:pPr>
             <a:r>
               <a:rPr/>
-              <a:t>Rotate the roles</a:t>
+              <a:t>Everyone pushes</a:t>
             </a:r>
           </a:p>
         </p:txBody>
@@ -5983,73 +5984,149 @@
             </a:pPr>
             <a:r>
               <a:rPr/>
-              <a:t>Your group logs a Driver, an Analyst and a Reporter each session.</a:t>
-            </a:r>
-          </a:p>
-          <a:p>
-            <a:pPr lvl="0"/>
+              <a:t>There are </a:t>
+            </a:r>
             <a:r>
               <a:rPr b="1"/>
-              <a:t>Driver</a:t>
-            </a:r>
-            <a:r>
-              <a:rPr/>
-              <a:t> writes the code</a:t>
-            </a:r>
-          </a:p>
-          <a:p>
-            <a:pPr lvl="0"/>
-            <a:r>
-              <a:rPr b="1"/>
-              <a:t>Analyst</a:t>
-            </a:r>
-            <a:r>
-              <a:rPr/>
-              <a:t> decides the specification and owns the interpretation</a:t>
-            </a:r>
-          </a:p>
-          <a:p>
-            <a:pPr lvl="0"/>
-            <a:r>
-              <a:rPr b="1"/>
-              <a:t>Reporter</a:t>
-            </a:r>
-            <a:r>
-              <a:rPr/>
-              <a:t> writes the three sentences and presents </a:t>
-            </a:r>
-            <a:r>
-              <a:rPr i="1"/>
-              <a:t>if drawn</a:t>
-            </a:r>
-          </a:p>
-          <a:p>
-            <a:pPr lvl="0" indent="0" marL="0">
-              <a:buNone/>
-            </a:pPr>
-            <a:r>
-              <a:rPr/>
-              <a:t>Over ten sessions each of you should hold each role three or four times. Logged in </a:t>
-            </a:r>
-            <a:r>
-              <a:rPr>
-                <a:latin typeface="Courier"/>
-              </a:rPr>
-              <a:t>assessment/role-logs/gNN.md</a:t>
-            </a:r>
-            <a:r>
-              <a:rPr/>
-              <a:t> — again, your own number — checked with </a:t>
-            </a:r>
-            <a:r>
-              <a:rPr>
-                <a:latin typeface="Courier"/>
-              </a:rPr>
-              <a:t>python scripts/assess.py roles</a:t>
-            </a:r>
-            <a:r>
-              <a:rPr/>
-              <a:t>.</a:t>
+              <a:t>no assigned roles</a:t>
+            </a:r>
+            <a:r>
+              <a:rPr/>
+              <a:t>. Work on the lab together — and all three of you commit and push from your own machine, every week.</a:t>
+            </a:r>
+          </a:p>
+          <a:p>
+            <a:pPr lvl="0" indent="0" marL="0">
+              <a:buNone/>
+            </a:pPr>
+            <a:r>
+              <a:rPr/>
+              <a:t>VS Codium terminal · on your group branch</a:t>
+            </a:r>
+          </a:p>
+          <a:p>
+            <a:pPr lvl="0" indent="0">
+              <a:buNone/>
+            </a:pPr>
+            <a:r>
+              <a:rPr>
+                <a:solidFill>
+                  <a:srgbClr val="06287E"/>
+                </a:solidFill>
+                <a:latin typeface="Courier"/>
+              </a:rPr>
+              <a:t>git</a:t>
+            </a:r>
+            <a:r>
+              <a:rPr>
+                <a:latin typeface="Courier"/>
+              </a:rPr>
+              <a:t> add </a:t>
+            </a:r>
+            <a:r>
+              <a:rPr>
+                <a:solidFill>
+                  <a:srgbClr val="7D9029"/>
+                </a:solidFill>
+                <a:latin typeface="Courier"/>
+              </a:rPr>
+              <a:t>-A</a:t>
+            </a:r>
+            <a:r>
+              <a:rPr>
+                <a:latin typeface="Courier"/>
+              </a:rPr>
+              <a:t> </a:t>
+            </a:r>
+            <a:r>
+              <a:rPr b="1">
+                <a:solidFill>
+                  <a:srgbClr val="007020"/>
+                </a:solidFill>
+                <a:latin typeface="Courier"/>
+              </a:rPr>
+              <a:t>&amp;&amp;</a:t>
+            </a:r>
+            <a:r>
+              <a:rPr>
+                <a:latin typeface="Courier"/>
+              </a:rPr>
+              <a:t> </a:t>
+            </a:r>
+            <a:r>
+              <a:rPr>
+                <a:solidFill>
+                  <a:srgbClr val="06287E"/>
+                </a:solidFill>
+                <a:latin typeface="Courier"/>
+              </a:rPr>
+              <a:t>git</a:t>
+            </a:r>
+            <a:r>
+              <a:rPr>
+                <a:latin typeface="Courier"/>
+              </a:rPr>
+              <a:t> commit </a:t>
+            </a:r>
+            <a:r>
+              <a:rPr>
+                <a:solidFill>
+                  <a:srgbClr val="7D9029"/>
+                </a:solidFill>
+                <a:latin typeface="Courier"/>
+              </a:rPr>
+              <a:t>-m</a:t>
+            </a:r>
+            <a:r>
+              <a:rPr>
+                <a:latin typeface="Courier"/>
+              </a:rPr>
+              <a:t> </a:t>
+            </a:r>
+            <a:r>
+              <a:rPr>
+                <a:solidFill>
+                  <a:srgbClr val="4070A0"/>
+                </a:solidFill>
+                <a:latin typeface="Courier"/>
+              </a:rPr>
+              <a:t>"..."</a:t>
+            </a:r>
+            <a:r>
+              <a:rPr>
+                <a:latin typeface="Courier"/>
+              </a:rPr>
+              <a:t> </a:t>
+            </a:r>
+            <a:r>
+              <a:rPr b="1">
+                <a:solidFill>
+                  <a:srgbClr val="007020"/>
+                </a:solidFill>
+                <a:latin typeface="Courier"/>
+              </a:rPr>
+              <a:t>&amp;&amp;</a:t>
+            </a:r>
+            <a:r>
+              <a:rPr>
+                <a:latin typeface="Courier"/>
+              </a:rPr>
+              <a:t> </a:t>
+            </a:r>
+            <a:r>
+              <a:rPr>
+                <a:solidFill>
+                  <a:srgbClr val="06287E"/>
+                </a:solidFill>
+                <a:latin typeface="Courier"/>
+              </a:rPr>
+              <a:t>git</a:t>
+            </a:r>
+            <a:r>
+              <a:rPr>
+                <a:latin typeface="Courier"/>
+              </a:rPr>
+              <a:t> push</a:t>
             </a:r>
           </a:p>
         </p:txBody>
@@ -6205,7 +6282,7 @@
             </a:pPr>
             <a:r>
               <a:rPr/>
-              <a:t>Why “if drawn” matters</a:t>
+              <a:t>The grid</a:t>
             </a:r>
           </a:p>
         </p:txBody>
@@ -6229,25 +6306,37 @@
               <a:buNone/>
             </a:pPr>
             <a:r>
-              <a:rPr/>
-              <a:t>The presenter is </a:t>
-            </a:r>
-            <a:r>
-              <a:rPr b="1"/>
-              <a:t>drawn at random</a:t>
-            </a:r>
-            <a:r>
-              <a:rPr/>
-              <a:t> at the start of the slot.</a:t>
-            </a:r>
-          </a:p>
-          <a:p>
-            <a:pPr lvl="0" indent="0" marL="0">
-              <a:buNone/>
-            </a:pPr>
-            <a:r>
-              <a:rPr/>
-              <a:t>A group where one person understands the model has not learned the material. The draw makes shared understanding the only viable strategy — and it is announced now, in week two, so nobody is surprised in week twelve.</a:t>
+              <a:rPr>
+                <a:latin typeface="Courier"/>
+              </a:rPr>
+              <a:t>assess.py contributions</a:t>
+            </a:r>
+            <a:r>
+              <a:rPr/>
+              <a:t> builds a per-member, per-week table from the history:</a:t>
+            </a:r>
+          </a:p>
+          <a:p>
+            <a:pPr lvl="0" indent="0">
+              <a:buNone/>
+            </a:pPr>
+            <a:r>
+              <a:rPr>
+                <a:latin typeface="Courier"/>
+              </a:rPr>
+              <a:t>student          36  37  38  39  40   pushed
+A. Dubois         x   x   x   x   x   5/5
+B. Vogt           x   x   x   x   x   5/5
+C. Mensah         x   x   .   .   x   3/5</a:t>
+            </a:r>
+          </a:p>
+          <a:p>
+            <a:pPr lvl="0" indent="0" marL="0">
+              <a:buNone/>
+            </a:pPr>
+            <a:r>
+              <a:rPr/>
+              <a:t>Nobody fills in a form. A week where you pushed nothing simply shows as a gap.</a:t>
             </a:r>
           </a:p>
         </p:txBody>
@@ -6284,6 +6373,95 @@
             <p:ph type="title"/>
           </p:nvPr>
         </p:nvSpPr>
+        <p:spPr/>
+        <p:txBody>
+          <a:bodyPr/>
+          <a:lstStyle/>
+          <a:p>
+            <a:pPr lvl="0" indent="0" marL="0">
+              <a:buNone/>
+            </a:pPr>
+            <a:r>
+              <a:rPr/>
+              <a:t>Why “if drawn” matters</a:t>
+            </a:r>
+          </a:p>
+        </p:txBody>
+      </p:sp>
+      <p:sp>
+        <p:nvSpPr>
+          <p:cNvPr id="3" name="Content Placeholder 2"/>
+          <p:cNvSpPr>
+            <a:spLocks noGrp="1"/>
+          </p:cNvSpPr>
+          <p:nvPr>
+            <p:ph idx="1"/>
+          </p:nvPr>
+        </p:nvSpPr>
+        <p:spPr/>
+        <p:txBody>
+          <a:bodyPr/>
+          <a:lstStyle/>
+          <a:p>
+            <a:pPr lvl="0" indent="0" marL="0">
+              <a:buNone/>
+            </a:pPr>
+            <a:r>
+              <a:rPr/>
+              <a:t>The presenter is </a:t>
+            </a:r>
+            <a:r>
+              <a:rPr b="1"/>
+              <a:t>drawn at random</a:t>
+            </a:r>
+            <a:r>
+              <a:rPr/>
+              <a:t> at the start of the slot.</a:t>
+            </a:r>
+          </a:p>
+          <a:p>
+            <a:pPr lvl="0" indent="0" marL="0">
+              <a:buNone/>
+            </a:pPr>
+            <a:r>
+              <a:rPr/>
+              <a:t>A group where one person understands the model has not learned the material. The draw makes shared understanding the only viable strategy — and it is announced now, in week two, not week twelve.</a:t>
+            </a:r>
+          </a:p>
+        </p:txBody>
+      </p:sp>
+    </p:spTree>
+  </p:cSld>
+</p:sld>
+</file>
+
+<file path=ppt/slides/slide32.xml><?xml version="1.0" encoding="utf-8"?>
+<p:sld xmlns:a="http://schemas.openxmlformats.org/drawingml/2006/main" xmlns:r="http://schemas.openxmlformats.org/officeDocument/2006/relationships" xmlns:p="http://schemas.openxmlformats.org/presentationml/2006/main">
+  <p:cSld>
+    <p:spTree>
+      <p:nvGrpSpPr>
+        <p:cNvPr id="1" name=""/>
+        <p:cNvGrpSpPr/>
+        <p:nvPr/>
+      </p:nvGrpSpPr>
+      <p:grpSpPr>
+        <a:xfrm>
+          <a:off x="0" y="0"/>
+          <a:ext cx="0" cy="0"/>
+          <a:chOff x="0" y="0"/>
+          <a:chExt cx="0" cy="0"/>
+        </a:xfrm>
+      </p:grpSpPr>
+      <p:sp>
+        <p:nvSpPr>
+          <p:cNvPr id="2" name="Title 1"/>
+          <p:cNvSpPr>
+            <a:spLocks noGrp="1"/>
+          </p:cNvSpPr>
+          <p:nvPr>
+            <p:ph type="title"/>
+          </p:nvPr>
+        </p:nvSpPr>
         <p:spPr>
           <a:xfrm>
             <a:off x="722313" y="3305176"/>
@@ -6309,7 +6487,7 @@
 </p:sld>
 </file>
 
-<file path=ppt/slides/slide32.xml><?xml version="1.0" encoding="utf-8"?>
+<file path=ppt/slides/slide33.xml><?xml version="1.0" encoding="utf-8"?>
 <p:sld xmlns:a="http://schemas.openxmlformats.org/drawingml/2006/main" xmlns:r="http://schemas.openxmlformats.org/officeDocument/2006/relationships" xmlns:p="http://schemas.openxmlformats.org/presentationml/2006/main">
   <p:cSld>
     <p:spTree>
@@ -6598,53 +6776,6 @@
 </p:sld>
 </file>
 
-<file path=ppt/slides/slide33.xml><?xml version="1.0" encoding="utf-8"?>
-<p:sld xmlns:a="http://schemas.openxmlformats.org/drawingml/2006/main" xmlns:r="http://schemas.openxmlformats.org/officeDocument/2006/relationships" xmlns:p="http://schemas.openxmlformats.org/presentationml/2006/main">
-  <p:cSld>
-    <p:spTree>
-      <p:nvGrpSpPr>
-        <p:cNvPr id="1" name=""/>
-        <p:cNvGrpSpPr/>
-        <p:nvPr/>
-      </p:nvGrpSpPr>
-      <p:grpSpPr>
-        <a:xfrm>
-          <a:off x="0" y="0"/>
-          <a:ext cx="0" cy="0"/>
-          <a:chOff x="0" y="0"/>
-          <a:chExt cx="0" cy="0"/>
-        </a:xfrm>
-      </p:grpSpPr>
-      <p:sp>
-        <p:nvSpPr>
-          <p:cNvPr id="3" name="Content Placeholder 2"/>
-          <p:cNvSpPr>
-            <a:spLocks noGrp="1"/>
-          </p:cNvSpPr>
-          <p:nvPr>
-            <p:ph idx="1"/>
-          </p:nvPr>
-        </p:nvSpPr>
-        <p:spPr/>
-        <p:txBody>
-          <a:bodyPr/>
-          <a:lstStyle/>
-          <a:p>
-            <a:pPr lvl="0" indent="0" marL="0">
-              <a:buNone/>
-            </a:pPr>
-            <a:r>
-              <a:rPr/>
-              <a:t>Still stuck? Ask Qwen — it is good at git, and it runs on your laptop.</a:t>
-            </a:r>
-          </a:p>
-        </p:txBody>
-      </p:sp>
-    </p:spTree>
-  </p:cSld>
-</p:sld>
-</file>
-
 <file path=ppt/slides/slide34.xml><?xml version="1.0" encoding="utf-8"?>
 <p:sld xmlns:a="http://schemas.openxmlformats.org/drawingml/2006/main" xmlns:r="http://schemas.openxmlformats.org/officeDocument/2006/relationships" xmlns:p="http://schemas.openxmlformats.org/presentationml/2006/main">
   <p:cSld>
@@ -6664,31 +6795,6 @@
       </p:grpSpPr>
       <p:sp>
         <p:nvSpPr>
-          <p:cNvPr id="2" name="Title 1"/>
-          <p:cNvSpPr>
-            <a:spLocks noGrp="1"/>
-          </p:cNvSpPr>
-          <p:nvPr>
-            <p:ph type="title"/>
-          </p:nvPr>
-        </p:nvSpPr>
-        <p:spPr/>
-        <p:txBody>
-          <a:bodyPr/>
-          <a:lstStyle/>
-          <a:p>
-            <a:pPr lvl="0" indent="0" marL="0">
-              <a:buNone/>
-            </a:pPr>
-            <a:r>
-              <a:rPr/>
-              <a:t>Before Session 02</a:t>
-            </a:r>
-          </a:p>
-        </p:txBody>
-      </p:sp>
-      <p:sp>
-        <p:nvSpPr>
           <p:cNvPr id="3" name="Content Placeholder 2"/>
           <p:cNvSpPr>
             <a:spLocks noGrp="1"/>
@@ -6702,123 +6808,12 @@
           <a:bodyPr/>
           <a:lstStyle/>
           <a:p>
-            <a:pPr lvl="0"/>
-            <a:r>
-              <a:rPr/>
-              <a:t>✅ Git installed, </a:t>
-            </a:r>
-            <a:r>
-              <a:rPr>
-                <a:latin typeface="Courier"/>
-              </a:rPr>
-              <a:t>user.name</a:t>
-            </a:r>
-            <a:r>
-              <a:rPr/>
-              <a:t> and </a:t>
-            </a:r>
-            <a:r>
-              <a:rPr>
-                <a:latin typeface="Courier"/>
-              </a:rPr>
-              <a:t>user.email</a:t>
-            </a:r>
-            <a:r>
-              <a:rPr/>
-              <a:t> set to your real details</a:t>
-            </a:r>
-          </a:p>
-          <a:p>
-            <a:pPr lvl="0"/>
-            <a:r>
-              <a:rPr/>
-              <a:t>✅ GitHub account with two-factor authentication</a:t>
-            </a:r>
-          </a:p>
-          <a:p>
-            <a:pPr lvl="0"/>
-            <a:r>
-              <a:rPr/>
-              <a:t>✅ </a:t>
-            </a:r>
-            <a:r>
-              <a:rPr b="1"/>
-              <a:t>GitHub username sent to me</a:t>
-            </a:r>
-            <a:r>
-              <a:rPr/>
-              <a:t> — you cannot push until I add you</a:t>
-            </a:r>
-          </a:p>
-          <a:p>
-            <a:pPr lvl="0"/>
-            <a:r>
-              <a:rPr/>
-              <a:t>✅ Course repository cloned; the Session 01 ZIP folder deleted</a:t>
-            </a:r>
-          </a:p>
-          <a:p>
-            <a:pPr lvl="0"/>
-            <a:r>
-              <a:rPr/>
-              <a:t>✅ Your group branch checked out — your own number, not </a:t>
-            </a:r>
-            <a:r>
-              <a:rPr>
-                <a:latin typeface="Courier"/>
-              </a:rPr>
-              <a:t>XX</a:t>
-            </a:r>
-          </a:p>
-          <a:p>
-            <a:pPr lvl="0"/>
-            <a:r>
-              <a:rPr/>
-              <a:t>✅ One commit pushed </a:t>
-            </a:r>
-            <a:r>
-              <a:rPr b="1"/>
-              <a:t>by you personally</a:t>
-            </a:r>
-            <a:r>
-              <a:rPr/>
-              <a:t> to your group branch</a:t>
-            </a:r>
-          </a:p>
-          <a:p>
-            <a:pPr lvl="0"/>
-            <a:r>
-              <a:rPr/>
-              <a:t>✅ Your </a:t>
-            </a:r>
-            <a:r>
-              <a:rPr>
-                <a:latin typeface="Courier"/>
-              </a:rPr>
-              <a:t>user.name</a:t>
-            </a:r>
-            <a:r>
-              <a:rPr/>
-              <a:t> and </a:t>
-            </a:r>
-            <a:r>
-              <a:rPr>
-                <a:latin typeface="Courier"/>
-              </a:rPr>
-              <a:t>user.email</a:t>
-            </a:r>
-            <a:r>
-              <a:rPr/>
-              <a:t> written down to report</a:t>
-            </a:r>
-          </a:p>
-          <a:p>
-            <a:pPr lvl="0" indent="0" marL="0">
-              <a:buNone/>
-            </a:pPr>
-            <a:r>
-              <a:rPr/>
-              <a:t>“One commit pushed by you personally” means each of the three of you. Not one per group.</a:t>
+            <a:pPr lvl="0" indent="0" marL="0">
+              <a:buNone/>
+            </a:pPr>
+            <a:r>
+              <a:rPr/>
+              <a:t>Still stuck? Ask Qwen — it is good at git, and it runs on your laptop.</a:t>
             </a:r>
           </a:p>
         </p:txBody>
@@ -6829,6 +6824,189 @@
 </file>
 
 <file path=ppt/slides/slide35.xml><?xml version="1.0" encoding="utf-8"?>
+<p:sld xmlns:a="http://schemas.openxmlformats.org/drawingml/2006/main" xmlns:r="http://schemas.openxmlformats.org/officeDocument/2006/relationships" xmlns:p="http://schemas.openxmlformats.org/presentationml/2006/main">
+  <p:cSld>
+    <p:spTree>
+      <p:nvGrpSpPr>
+        <p:cNvPr id="1" name=""/>
+        <p:cNvGrpSpPr/>
+        <p:nvPr/>
+      </p:nvGrpSpPr>
+      <p:grpSpPr>
+        <a:xfrm>
+          <a:off x="0" y="0"/>
+          <a:ext cx="0" cy="0"/>
+          <a:chOff x="0" y="0"/>
+          <a:chExt cx="0" cy="0"/>
+        </a:xfrm>
+      </p:grpSpPr>
+      <p:sp>
+        <p:nvSpPr>
+          <p:cNvPr id="2" name="Title 1"/>
+          <p:cNvSpPr>
+            <a:spLocks noGrp="1"/>
+          </p:cNvSpPr>
+          <p:nvPr>
+            <p:ph type="title"/>
+          </p:nvPr>
+        </p:nvSpPr>
+        <p:spPr/>
+        <p:txBody>
+          <a:bodyPr/>
+          <a:lstStyle/>
+          <a:p>
+            <a:pPr lvl="0" indent="0" marL="0">
+              <a:buNone/>
+            </a:pPr>
+            <a:r>
+              <a:rPr/>
+              <a:t>Before Session 02</a:t>
+            </a:r>
+          </a:p>
+        </p:txBody>
+      </p:sp>
+      <p:sp>
+        <p:nvSpPr>
+          <p:cNvPr id="3" name="Content Placeholder 2"/>
+          <p:cNvSpPr>
+            <a:spLocks noGrp="1"/>
+          </p:cNvSpPr>
+          <p:nvPr>
+            <p:ph idx="1"/>
+          </p:nvPr>
+        </p:nvSpPr>
+        <p:spPr/>
+        <p:txBody>
+          <a:bodyPr/>
+          <a:lstStyle/>
+          <a:p>
+            <a:pPr lvl="0"/>
+            <a:r>
+              <a:rPr/>
+              <a:t>✅ Git installed, </a:t>
+            </a:r>
+            <a:r>
+              <a:rPr>
+                <a:latin typeface="Courier"/>
+              </a:rPr>
+              <a:t>user.name</a:t>
+            </a:r>
+            <a:r>
+              <a:rPr/>
+              <a:t> and </a:t>
+            </a:r>
+            <a:r>
+              <a:rPr>
+                <a:latin typeface="Courier"/>
+              </a:rPr>
+              <a:t>user.email</a:t>
+            </a:r>
+            <a:r>
+              <a:rPr/>
+              <a:t> set to your real details</a:t>
+            </a:r>
+          </a:p>
+          <a:p>
+            <a:pPr lvl="0"/>
+            <a:r>
+              <a:rPr/>
+              <a:t>✅ GitHub account with two-factor authentication</a:t>
+            </a:r>
+          </a:p>
+          <a:p>
+            <a:pPr lvl="0"/>
+            <a:r>
+              <a:rPr/>
+              <a:t>✅ </a:t>
+            </a:r>
+            <a:r>
+              <a:rPr b="1"/>
+              <a:t>GitHub username sent to me</a:t>
+            </a:r>
+            <a:r>
+              <a:rPr/>
+              <a:t> — you cannot push until I add you</a:t>
+            </a:r>
+          </a:p>
+          <a:p>
+            <a:pPr lvl="0"/>
+            <a:r>
+              <a:rPr/>
+              <a:t>✅ Course repository cloned; the Session 01 ZIP folder deleted</a:t>
+            </a:r>
+          </a:p>
+          <a:p>
+            <a:pPr lvl="0"/>
+            <a:r>
+              <a:rPr/>
+              <a:t>✅ Your group branch checked out — your own number, not </a:t>
+            </a:r>
+            <a:r>
+              <a:rPr>
+                <a:latin typeface="Courier"/>
+              </a:rPr>
+              <a:t>XX</a:t>
+            </a:r>
+          </a:p>
+          <a:p>
+            <a:pPr lvl="0"/>
+            <a:r>
+              <a:rPr/>
+              <a:t>✅ One commit pushed </a:t>
+            </a:r>
+            <a:r>
+              <a:rPr b="1"/>
+              <a:t>by you personally</a:t>
+            </a:r>
+            <a:r>
+              <a:rPr/>
+              <a:t> to your group branch</a:t>
+            </a:r>
+          </a:p>
+          <a:p>
+            <a:pPr lvl="0"/>
+            <a:r>
+              <a:rPr/>
+              <a:t>✅ Your </a:t>
+            </a:r>
+            <a:r>
+              <a:rPr>
+                <a:latin typeface="Courier"/>
+              </a:rPr>
+              <a:t>user.name</a:t>
+            </a:r>
+            <a:r>
+              <a:rPr/>
+              <a:t> and </a:t>
+            </a:r>
+            <a:r>
+              <a:rPr>
+                <a:latin typeface="Courier"/>
+              </a:rPr>
+              <a:t>user.email</a:t>
+            </a:r>
+            <a:r>
+              <a:rPr/>
+              <a:t> written down to report</a:t>
+            </a:r>
+          </a:p>
+          <a:p>
+            <a:pPr lvl="0" indent="0" marL="0">
+              <a:buNone/>
+            </a:pPr>
+            <a:r>
+              <a:rPr/>
+              <a:t>“One commit pushed by you personally” means each of the three of you. Not one per group.</a:t>
+            </a:r>
+          </a:p>
+        </p:txBody>
+      </p:sp>
+    </p:spTree>
+  </p:cSld>
+</p:sld>
+</file>
+
+<file path=ppt/slides/slide36.xml><?xml version="1.0" encoding="utf-8"?>
 <p:sld xmlns:a="http://schemas.openxmlformats.org/drawingml/2006/main" xmlns:r="http://schemas.openxmlformats.org/officeDocument/2006/relationships" xmlns:p="http://schemas.openxmlformats.org/presentationml/2006/main">
   <p:cSld>
     <p:spTree>

--- a/02-geometry-of-least-squares/00-pre-session/slides-github-and-teamwork.pptx
+++ b/02-geometry-of-least-squares/00-pre-session/slides-github-and-teamwork.pptx
@@ -4213,7 +4213,7 @@
               <a:rPr>
                 <a:latin typeface="Courier"/>
               </a:rPr>
-              <a:t>NN-session-name/02-lab/submissions/group-07/</a:t>
+              <a:t>NN-session-name/02-practice/submissions/group-07/</a:t>
             </a:r>
           </a:p>
         </p:txBody>
@@ -4998,7 +4998,7 @@
               <a:rPr>
                 <a:latin typeface="Courier"/>
               </a:rPr>
-              <a:t> 02-geometry-of-least-squares/02-lab/submissions/group-07</a:t>
+              <a:t> 02-geometry-of-least-squares/02-practice/submissions/group-07</a:t>
             </a:r>
             <a:br/>
             <a:r>
@@ -5060,7 +5060,7 @@
               <a:rPr>
                 <a:latin typeface="Courier"/>
               </a:rPr>
-              <a:t>  02-geometry-of-least-squares/02-lab/submissions/group-07/NOTES.md</a:t>
+              <a:t>  02-geometry-of-least-squares/02-practice/submissions/group-07/NOTES.md</a:t>
             </a:r>
             <a:br/>
             <a:br/>
@@ -5077,7 +5077,7 @@
               <a:rPr>
                 <a:latin typeface="Courier"/>
               </a:rPr>
-              <a:t> add 02-geometry-of-least-squares/02-lab/submissions/group-07/</a:t>
+              <a:t> add 02-geometry-of-least-squares/02-practice/submissions/group-07/</a:t>
             </a:r>
             <a:br/>
             <a:r>
@@ -5992,7 +5992,7 @@
             </a:r>
             <a:r>
               <a:rPr/>
-              <a:t>. Work on the lab together — and all three of you commit and push from your own machine, every week.</a:t>
+              <a:t>. Work on the practice together — and all three of you commit and push from your own machine, every week.</a:t>
             </a:r>
           </a:p>
           <a:p>

--- a/02-geometry-of-least-squares/00-pre-session/slides-github-and-teamwork.pptx
+++ b/02-geometry-of-least-squares/00-pre-session/slides-github-and-teamwork.pptx
@@ -941,15 +941,15 @@
         </p:nvSpPr>
         <p:spPr>
           <a:xfrm>
-            <a:off x="722313" y="3305176"/>
-            <a:ext cx="7772400" cy="1021556"/>
+            <a:off x="722313" y="1850000"/>
+            <a:ext cx="7772400" cy="1300000"/>
           </a:xfrm>
         </p:spPr>
         <p:txBody>
           <a:bodyPr anchor="t"/>
           <a:lstStyle>
             <a:lvl1pPr algn="l">
-              <a:defRPr sz="1850" b="1" cap="all"/>
+              <a:defRPr sz="2800" b="1" cap="none"/>
             </a:lvl1pPr>
           </a:lstStyle>
           <a:p>
@@ -972,8 +972,8 @@
         </p:nvSpPr>
         <p:spPr>
           <a:xfrm>
-            <a:off x="722313" y="2180035"/>
-            <a:ext cx="7772400" cy="1125140"/>
+            <a:off x="722313" y="3250000"/>
+            <a:ext cx="7772400" cy="700000"/>
           </a:xfrm>
         </p:spPr>
         <p:txBody>
@@ -3813,8 +3813,8 @@
         </p:nvSpPr>
         <p:spPr>
           <a:xfrm>
-            <a:off x="722313" y="3305176"/>
-            <a:ext cx="7772400" cy="1021556"/>
+            <a:off x="722313" y="1850000"/>
+            <a:ext cx="7772400" cy="1300000"/>
           </a:xfrm>
         </p:spPr>
         <p:txBody>
@@ -4351,8 +4351,8 @@
         </p:nvSpPr>
         <p:spPr>
           <a:xfrm>
-            <a:off x="722313" y="3305176"/>
-            <a:ext cx="7772400" cy="1021556"/>
+            <a:off x="722313" y="1850000"/>
+            <a:ext cx="7772400" cy="1300000"/>
           </a:xfrm>
         </p:spPr>
         <p:txBody>
@@ -4586,8 +4586,8 @@
         </p:nvSpPr>
         <p:spPr>
           <a:xfrm>
-            <a:off x="722313" y="3305176"/>
-            <a:ext cx="7772400" cy="1021556"/>
+            <a:off x="722313" y="1850000"/>
+            <a:ext cx="7772400" cy="1300000"/>
           </a:xfrm>
         </p:spPr>
         <p:txBody>
@@ -5405,8 +5405,8 @@
         </p:nvSpPr>
         <p:spPr>
           <a:xfrm>
-            <a:off x="722313" y="3305176"/>
-            <a:ext cx="7772400" cy="1021556"/>
+            <a:off x="722313" y="1850000"/>
+            <a:ext cx="7772400" cy="1300000"/>
           </a:xfrm>
         </p:spPr>
         <p:txBody>
@@ -6464,8 +6464,8 @@
         </p:nvSpPr>
         <p:spPr>
           <a:xfrm>
-            <a:off x="722313" y="3305176"/>
-            <a:ext cx="7772400" cy="1021556"/>
+            <a:off x="722313" y="1850000"/>
+            <a:ext cx="7772400" cy="1300000"/>
           </a:xfrm>
         </p:spPr>
         <p:txBody>
@@ -7647,8 +7647,8 @@
         </p:nvSpPr>
         <p:spPr>
           <a:xfrm>
-            <a:off x="722313" y="3305176"/>
-            <a:ext cx="7772400" cy="1021556"/>
+            <a:off x="722313" y="1850000"/>
+            <a:ext cx="7772400" cy="1300000"/>
           </a:xfrm>
         </p:spPr>
         <p:txBody>
